--- a/docs/Football_Analytics_API_-_Technical_Presentation.pptx
+++ b/docs/Football_Analytics_API_-_Technical_Presentation.pptx
@@ -18,8 +18,9 @@
     <p:sldId id="263" r:id="rId11"/>
     <p:sldId id="264" r:id="rId12"/>
     <p:sldId id="265" r:id="rId13"/>
-    <p:sldId id="266" r:id="rId14"/>
-    <p:sldId id="267" r:id="rId15"/>
+    <p:sldId id="268" r:id="rId14"/>
+    <p:sldId id="266" r:id="rId15"/>
+    <p:sldId id="267" r:id="rId16"/>
   </p:sldIdLst>
   <p:sldSz cx="9144000" cy="5143500"/>
   <p:notesSz cx="5143500" cy="9144000"/>
@@ -700,6 +701,84 @@
 </file>
 
 <file path=ppt/notesSlides/notesSlide12.xml><?xml version="1.0" encoding="utf-8"?>
+<p:notes xmlns:a="http://schemas.openxmlformats.org/drawingml/2006/main" xmlns:r="http://schemas.openxmlformats.org/officeDocument/2006/relationships" xmlns:p="http://schemas.openxmlformats.org/presentationml/2006/main">
+  <p:cSld>
+    <p:spTree>
+      <p:nvGrpSpPr>
+        <p:cNvPr id="1" name=""/>
+        <p:cNvGrpSpPr/>
+        <p:nvPr/>
+      </p:nvGrpSpPr>
+      <p:grpSpPr>
+        <a:xfrm>
+          <a:off x="0" y="0"/>
+          <a:ext cx="0" cy="0"/>
+          <a:chOff x="0" y="0"/>
+          <a:chExt cx="0" cy="0"/>
+        </a:xfrm>
+      </p:grpSpPr>
+      <p:sp>
+        <p:nvSpPr>
+          <p:cNvPr id="2" name="Slide Image Placeholder 1"/>
+          <p:cNvSpPr>
+            <a:spLocks noGrp="1" noRot="1" noChangeAspect="1"/>
+          </p:cNvSpPr>
+          <p:nvPr>
+            <p:ph type="sldImg"/>
+          </p:nvPr>
+        </p:nvSpPr>
+        <p:spPr/>
+      </p:sp>
+      <p:sp>
+        <p:nvSpPr>
+          <p:cNvPr id="3" name="Notes Placeholder 2"/>
+          <p:cNvSpPr>
+            <a:spLocks noGrp="1"/>
+          </p:cNvSpPr>
+          <p:nvPr>
+            <p:ph type="body" idx="1"/>
+          </p:nvPr>
+        </p:nvSpPr>
+        <p:spPr/>
+        <p:txBody>
+          <a:bodyPr/>
+          <a:lstStyle/>
+          <a:p>
+            <a:endParaRPr lang="en-US" dirty="0"/>
+          </a:p>
+        </p:txBody>
+      </p:sp>
+      <p:sp>
+        <p:nvSpPr>
+          <p:cNvPr id="4" name="Slide Number Placeholder 3"/>
+          <p:cNvSpPr>
+            <a:spLocks noGrp="1"/>
+          </p:cNvSpPr>
+          <p:nvPr>
+            <p:ph type="sldNum" sz="quarter" idx="10"/>
+          </p:nvPr>
+        </p:nvSpPr>
+        <p:spPr/>
+        <p:txBody>
+          <a:bodyPr/>
+          <a:lstStyle/>
+          <a:p>
+            <a:fld id="{F7021451-1387-4CA6-816F-3879F97B5CBC}" type="slidenum">
+              <a:rPr lang="en-US"/>
+            </a:fld>
+            <a:endParaRPr lang="en-US"/>
+          </a:p>
+        </p:txBody>
+      </p:sp>
+    </p:spTree>
+  </p:cSld>
+  <p:clrMapOvr>
+    <a:masterClrMapping/>
+  </p:clrMapOvr>
+</p:notes>
+</file>
+
+<file path=ppt/notesSlides/notesSlide13.xml><?xml version="1.0" encoding="utf-8"?>
 <p:notes xmlns:a="http://schemas.openxmlformats.org/drawingml/2006/main" xmlns:r="http://schemas.openxmlformats.org/officeDocument/2006/relationships" xmlns:p="http://schemas.openxmlformats.org/presentationml/2006/main">
   <p:cSld>
     <p:spTree>
@@ -2013,7 +2092,7 @@
         <p:spPr>
           <a:xfrm>
             <a:off x="771525" y="433090"/>
-            <a:ext cx="3321844" cy="276820"/>
+            <a:ext cx="3321844" cy="276860"/>
           </a:xfrm>
           <a:prstGeom prst="rect">
             <a:avLst/>
@@ -2030,7 +2109,7 @@
               <a:buNone/>
             </a:pPr>
             <a:r>
-              <a:rPr lang="en-US" sz="1600" b="1" dirty="0">
+              <a:rPr lang="en-US" b="1" dirty="0">
                 <a:solidFill>
                   <a:srgbClr val="1F2937"/>
                 </a:solidFill>
@@ -2040,7 +2119,14 @@
               </a:rPr>
               <a:t>API Documentation Overview</a:t>
             </a:r>
-            <a:endParaRPr lang="en-US" sz="1600" dirty="0"/>
+            <a:endParaRPr lang="en-US" b="1" dirty="0">
+              <a:solidFill>
+                <a:srgbClr val="1F2937"/>
+              </a:solidFill>
+              <a:latin typeface="Inter ExtraBold" pitchFamily="34" charset="0"/>
+              <a:ea typeface="Inter ExtraBold" pitchFamily="34" charset="-122"/>
+              <a:cs typeface="Inter ExtraBold" pitchFamily="34" charset="-120"/>
+            </a:endParaRPr>
           </a:p>
         </p:txBody>
       </p:sp>
@@ -2091,7 +2177,7 @@
         <p:spPr>
           <a:xfrm>
             <a:off x="571500" y="1143000"/>
-            <a:ext cx="8001000" cy="671513"/>
+            <a:ext cx="8001000" cy="725805"/>
           </a:xfrm>
           <a:prstGeom prst="rect">
             <a:avLst/>
@@ -2111,7 +2197,7 @@
               <a:buNone/>
             </a:pPr>
             <a:r>
-              <a:rPr lang="en-US" sz="1050" dirty="0">
+              <a:rPr lang="en-US" sz="1200" dirty="0">
                 <a:solidFill>
                   <a:srgbClr val="4B5563"/>
                 </a:solidFill>
@@ -2122,7 +2208,7 @@
               <a:t>The API Documentation is meticulously authored using </a:t>
             </a:r>
             <a:r>
-              <a:rPr lang="en-US" sz="1000" dirty="0">
+              <a:rPr lang="en-US" sz="1200" dirty="0">
                 <a:solidFill>
                   <a:srgbClr val="1F2937"/>
                 </a:solidFill>
@@ -2133,7 +2219,7 @@
               <a:t>LaTeX</a:t>
             </a:r>
             <a:r>
-              <a:rPr lang="en-US" sz="1050" dirty="0">
+              <a:rPr lang="en-US" sz="1200" dirty="0">
                 <a:solidFill>
                   <a:srgbClr val="4B5563"/>
                 </a:solidFill>
@@ -2144,7 +2230,7 @@
               <a:t> and delivered as a professional PDF document. It </a:t>
             </a:r>
             <a:r>
-              <a:rPr lang="en-US" sz="1050" dirty="0">
+              <a:rPr lang="en-US" sz="1200" dirty="0">
                 <a:solidFill>
                   <a:srgbClr val="4B5563"/>
                 </a:solidFill>
@@ -2154,7 +2240,14 @@
               </a:rPr>
               <a:t>serves as the definitive contract for consumers integrating with the Football Analytics API.</a:t>
             </a:r>
-            <a:endParaRPr lang="en-US" sz="1050" dirty="0"/>
+            <a:endParaRPr lang="en-US" sz="1200" dirty="0">
+              <a:solidFill>
+                <a:srgbClr val="4B5563"/>
+              </a:solidFill>
+              <a:latin typeface="Inter" pitchFamily="34" charset="0"/>
+              <a:ea typeface="Inter" pitchFamily="34" charset="-122"/>
+              <a:cs typeface="Inter" pitchFamily="34" charset="-120"/>
+            </a:endParaRPr>
           </a:p>
         </p:txBody>
       </p:sp>
@@ -2253,8 +2346,8 @@
         </p:nvSpPr>
         <p:spPr>
           <a:xfrm>
-            <a:off x="992981" y="2243138"/>
-            <a:ext cx="1793081" cy="173236"/>
+            <a:off x="993140" y="2243455"/>
+            <a:ext cx="2119630" cy="184150"/>
           </a:xfrm>
           <a:prstGeom prst="rect">
             <a:avLst/>
@@ -2271,7 +2364,7 @@
               <a:buNone/>
             </a:pPr>
             <a:r>
-              <a:rPr lang="en-US" sz="1000" dirty="0">
+              <a:rPr lang="en-US" sz="1200" dirty="0">
                 <a:solidFill>
                   <a:srgbClr val="1F2937"/>
                 </a:solidFill>
@@ -2281,7 +2374,14 @@
               </a:rPr>
               <a:t>Comprehensive Coverage</a:t>
             </a:r>
-            <a:endParaRPr lang="en-US" sz="1000" dirty="0"/>
+            <a:endParaRPr lang="en-US" sz="1200" dirty="0">
+              <a:solidFill>
+                <a:srgbClr val="1F2937"/>
+              </a:solidFill>
+              <a:latin typeface="Inter SemiBold" pitchFamily="34" charset="0"/>
+              <a:ea typeface="Inter SemiBold" pitchFamily="34" charset="-122"/>
+              <a:cs typeface="Inter SemiBold" pitchFamily="34" charset="-120"/>
+            </a:endParaRPr>
           </a:p>
         </p:txBody>
       </p:sp>
@@ -2318,7 +2418,7 @@
         <p:spPr>
           <a:xfrm>
             <a:off x="921544" y="2737842"/>
-            <a:ext cx="1985963" cy="514350"/>
+            <a:ext cx="1985963" cy="525145"/>
           </a:xfrm>
           <a:prstGeom prst="rect">
             <a:avLst/>
@@ -2338,7 +2438,7 @@
               <a:buNone/>
             </a:pPr>
             <a:r>
-              <a:rPr lang="en-US" sz="850" dirty="0">
+              <a:rPr lang="en-US" sz="950" dirty="0">
                 <a:solidFill>
                   <a:srgbClr val="4B5563"/>
                 </a:solidFill>
@@ -2349,7 +2449,7 @@
               <a:t>Details all </a:t>
             </a:r>
             <a:r>
-              <a:rPr lang="en-US" sz="800" dirty="0">
+              <a:rPr lang="en-US" sz="900" dirty="0">
                 <a:solidFill>
                   <a:srgbClr val="1F2937"/>
                 </a:solidFill>
@@ -2360,7 +2460,7 @@
               <a:t>20 RESTful endpoints</a:t>
             </a:r>
             <a:r>
-              <a:rPr lang="en-US" sz="850" dirty="0">
+              <a:rPr lang="en-US" sz="950" dirty="0">
                 <a:solidFill>
                   <a:srgbClr val="4B5563"/>
                 </a:solidFill>
@@ -2371,7 +2471,7 @@
               <a:t> across Teams, Players, Matches, </a:t>
             </a:r>
             <a:r>
-              <a:rPr lang="en-US" sz="850" dirty="0">
+              <a:rPr lang="en-US" sz="950" dirty="0">
                 <a:solidFill>
                   <a:srgbClr val="4B5563"/>
                 </a:solidFill>
@@ -2381,7 +2481,14 @@
               </a:rPr>
               <a:t>Analytics, and Auth.</a:t>
             </a:r>
-            <a:endParaRPr lang="en-US" sz="850" dirty="0"/>
+            <a:endParaRPr lang="en-US" sz="950" dirty="0">
+              <a:solidFill>
+                <a:srgbClr val="4B5563"/>
+              </a:solidFill>
+              <a:latin typeface="Inter" pitchFamily="34" charset="0"/>
+              <a:ea typeface="Inter" pitchFamily="34" charset="-122"/>
+              <a:cs typeface="Inter" pitchFamily="34" charset="-120"/>
+            </a:endParaRPr>
           </a:p>
         </p:txBody>
       </p:sp>
@@ -2418,7 +2525,7 @@
         <p:spPr>
           <a:xfrm>
             <a:off x="921544" y="3359348"/>
-            <a:ext cx="1985963" cy="514350"/>
+            <a:ext cx="1985963" cy="525145"/>
           </a:xfrm>
           <a:prstGeom prst="rect">
             <a:avLst/>
@@ -2438,7 +2545,7 @@
               <a:buNone/>
             </a:pPr>
             <a:r>
-              <a:rPr lang="en-US" sz="850" dirty="0">
+              <a:rPr lang="en-US" sz="950" dirty="0">
                 <a:solidFill>
                   <a:srgbClr val="4B5563"/>
                 </a:solidFill>
@@ -2446,21 +2553,10 @@
                 <a:ea typeface="Inter" pitchFamily="34" charset="-122"/>
                 <a:cs typeface="Inter" pitchFamily="34" charset="-120"/>
               </a:rPr>
-              <a:t>Clearly defines required and </a:t>
-            </a:r>
-            <a:r>
-              <a:rPr lang="en-US" sz="850" dirty="0">
-                <a:solidFill>
-                  <a:srgbClr val="4B5563"/>
-                </a:solidFill>
-                <a:latin typeface="Inter" pitchFamily="34" charset="0"/>
-                <a:ea typeface="Inter" pitchFamily="34" charset="-122"/>
-                <a:cs typeface="Inter" pitchFamily="34" charset="-120"/>
-              </a:rPr>
-              <a:t>optional </a:t>
-            </a:r>
-            <a:r>
-              <a:rPr lang="en-US" sz="800" dirty="0">
+              <a:t>Clearly defines required and optional </a:t>
+            </a:r>
+            <a:r>
+              <a:rPr lang="en-US" sz="900" dirty="0">
                 <a:solidFill>
                   <a:srgbClr val="1F2937"/>
                 </a:solidFill>
@@ -2471,7 +2567,7 @@
               <a:t>query parameters</a:t>
             </a:r>
             <a:r>
-              <a:rPr lang="en-US" sz="850" dirty="0">
+              <a:rPr lang="en-US" sz="950" dirty="0">
                 <a:solidFill>
                   <a:srgbClr val="4B5563"/>
                 </a:solidFill>
@@ -2482,7 +2578,7 @@
               <a:t> and path </a:t>
             </a:r>
             <a:r>
-              <a:rPr lang="en-US" sz="850" dirty="0">
+              <a:rPr lang="en-US" sz="950" dirty="0">
                 <a:solidFill>
                   <a:srgbClr val="4B5563"/>
                 </a:solidFill>
@@ -2492,7 +2588,14 @@
               </a:rPr>
               <a:t>variables.</a:t>
             </a:r>
-            <a:endParaRPr lang="en-US" sz="850" dirty="0"/>
+            <a:endParaRPr lang="en-US" sz="950" dirty="0">
+              <a:solidFill>
+                <a:srgbClr val="4B5563"/>
+              </a:solidFill>
+              <a:latin typeface="Inter" pitchFamily="34" charset="0"/>
+              <a:ea typeface="Inter" pitchFamily="34" charset="-122"/>
+              <a:cs typeface="Inter" pitchFamily="34" charset="-120"/>
+            </a:endParaRPr>
           </a:p>
         </p:txBody>
       </p:sp>
@@ -2529,7 +2632,7 @@
         <p:spPr>
           <a:xfrm>
             <a:off x="921544" y="3980855"/>
-            <a:ext cx="1985963" cy="342900"/>
+            <a:ext cx="1985963" cy="349885"/>
           </a:xfrm>
           <a:prstGeom prst="rect">
             <a:avLst/>
@@ -2549,7 +2652,7 @@
               <a:buNone/>
             </a:pPr>
             <a:r>
-              <a:rPr lang="en-US" sz="850" dirty="0">
+              <a:rPr lang="en-US" sz="950" dirty="0">
                 <a:solidFill>
                   <a:srgbClr val="4B5563"/>
                 </a:solidFill>
@@ -2560,7 +2663,7 @@
               <a:t>Explains the </a:t>
             </a:r>
             <a:r>
-              <a:rPr lang="en-US" sz="800" dirty="0">
+              <a:rPr lang="en-US" sz="900" dirty="0">
                 <a:solidFill>
                   <a:srgbClr val="1F2937"/>
                 </a:solidFill>
@@ -2571,7 +2674,7 @@
               <a:t>JWT Authentication</a:t>
             </a:r>
             <a:r>
-              <a:rPr lang="en-US" sz="850" dirty="0">
+              <a:rPr lang="en-US" sz="950" dirty="0">
                 <a:solidFill>
                   <a:srgbClr val="4B5563"/>
                 </a:solidFill>
@@ -2581,7 +2684,14 @@
               </a:rPr>
               <a:t> flow and header requirements.</a:t>
             </a:r>
-            <a:endParaRPr lang="en-US" sz="850" dirty="0"/>
+            <a:endParaRPr lang="en-US" sz="950" dirty="0">
+              <a:solidFill>
+                <a:srgbClr val="4B5563"/>
+              </a:solidFill>
+              <a:latin typeface="Inter" pitchFamily="34" charset="0"/>
+              <a:ea typeface="Inter" pitchFamily="34" charset="-122"/>
+              <a:cs typeface="Inter" pitchFamily="34" charset="-120"/>
+            </a:endParaRPr>
           </a:p>
         </p:txBody>
       </p:sp>
@@ -2681,7 +2791,7 @@
         <p:spPr>
           <a:xfrm>
             <a:off x="3769528" y="2243138"/>
-            <a:ext cx="1176933" cy="173236"/>
+            <a:ext cx="1193165" cy="184150"/>
           </a:xfrm>
           <a:prstGeom prst="rect">
             <a:avLst/>
@@ -2698,7 +2808,7 @@
               <a:buNone/>
             </a:pPr>
             <a:r>
-              <a:rPr lang="en-US" sz="1000" dirty="0">
+              <a:rPr lang="en-US" sz="1200" dirty="0">
                 <a:solidFill>
                   <a:srgbClr val="1F2937"/>
                 </a:solidFill>
@@ -2708,7 +2818,14 @@
               </a:rPr>
               <a:t>Developer Ready</a:t>
             </a:r>
-            <a:endParaRPr lang="en-US" sz="1000" dirty="0"/>
+            <a:endParaRPr lang="en-US" sz="1200" dirty="0">
+              <a:solidFill>
+                <a:srgbClr val="1F2937"/>
+              </a:solidFill>
+              <a:latin typeface="Inter SemiBold" pitchFamily="34" charset="0"/>
+              <a:ea typeface="Inter SemiBold" pitchFamily="34" charset="-122"/>
+              <a:cs typeface="Inter SemiBold" pitchFamily="34" charset="-120"/>
+            </a:endParaRPr>
           </a:p>
         </p:txBody>
       </p:sp>
@@ -2745,7 +2862,7 @@
         <p:spPr>
           <a:xfrm>
             <a:off x="3655228" y="2737842"/>
-            <a:ext cx="1990734" cy="342900"/>
+            <a:ext cx="1990734" cy="349885"/>
           </a:xfrm>
           <a:prstGeom prst="rect">
             <a:avLst/>
@@ -2765,7 +2882,7 @@
               <a:buNone/>
             </a:pPr>
             <a:r>
-              <a:rPr lang="en-US" sz="850" dirty="0">
+              <a:rPr lang="en-US" sz="950" dirty="0">
                 <a:solidFill>
                   <a:srgbClr val="4B5563"/>
                 </a:solidFill>
@@ -2776,7 +2893,7 @@
               <a:t>Provides exact </a:t>
             </a:r>
             <a:r>
-              <a:rPr lang="en-US" sz="800" dirty="0">
+              <a:rPr lang="en-US" sz="900" dirty="0">
                 <a:solidFill>
                   <a:srgbClr val="1F2937"/>
                 </a:solidFill>
@@ -2787,7 +2904,7 @@
               <a:t>example requests</a:t>
             </a:r>
             <a:r>
-              <a:rPr lang="en-US" sz="850" dirty="0">
+              <a:rPr lang="en-US" sz="950" dirty="0">
                 <a:solidFill>
                   <a:srgbClr val="4B5563"/>
                 </a:solidFill>
@@ -2797,7 +2914,14 @@
               </a:rPr>
               <a:t> for immediate testing.</a:t>
             </a:r>
-            <a:endParaRPr lang="en-US" sz="850" dirty="0"/>
+            <a:endParaRPr lang="en-US" sz="950" dirty="0">
+              <a:solidFill>
+                <a:srgbClr val="4B5563"/>
+              </a:solidFill>
+              <a:latin typeface="Inter" pitchFamily="34" charset="0"/>
+              <a:ea typeface="Inter" pitchFamily="34" charset="-122"/>
+              <a:cs typeface="Inter" pitchFamily="34" charset="-120"/>
+            </a:endParaRPr>
           </a:p>
         </p:txBody>
       </p:sp>
@@ -2834,7 +2958,7 @@
         <p:spPr>
           <a:xfrm>
             <a:off x="3655228" y="3187898"/>
-            <a:ext cx="1990734" cy="514350"/>
+            <a:ext cx="1990734" cy="525145"/>
           </a:xfrm>
           <a:prstGeom prst="rect">
             <a:avLst/>
@@ -2854,7 +2978,7 @@
               <a:buNone/>
             </a:pPr>
             <a:r>
-              <a:rPr lang="en-US" sz="850" dirty="0">
+              <a:rPr lang="en-US" sz="950" dirty="0">
                 <a:solidFill>
                   <a:srgbClr val="4B5563"/>
                 </a:solidFill>
@@ -2865,7 +2989,7 @@
               <a:t>Illustrates </a:t>
             </a:r>
             <a:r>
-              <a:rPr lang="en-US" sz="800" dirty="0">
+              <a:rPr lang="en-US" sz="900" dirty="0">
                 <a:solidFill>
                   <a:srgbClr val="1F2937"/>
                 </a:solidFill>
@@ -2873,21 +2997,10 @@
                 <a:ea typeface="Inter SemiBold" pitchFamily="34" charset="-122"/>
                 <a:cs typeface="Inter SemiBold" pitchFamily="34" charset="-120"/>
               </a:rPr>
-              <a:t>expected JSON </a:t>
-            </a:r>
-            <a:r>
-              <a:rPr lang="en-US" sz="800" dirty="0">
-                <a:solidFill>
-                  <a:srgbClr val="1F2937"/>
-                </a:solidFill>
-                <a:latin typeface="Inter SemiBold" pitchFamily="34" charset="0"/>
-                <a:ea typeface="Inter SemiBold" pitchFamily="34" charset="-122"/>
-                <a:cs typeface="Inter SemiBold" pitchFamily="34" charset="-120"/>
-              </a:rPr>
-              <a:t>responses</a:t>
-            </a:r>
-            <a:r>
-              <a:rPr lang="en-US" sz="850" dirty="0">
+              <a:t>expected JSON responses</a:t>
+            </a:r>
+            <a:r>
+              <a:rPr lang="en-US" sz="950" dirty="0">
                 <a:solidFill>
                   <a:srgbClr val="4B5563"/>
                 </a:solidFill>
@@ -2898,7 +3011,7 @@
               <a:t> for both success and </a:t>
             </a:r>
             <a:r>
-              <a:rPr lang="en-US" sz="850" dirty="0">
+              <a:rPr lang="en-US" sz="950" dirty="0">
                 <a:solidFill>
                   <a:srgbClr val="4B5563"/>
                 </a:solidFill>
@@ -2908,7 +3021,14 @@
               </a:rPr>
               <a:t>failure scenarios.</a:t>
             </a:r>
-            <a:endParaRPr lang="en-US" sz="850" dirty="0"/>
+            <a:endParaRPr lang="en-US" sz="950" dirty="0">
+              <a:solidFill>
+                <a:srgbClr val="4B5563"/>
+              </a:solidFill>
+              <a:latin typeface="Inter" pitchFamily="34" charset="0"/>
+              <a:ea typeface="Inter" pitchFamily="34" charset="-122"/>
+              <a:cs typeface="Inter" pitchFamily="34" charset="-120"/>
+            </a:endParaRPr>
           </a:p>
         </p:txBody>
       </p:sp>
@@ -2945,7 +3065,7 @@
         <p:spPr>
           <a:xfrm>
             <a:off x="3655228" y="3809405"/>
-            <a:ext cx="1990734" cy="342900"/>
+            <a:ext cx="1990734" cy="349885"/>
           </a:xfrm>
           <a:prstGeom prst="rect">
             <a:avLst/>
@@ -2965,7 +3085,7 @@
               <a:buNone/>
             </a:pPr>
             <a:r>
-              <a:rPr lang="en-US" sz="850" dirty="0">
+              <a:rPr lang="en-US" sz="950" dirty="0">
                 <a:solidFill>
                   <a:srgbClr val="4B5563"/>
                 </a:solidFill>
@@ -2976,7 +3096,7 @@
               <a:t>Documents standard HTTP </a:t>
             </a:r>
             <a:r>
-              <a:rPr lang="en-US" sz="800" dirty="0">
+              <a:rPr lang="en-US" sz="900" dirty="0">
                 <a:solidFill>
                   <a:srgbClr val="1F2937"/>
                 </a:solidFill>
@@ -2984,21 +3104,10 @@
                 <a:ea typeface="Inter SemiBold" pitchFamily="34" charset="-122"/>
                 <a:cs typeface="Inter SemiBold" pitchFamily="34" charset="-120"/>
               </a:rPr>
-              <a:t>error </a:t>
-            </a:r>
-            <a:r>
-              <a:rPr lang="en-US" sz="800" dirty="0">
-                <a:solidFill>
-                  <a:srgbClr val="1F2937"/>
-                </a:solidFill>
-                <a:latin typeface="Inter SemiBold" pitchFamily="34" charset="0"/>
-                <a:ea typeface="Inter SemiBold" pitchFamily="34" charset="-122"/>
-                <a:cs typeface="Inter SemiBold" pitchFamily="34" charset="-120"/>
-              </a:rPr>
-              <a:t>codes</a:t>
-            </a:r>
-            <a:r>
-              <a:rPr lang="en-US" sz="850" dirty="0">
+              <a:t>error codes</a:t>
+            </a:r>
+            <a:r>
+              <a:rPr lang="en-US" sz="950" dirty="0">
                 <a:solidFill>
                   <a:srgbClr val="4B5563"/>
                 </a:solidFill>
@@ -3008,7 +3117,14 @@
               </a:rPr>
               <a:t> (400, 401, 404, 500).</a:t>
             </a:r>
-            <a:endParaRPr lang="en-US" sz="850" dirty="0"/>
+            <a:endParaRPr lang="en-US" sz="950" dirty="0">
+              <a:solidFill>
+                <a:srgbClr val="4B5563"/>
+              </a:solidFill>
+              <a:latin typeface="Inter" pitchFamily="34" charset="0"/>
+              <a:ea typeface="Inter" pitchFamily="34" charset="-122"/>
+              <a:cs typeface="Inter" pitchFamily="34" charset="-120"/>
+            </a:endParaRPr>
           </a:p>
         </p:txBody>
       </p:sp>
@@ -3107,8 +3223,8 @@
         </p:nvSpPr>
         <p:spPr>
           <a:xfrm>
-            <a:off x="6426975" y="2243138"/>
-            <a:ext cx="1476970" cy="173236"/>
+            <a:off x="6426835" y="2243455"/>
+            <a:ext cx="1715135" cy="184150"/>
           </a:xfrm>
           <a:prstGeom prst="rect">
             <a:avLst/>
@@ -3125,7 +3241,7 @@
               <a:buNone/>
             </a:pPr>
             <a:r>
-              <a:rPr lang="en-US" sz="1000" dirty="0">
+              <a:rPr lang="en-US" sz="1200" dirty="0">
                 <a:solidFill>
                   <a:srgbClr val="1F2937"/>
                 </a:solidFill>
@@ -3135,7 +3251,14 @@
               </a:rPr>
               <a:t>Academic Formatting</a:t>
             </a:r>
-            <a:endParaRPr lang="en-US" sz="1000" dirty="0"/>
+            <a:endParaRPr lang="en-US" sz="1200" dirty="0">
+              <a:solidFill>
+                <a:srgbClr val="1F2937"/>
+              </a:solidFill>
+              <a:latin typeface="Inter SemiBold" pitchFamily="34" charset="0"/>
+              <a:ea typeface="Inter SemiBold" pitchFamily="34" charset="-122"/>
+              <a:cs typeface="Inter SemiBold" pitchFamily="34" charset="-120"/>
+            </a:endParaRPr>
           </a:p>
         </p:txBody>
       </p:sp>
@@ -3172,7 +3295,7 @@
         <p:spPr>
           <a:xfrm>
             <a:off x="6398400" y="2737842"/>
-            <a:ext cx="1995478" cy="342900"/>
+            <a:ext cx="1995478" cy="349885"/>
           </a:xfrm>
           <a:prstGeom prst="rect">
             <a:avLst/>
@@ -3192,7 +3315,7 @@
               <a:buNone/>
             </a:pPr>
             <a:r>
-              <a:rPr lang="en-US" sz="850" dirty="0">
+              <a:rPr lang="en-US" sz="950" dirty="0">
                 <a:solidFill>
                   <a:srgbClr val="4B5563"/>
                 </a:solidFill>
@@ -3203,7 +3326,7 @@
               <a:t>Typeset in </a:t>
             </a:r>
             <a:r>
-              <a:rPr lang="en-US" sz="800" dirty="0">
+              <a:rPr lang="en-US" sz="900" dirty="0">
                 <a:solidFill>
                   <a:srgbClr val="1F2937"/>
                 </a:solidFill>
@@ -3214,7 +3337,7 @@
               <a:t>Times New Roman</a:t>
             </a:r>
             <a:r>
-              <a:rPr lang="en-US" sz="850" dirty="0">
+              <a:rPr lang="en-US" sz="950" dirty="0">
                 <a:solidFill>
                   <a:srgbClr val="4B5563"/>
                 </a:solidFill>
@@ -3225,7 +3348,7 @@
               <a:t> to </a:t>
             </a:r>
             <a:r>
-              <a:rPr lang="en-US" sz="850" dirty="0">
+              <a:rPr lang="en-US" sz="950" dirty="0">
                 <a:solidFill>
                   <a:srgbClr val="4B5563"/>
                 </a:solidFill>
@@ -3235,7 +3358,14 @@
               </a:rPr>
               <a:t>meet strict coursework guidelines.</a:t>
             </a:r>
-            <a:endParaRPr lang="en-US" sz="850" dirty="0"/>
+            <a:endParaRPr lang="en-US" sz="950" dirty="0">
+              <a:solidFill>
+                <a:srgbClr val="4B5563"/>
+              </a:solidFill>
+              <a:latin typeface="Inter" pitchFamily="34" charset="0"/>
+              <a:ea typeface="Inter" pitchFamily="34" charset="-122"/>
+              <a:cs typeface="Inter" pitchFamily="34" charset="-120"/>
+            </a:endParaRPr>
           </a:p>
         </p:txBody>
       </p:sp>
@@ -3272,7 +3402,7 @@
         <p:spPr>
           <a:xfrm>
             <a:off x="6398400" y="3187898"/>
-            <a:ext cx="1995478" cy="514350"/>
+            <a:ext cx="1995478" cy="525145"/>
           </a:xfrm>
           <a:prstGeom prst="rect">
             <a:avLst/>
@@ -3292,7 +3422,7 @@
               <a:buNone/>
             </a:pPr>
             <a:r>
-              <a:rPr lang="en-US" sz="850" dirty="0">
+              <a:rPr lang="en-US" sz="950" dirty="0">
                 <a:solidFill>
                   <a:srgbClr val="4B5563"/>
                 </a:solidFill>
@@ -3302,7 +3432,14 @@
               </a:rPr>
               <a:t>Structured with clear hierarchical headings and monospaced code blocks.</a:t>
             </a:r>
-            <a:endParaRPr lang="en-US" sz="850" dirty="0"/>
+            <a:endParaRPr lang="en-US" sz="950" dirty="0">
+              <a:solidFill>
+                <a:srgbClr val="4B5563"/>
+              </a:solidFill>
+              <a:latin typeface="Inter" pitchFamily="34" charset="0"/>
+              <a:ea typeface="Inter" pitchFamily="34" charset="-122"/>
+              <a:cs typeface="Inter" pitchFamily="34" charset="-120"/>
+            </a:endParaRPr>
           </a:p>
         </p:txBody>
       </p:sp>
@@ -3339,7 +3476,7 @@
         <p:spPr>
           <a:xfrm>
             <a:off x="6398400" y="3809405"/>
-            <a:ext cx="1995478" cy="342900"/>
+            <a:ext cx="1995478" cy="349885"/>
           </a:xfrm>
           <a:prstGeom prst="rect">
             <a:avLst/>
@@ -3359,7 +3496,7 @@
               <a:buNone/>
             </a:pPr>
             <a:r>
-              <a:rPr lang="en-US" sz="850" dirty="0">
+              <a:rPr lang="en-US" sz="950" dirty="0">
                 <a:solidFill>
                   <a:srgbClr val="4B5563"/>
                 </a:solidFill>
@@ -3367,21 +3504,10 @@
                 <a:ea typeface="Inter" pitchFamily="34" charset="-122"/>
                 <a:cs typeface="Inter" pitchFamily="34" charset="-120"/>
               </a:rPr>
-              <a:t>Maintained directly alongside the </a:t>
-            </a:r>
-            <a:r>
-              <a:rPr lang="en-US" sz="850" dirty="0">
-                <a:solidFill>
-                  <a:srgbClr val="4B5563"/>
-                </a:solidFill>
-                <a:latin typeface="Inter" pitchFamily="34" charset="0"/>
-                <a:ea typeface="Inter" pitchFamily="34" charset="-122"/>
-                <a:cs typeface="Inter" pitchFamily="34" charset="-120"/>
-              </a:rPr>
-              <a:t>codebase in the </a:t>
-            </a:r>
-            <a:r>
-              <a:rPr lang="en-US" sz="800" dirty="0">
+              <a:t>Maintained directly alongside the codebase in the </a:t>
+            </a:r>
+            <a:r>
+              <a:rPr lang="en-US" sz="900" dirty="0">
                 <a:solidFill>
                   <a:srgbClr val="1F2937"/>
                 </a:solidFill>
@@ -3392,7 +3518,7 @@
               <a:t>/docs</a:t>
             </a:r>
             <a:r>
-              <a:rPr lang="en-US" sz="850" dirty="0">
+              <a:rPr lang="en-US" sz="950" dirty="0">
                 <a:solidFill>
                   <a:srgbClr val="4B5563"/>
                 </a:solidFill>
@@ -3402,7 +3528,14 @@
               </a:rPr>
               <a:t> directory.</a:t>
             </a:r>
-            <a:endParaRPr lang="en-US" sz="850" dirty="0"/>
+            <a:endParaRPr lang="en-US" sz="950" dirty="0">
+              <a:solidFill>
+                <a:srgbClr val="4B5563"/>
+              </a:solidFill>
+              <a:latin typeface="Inter" pitchFamily="34" charset="0"/>
+              <a:ea typeface="Inter" pitchFamily="34" charset="-122"/>
+              <a:cs typeface="Inter" pitchFamily="34" charset="-120"/>
+            </a:endParaRPr>
           </a:p>
         </p:txBody>
       </p:sp>
@@ -3431,9 +3564,78 @@
           <a:chExt cx="0" cy="0"/>
         </a:xfrm>
       </p:grpSpPr>
+      <p:sp>
+        <p:nvSpPr>
+          <p:cNvPr id="3" name="Text 0"/>
+          <p:cNvSpPr/>
+          <p:nvPr/>
+        </p:nvSpPr>
+        <p:spPr>
+          <a:xfrm>
+            <a:off x="771525" y="433070"/>
+            <a:ext cx="4714875" cy="276860"/>
+          </a:xfrm>
+          <a:prstGeom prst="rect">
+            <a:avLst/>
+          </a:prstGeom>
+          <a:noFill/>
+        </p:spPr>
+        <p:txBody>
+          <a:bodyPr wrap="square" lIns="0" tIns="0" rIns="0" bIns="0" rtlCol="0" anchor="t">
+            <a:spAutoFit/>
+          </a:bodyPr>
+          <a:lstStyle/>
+          <a:p>
+            <a:pPr marL="0" indent="0" algn="l">
+              <a:buNone/>
+            </a:pPr>
+            <a:r>
+              <a:rPr lang="en-US" b="1" dirty="0">
+                <a:solidFill>
+                  <a:srgbClr val="1F2937"/>
+                </a:solidFill>
+                <a:latin typeface="Inter ExtraBold" pitchFamily="34" charset="0"/>
+                <a:ea typeface="Inter ExtraBold" pitchFamily="34" charset="-122"/>
+                <a:cs typeface="Inter ExtraBold" pitchFamily="34" charset="-120"/>
+              </a:rPr>
+              <a:t>API Documentation Overview（</a:t>
+            </a:r>
+            <a:r>
+              <a:rPr lang="en-US" altLang="zh-CN" b="1" dirty="0">
+                <a:solidFill>
+                  <a:srgbClr val="1F2937"/>
+                </a:solidFill>
+                <a:latin typeface="Inter ExtraBold" pitchFamily="34" charset="0"/>
+                <a:ea typeface="Inter ExtraBold" pitchFamily="34" charset="-122"/>
+                <a:cs typeface="Inter ExtraBold" pitchFamily="34" charset="-120"/>
+              </a:rPr>
+              <a:t>screenshot</a:t>
+            </a:r>
+            <a:r>
+              <a:rPr lang="en-US" b="1" dirty="0">
+                <a:solidFill>
+                  <a:srgbClr val="1F2937"/>
+                </a:solidFill>
+                <a:latin typeface="Inter ExtraBold" pitchFamily="34" charset="0"/>
+                <a:ea typeface="Inter ExtraBold" pitchFamily="34" charset="-122"/>
+                <a:cs typeface="Inter ExtraBold" pitchFamily="34" charset="-120"/>
+              </a:rPr>
+              <a:t>）</a:t>
+            </a:r>
+            <a:endParaRPr lang="en-US" b="1" dirty="0">
+              <a:solidFill>
+                <a:srgbClr val="1F2937"/>
+              </a:solidFill>
+              <a:latin typeface="Inter ExtraBold" pitchFamily="34" charset="0"/>
+              <a:ea typeface="Inter ExtraBold" pitchFamily="34" charset="-122"/>
+              <a:cs typeface="Inter ExtraBold" pitchFamily="34" charset="-120"/>
+            </a:endParaRPr>
+          </a:p>
+        </p:txBody>
+      </p:sp>
       <p:pic>
         <p:nvPicPr>
-          <p:cNvPr id="2" name="Image 0" descr="preencoded.png"/>
+          <p:cNvPr id="41" name="图片 40"/>
           <p:cNvPicPr>
             <a:picLocks noChangeAspect="1"/>
           </p:cNvPicPr>
@@ -3447,1239 +3649,14 @@
         </p:blipFill>
         <p:spPr>
           <a:xfrm>
-            <a:off x="0" y="0"/>
-            <a:ext cx="9144000" cy="5436394"/>
+            <a:off x="1893570" y="986155"/>
+            <a:ext cx="5003165" cy="3724275"/>
           </a:xfrm>
           <a:prstGeom prst="rect">
             <a:avLst/>
           </a:prstGeom>
         </p:spPr>
       </p:pic>
-      <p:sp>
-        <p:nvSpPr>
-          <p:cNvPr id="3" name="Text 0"/>
-          <p:cNvSpPr/>
-          <p:nvPr/>
-        </p:nvSpPr>
-        <p:spPr>
-          <a:xfrm>
-            <a:off x="771525" y="433090"/>
-            <a:ext cx="3127177" cy="276820"/>
-          </a:xfrm>
-          <a:prstGeom prst="rect">
-            <a:avLst/>
-          </a:prstGeom>
-          <a:noFill/>
-        </p:spPr>
-        <p:txBody>
-          <a:bodyPr wrap="square" lIns="0" tIns="0" rIns="0" bIns="0" rtlCol="0" anchor="t">
-            <a:spAutoFit/>
-          </a:bodyPr>
-          <a:lstStyle/>
-          <a:p>
-            <a:pPr marL="0" indent="0" algn="l">
-              <a:buNone/>
-            </a:pPr>
-            <a:r>
-              <a:rPr lang="en-US" sz="1600" b="1" dirty="0">
-                <a:solidFill>
-                  <a:srgbClr val="1F2937"/>
-                </a:solidFill>
-                <a:latin typeface="Inter ExtraBold" pitchFamily="34" charset="0"/>
-                <a:ea typeface="Inter ExtraBold" pitchFamily="34" charset="-122"/>
-                <a:cs typeface="Inter ExtraBold" pitchFamily="34" charset="-120"/>
-              </a:rPr>
-              <a:t>Technical Report Highlights</a:t>
-            </a:r>
-            <a:endParaRPr lang="en-US" sz="1600" dirty="0"/>
-          </a:p>
-        </p:txBody>
-      </p:sp>
-      <p:sp>
-        <p:nvSpPr>
-          <p:cNvPr id="4" name="Shape 1"/>
-          <p:cNvSpPr/>
-          <p:nvPr/>
-        </p:nvSpPr>
-        <p:spPr>
-          <a:xfrm>
-            <a:off x="571500" y="1071563"/>
-            <a:ext cx="3786188" cy="2407444"/>
-          </a:xfrm>
-          <a:prstGeom prst="rect">
-            <a:avLst/>
-          </a:prstGeom>
-          <a:solidFill>
-            <a:srgbClr val="F9FAFB"/>
-          </a:solidFill>
-        </p:spPr>
-      </p:sp>
-      <p:sp>
-        <p:nvSpPr>
-          <p:cNvPr id="5" name="Shape 2"/>
-          <p:cNvSpPr/>
-          <p:nvPr/>
-        </p:nvSpPr>
-        <p:spPr>
-          <a:xfrm>
-            <a:off x="571500" y="1071563"/>
-            <a:ext cx="3786188" cy="21431"/>
-          </a:xfrm>
-          <a:prstGeom prst="rect">
-            <a:avLst/>
-          </a:prstGeom>
-          <a:solidFill>
-            <a:srgbClr val="2563EB"/>
-          </a:solidFill>
-        </p:spPr>
-      </p:sp>
-      <p:pic>
-        <p:nvPicPr>
-          <p:cNvPr id="6" name="Image 1" descr="preencoded.png"/>
-          <p:cNvPicPr>
-            <a:picLocks noChangeAspect="1"/>
-          </p:cNvPicPr>
-          <p:nvPr/>
-        </p:nvPicPr>
-        <p:blipFill>
-          <a:blip r:embed="rId2"/>
-          <a:stretch>
-            <a:fillRect/>
-          </a:stretch>
-        </p:blipFill>
-        <p:spPr>
-          <a:xfrm>
-            <a:off x="750094" y="1268016"/>
-            <a:ext cx="171450" cy="171450"/>
-          </a:xfrm>
-          <a:prstGeom prst="rect">
-            <a:avLst/>
-          </a:prstGeom>
-        </p:spPr>
-      </p:pic>
-      <p:sp>
-        <p:nvSpPr>
-          <p:cNvPr id="7" name="Text 3"/>
-          <p:cNvSpPr/>
-          <p:nvPr/>
-        </p:nvSpPr>
-        <p:spPr>
-          <a:xfrm>
-            <a:off x="1007269" y="1250156"/>
-            <a:ext cx="1809155" cy="207169"/>
-          </a:xfrm>
-          <a:prstGeom prst="rect">
-            <a:avLst/>
-          </a:prstGeom>
-          <a:noFill/>
-        </p:spPr>
-        <p:txBody>
-          <a:bodyPr wrap="square" lIns="0" tIns="0" rIns="0" bIns="0" rtlCol="0" anchor="t">
-            <a:spAutoFit/>
-          </a:bodyPr>
-          <a:lstStyle/>
-          <a:p>
-            <a:pPr marL="0" indent="0" algn="l">
-              <a:buNone/>
-            </a:pPr>
-            <a:r>
-              <a:rPr lang="en-US" sz="1200" dirty="0">
-                <a:solidFill>
-                  <a:srgbClr val="1F2937"/>
-                </a:solidFill>
-                <a:latin typeface="Inter SemiBold" pitchFamily="34" charset="0"/>
-                <a:ea typeface="Inter SemiBold" pitchFamily="34" charset="-122"/>
-                <a:cs typeface="Inter SemiBold" pitchFamily="34" charset="-120"/>
-              </a:rPr>
-              <a:t>Architecture &amp; Design</a:t>
-            </a:r>
-            <a:endParaRPr lang="en-US" sz="1200" dirty="0"/>
-          </a:p>
-        </p:txBody>
-      </p:sp>
-      <p:pic>
-        <p:nvPicPr>
-          <p:cNvPr id="8" name="Image 2" descr="preencoded.png"/>
-          <p:cNvPicPr>
-            <a:picLocks noChangeAspect="1"/>
-          </p:cNvPicPr>
-          <p:nvPr/>
-        </p:nvPicPr>
-        <p:blipFill>
-          <a:blip r:embed="rId3"/>
-          <a:stretch>
-            <a:fillRect/>
-          </a:stretch>
-        </p:blipFill>
-        <p:spPr>
-          <a:xfrm>
-            <a:off x="785813" y="1607344"/>
-            <a:ext cx="100013" cy="100013"/>
-          </a:xfrm>
-          <a:prstGeom prst="rect">
-            <a:avLst/>
-          </a:prstGeom>
-        </p:spPr>
-      </p:pic>
-      <p:sp>
-        <p:nvSpPr>
-          <p:cNvPr id="9" name="Text 4"/>
-          <p:cNvSpPr/>
-          <p:nvPr/>
-        </p:nvSpPr>
-        <p:spPr>
-          <a:xfrm>
-            <a:off x="971550" y="1564481"/>
-            <a:ext cx="3207544" cy="578644"/>
-          </a:xfrm>
-          <a:prstGeom prst="rect">
-            <a:avLst/>
-          </a:prstGeom>
-          <a:noFill/>
-        </p:spPr>
-        <p:txBody>
-          <a:bodyPr wrap="square" lIns="0" tIns="0" rIns="0" bIns="0" rtlCol="0" anchor="t">
-            <a:spAutoFit/>
-          </a:bodyPr>
-          <a:lstStyle/>
-          <a:p>
-            <a:pPr marL="0" indent="0" algn="l">
-              <a:lnSpc>
-                <a:spcPct val="120000"/>
-              </a:lnSpc>
-              <a:buNone/>
-            </a:pPr>
-            <a:r>
-              <a:rPr lang="en-US" sz="950" dirty="0">
-                <a:solidFill>
-                  <a:srgbClr val="4B5563"/>
-                </a:solidFill>
-                <a:latin typeface="Inter" pitchFamily="34" charset="0"/>
-                <a:ea typeface="Inter" pitchFamily="34" charset="-122"/>
-                <a:cs typeface="Inter" pitchFamily="34" charset="-120"/>
-              </a:rPr>
-              <a:t>Detailed justification for selecting </a:t>
-            </a:r>
-            <a:r>
-              <a:rPr lang="en-US" sz="900" dirty="0">
-                <a:solidFill>
-                  <a:srgbClr val="1F2937"/>
-                </a:solidFill>
-                <a:latin typeface="Inter SemiBold" pitchFamily="34" charset="0"/>
-                <a:ea typeface="Inter SemiBold" pitchFamily="34" charset="-122"/>
-                <a:cs typeface="Inter SemiBold" pitchFamily="34" charset="-120"/>
-              </a:rPr>
-              <a:t>FastAPI</a:t>
-            </a:r>
-            <a:r>
-              <a:rPr lang="en-US" sz="950" dirty="0">
-                <a:solidFill>
-                  <a:srgbClr val="4B5563"/>
-                </a:solidFill>
-                <a:latin typeface="Inter" pitchFamily="34" charset="0"/>
-                <a:ea typeface="Inter" pitchFamily="34" charset="-122"/>
-                <a:cs typeface="Inter" pitchFamily="34" charset="-120"/>
-              </a:rPr>
-              <a:t> (asynchronous performance, automatic Swagger UI) </a:t>
-            </a:r>
-            <a:r>
-              <a:rPr lang="en-US" sz="950" dirty="0">
-                <a:solidFill>
-                  <a:srgbClr val="4B5563"/>
-                </a:solidFill>
-                <a:latin typeface="Inter" pitchFamily="34" charset="0"/>
-                <a:ea typeface="Inter" pitchFamily="34" charset="-122"/>
-                <a:cs typeface="Inter" pitchFamily="34" charset="-120"/>
-              </a:rPr>
-              <a:t>and </a:t>
-            </a:r>
-            <a:r>
-              <a:rPr lang="en-US" sz="900" dirty="0">
-                <a:solidFill>
-                  <a:srgbClr val="1F2937"/>
-                </a:solidFill>
-                <a:latin typeface="Inter SemiBold" pitchFamily="34" charset="0"/>
-                <a:ea typeface="Inter SemiBold" pitchFamily="34" charset="-122"/>
-                <a:cs typeface="Inter SemiBold" pitchFamily="34" charset="-120"/>
-              </a:rPr>
-              <a:t>SQLite</a:t>
-            </a:r>
-            <a:r>
-              <a:rPr lang="en-US" sz="950" dirty="0">
-                <a:solidFill>
-                  <a:srgbClr val="4B5563"/>
-                </a:solidFill>
-                <a:latin typeface="Inter" pitchFamily="34" charset="0"/>
-                <a:ea typeface="Inter" pitchFamily="34" charset="-122"/>
-                <a:cs typeface="Inter" pitchFamily="34" charset="-120"/>
-              </a:rPr>
-              <a:t> (zero-configuration portability).</a:t>
-            </a:r>
-            <a:endParaRPr lang="en-US" sz="950" dirty="0"/>
-          </a:p>
-        </p:txBody>
-      </p:sp>
-      <p:pic>
-        <p:nvPicPr>
-          <p:cNvPr id="10" name="Image 3" descr="preencoded.png"/>
-          <p:cNvPicPr>
-            <a:picLocks noChangeAspect="1"/>
-          </p:cNvPicPr>
-          <p:nvPr/>
-        </p:nvPicPr>
-        <p:blipFill>
-          <a:blip r:embed="rId3"/>
-          <a:stretch>
-            <a:fillRect/>
-          </a:stretch>
-        </p:blipFill>
-        <p:spPr>
-          <a:xfrm>
-            <a:off x="785813" y="2271713"/>
-            <a:ext cx="100013" cy="100013"/>
-          </a:xfrm>
-          <a:prstGeom prst="rect">
-            <a:avLst/>
-          </a:prstGeom>
-        </p:spPr>
-      </p:pic>
-      <p:sp>
-        <p:nvSpPr>
-          <p:cNvPr id="11" name="Text 5"/>
-          <p:cNvSpPr/>
-          <p:nvPr/>
-        </p:nvSpPr>
-        <p:spPr>
-          <a:xfrm>
-            <a:off x="971550" y="2228850"/>
-            <a:ext cx="3207544" cy="385763"/>
-          </a:xfrm>
-          <a:prstGeom prst="rect">
-            <a:avLst/>
-          </a:prstGeom>
-          <a:noFill/>
-        </p:spPr>
-        <p:txBody>
-          <a:bodyPr wrap="square" lIns="0" tIns="0" rIns="0" bIns="0" rtlCol="0" anchor="t">
-            <a:spAutoFit/>
-          </a:bodyPr>
-          <a:lstStyle/>
-          <a:p>
-            <a:pPr marL="0" indent="0" algn="l">
-              <a:lnSpc>
-                <a:spcPct val="120000"/>
-              </a:lnSpc>
-              <a:buNone/>
-            </a:pPr>
-            <a:r>
-              <a:rPr lang="en-US" sz="950" dirty="0">
-                <a:solidFill>
-                  <a:srgbClr val="4B5563"/>
-                </a:solidFill>
-                <a:latin typeface="Inter" pitchFamily="34" charset="0"/>
-                <a:ea typeface="Inter" pitchFamily="34" charset="-122"/>
-                <a:cs typeface="Inter" pitchFamily="34" charset="-120"/>
-              </a:rPr>
-              <a:t>Explanation of the layered architecture separating routing, business logic, and data access.</a:t>
-            </a:r>
-            <a:endParaRPr lang="en-US" sz="950" dirty="0"/>
-          </a:p>
-        </p:txBody>
-      </p:sp>
-      <p:pic>
-        <p:nvPicPr>
-          <p:cNvPr id="12" name="Image 4" descr="preencoded.png"/>
-          <p:cNvPicPr>
-            <a:picLocks noChangeAspect="1"/>
-          </p:cNvPicPr>
-          <p:nvPr/>
-        </p:nvPicPr>
-        <p:blipFill>
-          <a:blip r:embed="rId3"/>
-          <a:stretch>
-            <a:fillRect/>
-          </a:stretch>
-        </p:blipFill>
-        <p:spPr>
-          <a:xfrm>
-            <a:off x="785813" y="2743200"/>
-            <a:ext cx="100013" cy="100013"/>
-          </a:xfrm>
-          <a:prstGeom prst="rect">
-            <a:avLst/>
-          </a:prstGeom>
-        </p:spPr>
-      </p:pic>
-      <p:sp>
-        <p:nvSpPr>
-          <p:cNvPr id="13" name="Text 6"/>
-          <p:cNvSpPr/>
-          <p:nvPr/>
-        </p:nvSpPr>
-        <p:spPr>
-          <a:xfrm>
-            <a:off x="971550" y="2700338"/>
-            <a:ext cx="3207544" cy="578644"/>
-          </a:xfrm>
-          <a:prstGeom prst="rect">
-            <a:avLst/>
-          </a:prstGeom>
-          <a:noFill/>
-        </p:spPr>
-        <p:txBody>
-          <a:bodyPr wrap="square" lIns="0" tIns="0" rIns="0" bIns="0" rtlCol="0" anchor="t">
-            <a:spAutoFit/>
-          </a:bodyPr>
-          <a:lstStyle/>
-          <a:p>
-            <a:pPr marL="0" indent="0" algn="l">
-              <a:lnSpc>
-                <a:spcPct val="120000"/>
-              </a:lnSpc>
-              <a:buNone/>
-            </a:pPr>
-            <a:r>
-              <a:rPr lang="en-US" sz="950" dirty="0">
-                <a:solidFill>
-                  <a:srgbClr val="4B5563"/>
-                </a:solidFill>
-                <a:latin typeface="Inter" pitchFamily="34" charset="0"/>
-                <a:ea typeface="Inter" pitchFamily="34" charset="-122"/>
-                <a:cs typeface="Inter" pitchFamily="34" charset="-120"/>
-              </a:rPr>
-              <a:t>Analysis of the relational database schema, including the handling of dual foreign keys for matches.</a:t>
-            </a:r>
-            <a:endParaRPr lang="en-US" sz="950" dirty="0"/>
-          </a:p>
-        </p:txBody>
-      </p:sp>
-      <p:sp>
-        <p:nvSpPr>
-          <p:cNvPr id="14" name="Shape 7"/>
-          <p:cNvSpPr/>
-          <p:nvPr/>
-        </p:nvSpPr>
-        <p:spPr>
-          <a:xfrm>
-            <a:off x="571500" y="3671888"/>
-            <a:ext cx="3786188" cy="1743075"/>
-          </a:xfrm>
-          <a:prstGeom prst="rect">
-            <a:avLst/>
-          </a:prstGeom>
-          <a:solidFill>
-            <a:srgbClr val="F9FAFB"/>
-          </a:solidFill>
-        </p:spPr>
-      </p:sp>
-      <p:sp>
-        <p:nvSpPr>
-          <p:cNvPr id="15" name="Shape 8"/>
-          <p:cNvSpPr/>
-          <p:nvPr/>
-        </p:nvSpPr>
-        <p:spPr>
-          <a:xfrm>
-            <a:off x="571500" y="3671888"/>
-            <a:ext cx="3786188" cy="21431"/>
-          </a:xfrm>
-          <a:prstGeom prst="rect">
-            <a:avLst/>
-          </a:prstGeom>
-          <a:solidFill>
-            <a:srgbClr val="2563EB"/>
-          </a:solidFill>
-        </p:spPr>
-      </p:sp>
-      <p:pic>
-        <p:nvPicPr>
-          <p:cNvPr id="16" name="Image 5" descr="preencoded.png"/>
-          <p:cNvPicPr>
-            <a:picLocks noChangeAspect="1"/>
-          </p:cNvPicPr>
-          <p:nvPr/>
-        </p:nvPicPr>
-        <p:blipFill>
-          <a:blip r:embed="rId4"/>
-          <a:stretch>
-            <a:fillRect/>
-          </a:stretch>
-        </p:blipFill>
-        <p:spPr>
-          <a:xfrm>
-            <a:off x="750094" y="3868341"/>
-            <a:ext cx="214313" cy="171450"/>
-          </a:xfrm>
-          <a:prstGeom prst="rect">
-            <a:avLst/>
-          </a:prstGeom>
-        </p:spPr>
-      </p:pic>
-      <p:sp>
-        <p:nvSpPr>
-          <p:cNvPr id="17" name="Text 9"/>
-          <p:cNvSpPr/>
-          <p:nvPr/>
-        </p:nvSpPr>
-        <p:spPr>
-          <a:xfrm>
-            <a:off x="1050131" y="3850481"/>
-            <a:ext cx="1498402" cy="207169"/>
-          </a:xfrm>
-          <a:prstGeom prst="rect">
-            <a:avLst/>
-          </a:prstGeom>
-          <a:noFill/>
-        </p:spPr>
-        <p:txBody>
-          <a:bodyPr wrap="square" lIns="0" tIns="0" rIns="0" bIns="0" rtlCol="0" anchor="t">
-            <a:spAutoFit/>
-          </a:bodyPr>
-          <a:lstStyle/>
-          <a:p>
-            <a:pPr marL="0" indent="0" algn="l">
-              <a:buNone/>
-            </a:pPr>
-            <a:r>
-              <a:rPr lang="en-US" sz="1200" dirty="0">
-                <a:solidFill>
-                  <a:srgbClr val="1F2937"/>
-                </a:solidFill>
-                <a:latin typeface="Inter SemiBold" pitchFamily="34" charset="0"/>
-                <a:ea typeface="Inter SemiBold" pitchFamily="34" charset="-122"/>
-                <a:cs typeface="Inter SemiBold" pitchFamily="34" charset="-120"/>
-              </a:rPr>
-              <a:t>GenAI Declaration</a:t>
-            </a:r>
-            <a:endParaRPr lang="en-US" sz="1200" dirty="0"/>
-          </a:p>
-        </p:txBody>
-      </p:sp>
-      <p:pic>
-        <p:nvPicPr>
-          <p:cNvPr id="18" name="Image 6" descr="preencoded.png"/>
-          <p:cNvPicPr>
-            <a:picLocks noChangeAspect="1"/>
-          </p:cNvPicPr>
-          <p:nvPr/>
-        </p:nvPicPr>
-        <p:blipFill>
-          <a:blip r:embed="rId3"/>
-          <a:stretch>
-            <a:fillRect/>
-          </a:stretch>
-        </p:blipFill>
-        <p:spPr>
-          <a:xfrm>
-            <a:off x="785813" y="4207669"/>
-            <a:ext cx="100013" cy="100013"/>
-          </a:xfrm>
-          <a:prstGeom prst="rect">
-            <a:avLst/>
-          </a:prstGeom>
-        </p:spPr>
-      </p:pic>
-      <p:sp>
-        <p:nvSpPr>
-          <p:cNvPr id="19" name="Text 10"/>
-          <p:cNvSpPr/>
-          <p:nvPr/>
-        </p:nvSpPr>
-        <p:spPr>
-          <a:xfrm>
-            <a:off x="971550" y="4164806"/>
-            <a:ext cx="3207544" cy="385763"/>
-          </a:xfrm>
-          <a:prstGeom prst="rect">
-            <a:avLst/>
-          </a:prstGeom>
-          <a:noFill/>
-        </p:spPr>
-        <p:txBody>
-          <a:bodyPr wrap="square" lIns="0" tIns="0" rIns="0" bIns="0" rtlCol="0" anchor="t">
-            <a:spAutoFit/>
-          </a:bodyPr>
-          <a:lstStyle/>
-          <a:p>
-            <a:pPr marL="0" indent="0" algn="l">
-              <a:lnSpc>
-                <a:spcPct val="120000"/>
-              </a:lnSpc>
-              <a:buNone/>
-            </a:pPr>
-            <a:r>
-              <a:rPr lang="en-US" sz="950" dirty="0">
-                <a:solidFill>
-                  <a:srgbClr val="4B5563"/>
-                </a:solidFill>
-                <a:latin typeface="Inter" pitchFamily="34" charset="0"/>
-                <a:ea typeface="Inter" pitchFamily="34" charset="-122"/>
-                <a:cs typeface="Inter" pitchFamily="34" charset="-120"/>
-              </a:rPr>
-              <a:t>Transparent disclosure of AI assistance in code scaffolding and documentation formatting.</a:t>
-            </a:r>
-            <a:endParaRPr lang="en-US" sz="950" dirty="0"/>
-          </a:p>
-        </p:txBody>
-      </p:sp>
-      <p:pic>
-        <p:nvPicPr>
-          <p:cNvPr id="20" name="Image 7" descr="preencoded.png"/>
-          <p:cNvPicPr>
-            <a:picLocks noChangeAspect="1"/>
-          </p:cNvPicPr>
-          <p:nvPr/>
-        </p:nvPicPr>
-        <p:blipFill>
-          <a:blip r:embed="rId3"/>
-          <a:stretch>
-            <a:fillRect/>
-          </a:stretch>
-        </p:blipFill>
-        <p:spPr>
-          <a:xfrm>
-            <a:off x="785813" y="4679156"/>
-            <a:ext cx="100013" cy="100013"/>
-          </a:xfrm>
-          <a:prstGeom prst="rect">
-            <a:avLst/>
-          </a:prstGeom>
-        </p:spPr>
-      </p:pic>
-      <p:sp>
-        <p:nvSpPr>
-          <p:cNvPr id="21" name="Text 11"/>
-          <p:cNvSpPr/>
-          <p:nvPr/>
-        </p:nvSpPr>
-        <p:spPr>
-          <a:xfrm>
-            <a:off x="971550" y="4636294"/>
-            <a:ext cx="3207544" cy="578644"/>
-          </a:xfrm>
-          <a:prstGeom prst="rect">
-            <a:avLst/>
-          </a:prstGeom>
-          <a:noFill/>
-        </p:spPr>
-        <p:txBody>
-          <a:bodyPr wrap="square" lIns="0" tIns="0" rIns="0" bIns="0" rtlCol="0" anchor="t">
-            <a:spAutoFit/>
-          </a:bodyPr>
-          <a:lstStyle/>
-          <a:p>
-            <a:pPr marL="0" indent="0" algn="l">
-              <a:lnSpc>
-                <a:spcPct val="120000"/>
-              </a:lnSpc>
-              <a:buNone/>
-            </a:pPr>
-            <a:r>
-              <a:rPr lang="en-US" sz="950" dirty="0">
-                <a:solidFill>
-                  <a:srgbClr val="4B5563"/>
-                </a:solidFill>
-                <a:latin typeface="Inter" pitchFamily="34" charset="0"/>
-                <a:ea typeface="Inter" pitchFamily="34" charset="-122"/>
-                <a:cs typeface="Inter" pitchFamily="34" charset="-120"/>
-              </a:rPr>
-              <a:t>Includes complete </a:t>
-            </a:r>
-            <a:r>
-              <a:rPr lang="en-US" sz="900" dirty="0">
-                <a:solidFill>
-                  <a:srgbClr val="1F2937"/>
-                </a:solidFill>
-                <a:latin typeface="Inter SemiBold" pitchFamily="34" charset="0"/>
-                <a:ea typeface="Inter SemiBold" pitchFamily="34" charset="-122"/>
-                <a:cs typeface="Inter SemiBold" pitchFamily="34" charset="-120"/>
-              </a:rPr>
-              <a:t>Conversation Logs</a:t>
-            </a:r>
-            <a:r>
-              <a:rPr lang="en-US" sz="950" dirty="0">
-                <a:solidFill>
-                  <a:srgbClr val="4B5563"/>
-                </a:solidFill>
-                <a:latin typeface="Inter" pitchFamily="34" charset="0"/>
-                <a:ea typeface="Inter" pitchFamily="34" charset="-122"/>
-                <a:cs typeface="Inter" pitchFamily="34" charset="-120"/>
-              </a:rPr>
-              <a:t> as an </a:t>
-            </a:r>
-            <a:r>
-              <a:rPr lang="en-US" sz="950" dirty="0">
-                <a:solidFill>
-                  <a:srgbClr val="4B5563"/>
-                </a:solidFill>
-                <a:latin typeface="Inter" pitchFamily="34" charset="0"/>
-                <a:ea typeface="Inter" pitchFamily="34" charset="-122"/>
-                <a:cs typeface="Inter" pitchFamily="34" charset="-120"/>
-              </a:rPr>
-              <a:t>appendix, adhering strictly to the 5-page limit for the </a:t>
-            </a:r>
-            <a:r>
-              <a:rPr lang="en-US" sz="950" dirty="0">
-                <a:solidFill>
-                  <a:srgbClr val="4B5563"/>
-                </a:solidFill>
-                <a:latin typeface="Inter" pitchFamily="34" charset="0"/>
-                <a:ea typeface="Inter" pitchFamily="34" charset="-122"/>
-                <a:cs typeface="Inter" pitchFamily="34" charset="-120"/>
-              </a:rPr>
-              <a:t>main content.</a:t>
-            </a:r>
-            <a:endParaRPr lang="en-US" sz="950" dirty="0"/>
-          </a:p>
-        </p:txBody>
-      </p:sp>
-      <p:sp>
-        <p:nvSpPr>
-          <p:cNvPr id="22" name="Shape 12"/>
-          <p:cNvSpPr/>
-          <p:nvPr/>
-        </p:nvSpPr>
-        <p:spPr>
-          <a:xfrm>
-            <a:off x="4786313" y="1071563"/>
-            <a:ext cx="3786188" cy="1550194"/>
-          </a:xfrm>
-          <a:prstGeom prst="rect">
-            <a:avLst/>
-          </a:prstGeom>
-          <a:solidFill>
-            <a:srgbClr val="F9FAFB"/>
-          </a:solidFill>
-        </p:spPr>
-      </p:sp>
-      <p:sp>
-        <p:nvSpPr>
-          <p:cNvPr id="23" name="Shape 13"/>
-          <p:cNvSpPr/>
-          <p:nvPr/>
-        </p:nvSpPr>
-        <p:spPr>
-          <a:xfrm>
-            <a:off x="4786313" y="1071563"/>
-            <a:ext cx="3786188" cy="21431"/>
-          </a:xfrm>
-          <a:prstGeom prst="rect">
-            <a:avLst/>
-          </a:prstGeom>
-          <a:solidFill>
-            <a:srgbClr val="2563EB"/>
-          </a:solidFill>
-        </p:spPr>
-      </p:sp>
-      <p:sp>
-        <p:nvSpPr>
-          <p:cNvPr id="24" name="Text 14"/>
-          <p:cNvSpPr/>
-          <p:nvPr/>
-        </p:nvSpPr>
-        <p:spPr>
-          <a:xfrm>
-            <a:off x="5050631" y="1250156"/>
-            <a:ext cx="1753791" cy="207169"/>
-          </a:xfrm>
-          <a:prstGeom prst="rect">
-            <a:avLst/>
-          </a:prstGeom>
-          <a:noFill/>
-        </p:spPr>
-        <p:txBody>
-          <a:bodyPr wrap="square" lIns="0" tIns="0" rIns="0" bIns="0" rtlCol="0" anchor="t">
-            <a:spAutoFit/>
-          </a:bodyPr>
-          <a:lstStyle/>
-          <a:p>
-            <a:pPr marL="0" indent="0" algn="l">
-              <a:buNone/>
-            </a:pPr>
-            <a:r>
-              <a:rPr lang="en-US" sz="1200" dirty="0">
-                <a:solidFill>
-                  <a:srgbClr val="1F2937"/>
-                </a:solidFill>
-                <a:latin typeface="Inter SemiBold" pitchFamily="34" charset="0"/>
-                <a:ea typeface="Inter SemiBold" pitchFamily="34" charset="-122"/>
-                <a:cs typeface="Inter SemiBold" pitchFamily="34" charset="-120"/>
-              </a:rPr>
-              <a:t>Testing Methodology</a:t>
-            </a:r>
-            <a:endParaRPr lang="en-US" sz="1200" dirty="0"/>
-          </a:p>
-        </p:txBody>
-      </p:sp>
-      <p:pic>
-        <p:nvPicPr>
-          <p:cNvPr id="25" name="Image 8" descr="preencoded.png"/>
-          <p:cNvPicPr>
-            <a:picLocks noChangeAspect="1"/>
-          </p:cNvPicPr>
-          <p:nvPr/>
-        </p:nvPicPr>
-        <p:blipFill>
-          <a:blip r:embed="rId3"/>
-          <a:stretch>
-            <a:fillRect/>
-          </a:stretch>
-        </p:blipFill>
-        <p:spPr>
-          <a:xfrm>
-            <a:off x="5000625" y="1607344"/>
-            <a:ext cx="100013" cy="100013"/>
-          </a:xfrm>
-          <a:prstGeom prst="rect">
-            <a:avLst/>
-          </a:prstGeom>
-        </p:spPr>
-      </p:pic>
-      <p:sp>
-        <p:nvSpPr>
-          <p:cNvPr id="26" name="Text 15"/>
-          <p:cNvSpPr/>
-          <p:nvPr/>
-        </p:nvSpPr>
-        <p:spPr>
-          <a:xfrm>
-            <a:off x="5186363" y="1564481"/>
-            <a:ext cx="3207544" cy="385763"/>
-          </a:xfrm>
-          <a:prstGeom prst="rect">
-            <a:avLst/>
-          </a:prstGeom>
-          <a:noFill/>
-        </p:spPr>
-        <p:txBody>
-          <a:bodyPr wrap="square" lIns="0" tIns="0" rIns="0" bIns="0" rtlCol="0" anchor="t">
-            <a:spAutoFit/>
-          </a:bodyPr>
-          <a:lstStyle/>
-          <a:p>
-            <a:pPr marL="0" indent="0" algn="l">
-              <a:lnSpc>
-                <a:spcPct val="120000"/>
-              </a:lnSpc>
-              <a:buNone/>
-            </a:pPr>
-            <a:r>
-              <a:rPr lang="en-US" sz="950" dirty="0">
-                <a:solidFill>
-                  <a:srgbClr val="4B5563"/>
-                </a:solidFill>
-                <a:latin typeface="Inter" pitchFamily="34" charset="0"/>
-                <a:ea typeface="Inter" pitchFamily="34" charset="-122"/>
-                <a:cs typeface="Inter" pitchFamily="34" charset="-120"/>
-              </a:rPr>
-              <a:t>Comprehensive overview of the </a:t>
-            </a:r>
-            <a:r>
-              <a:rPr lang="en-US" sz="900" dirty="0">
-                <a:solidFill>
-                  <a:srgbClr val="1F2937"/>
-                </a:solidFill>
-                <a:latin typeface="Inter SemiBold" pitchFamily="34" charset="0"/>
-                <a:ea typeface="Inter SemiBold" pitchFamily="34" charset="-122"/>
-                <a:cs typeface="Inter SemiBold" pitchFamily="34" charset="-120"/>
-              </a:rPr>
-              <a:t>Pytest</a:t>
-            </a:r>
-            <a:r>
-              <a:rPr lang="en-US" sz="950" dirty="0">
-                <a:solidFill>
-                  <a:srgbClr val="4B5563"/>
-                </a:solidFill>
-                <a:latin typeface="Inter" pitchFamily="34" charset="0"/>
-                <a:ea typeface="Inter" pitchFamily="34" charset="-122"/>
-                <a:cs typeface="Inter" pitchFamily="34" charset="-120"/>
-              </a:rPr>
-              <a:t> suite </a:t>
-            </a:r>
-            <a:r>
-              <a:rPr lang="en-US" sz="950" dirty="0">
-                <a:solidFill>
-                  <a:srgbClr val="4B5563"/>
-                </a:solidFill>
-                <a:latin typeface="Inter" pitchFamily="34" charset="0"/>
-                <a:ea typeface="Inter" pitchFamily="34" charset="-122"/>
-                <a:cs typeface="Inter" pitchFamily="34" charset="-120"/>
-              </a:rPr>
-              <a:t>covering 45 independent test cases.</a:t>
-            </a:r>
-            <a:endParaRPr lang="en-US" sz="950" dirty="0"/>
-          </a:p>
-        </p:txBody>
-      </p:sp>
-      <p:pic>
-        <p:nvPicPr>
-          <p:cNvPr id="27" name="Image 9" descr="preencoded.png"/>
-          <p:cNvPicPr>
-            <a:picLocks noChangeAspect="1"/>
-          </p:cNvPicPr>
-          <p:nvPr/>
-        </p:nvPicPr>
-        <p:blipFill>
-          <a:blip r:embed="rId3"/>
-          <a:stretch>
-            <a:fillRect/>
-          </a:stretch>
-        </p:blipFill>
-        <p:spPr>
-          <a:xfrm>
-            <a:off x="5000625" y="2078831"/>
-            <a:ext cx="100013" cy="100013"/>
-          </a:xfrm>
-          <a:prstGeom prst="rect">
-            <a:avLst/>
-          </a:prstGeom>
-        </p:spPr>
-      </p:pic>
-      <p:sp>
-        <p:nvSpPr>
-          <p:cNvPr id="28" name="Text 16"/>
-          <p:cNvSpPr/>
-          <p:nvPr/>
-        </p:nvSpPr>
-        <p:spPr>
-          <a:xfrm>
-            <a:off x="5186363" y="2035969"/>
-            <a:ext cx="3207544" cy="385763"/>
-          </a:xfrm>
-          <a:prstGeom prst="rect">
-            <a:avLst/>
-          </a:prstGeom>
-          <a:noFill/>
-        </p:spPr>
-        <p:txBody>
-          <a:bodyPr wrap="square" lIns="0" tIns="0" rIns="0" bIns="0" rtlCol="0" anchor="t">
-            <a:spAutoFit/>
-          </a:bodyPr>
-          <a:lstStyle/>
-          <a:p>
-            <a:pPr marL="0" indent="0" algn="l">
-              <a:lnSpc>
-                <a:spcPct val="120000"/>
-              </a:lnSpc>
-              <a:buNone/>
-            </a:pPr>
-            <a:r>
-              <a:rPr lang="en-US" sz="950" dirty="0">
-                <a:solidFill>
-                  <a:srgbClr val="4B5563"/>
-                </a:solidFill>
-                <a:latin typeface="Inter" pitchFamily="34" charset="0"/>
-                <a:ea typeface="Inter" pitchFamily="34" charset="-122"/>
-                <a:cs typeface="Inter" pitchFamily="34" charset="-120"/>
-              </a:rPr>
-              <a:t>Explanation of testing strategies: happy paths, edge cases, authentication failures, and data validation.</a:t>
-            </a:r>
-            <a:endParaRPr lang="en-US" sz="950" dirty="0"/>
-          </a:p>
-        </p:txBody>
-      </p:sp>
-      <p:sp>
-        <p:nvSpPr>
-          <p:cNvPr id="29" name="Shape 17"/>
-          <p:cNvSpPr/>
-          <p:nvPr/>
-        </p:nvSpPr>
-        <p:spPr>
-          <a:xfrm>
-            <a:off x="4786313" y="2814638"/>
-            <a:ext cx="3786188" cy="1743075"/>
-          </a:xfrm>
-          <a:prstGeom prst="rect">
-            <a:avLst/>
-          </a:prstGeom>
-          <a:solidFill>
-            <a:srgbClr val="F9FAFB"/>
-          </a:solidFill>
-        </p:spPr>
-      </p:sp>
-      <p:sp>
-        <p:nvSpPr>
-          <p:cNvPr id="30" name="Shape 18"/>
-          <p:cNvSpPr/>
-          <p:nvPr/>
-        </p:nvSpPr>
-        <p:spPr>
-          <a:xfrm>
-            <a:off x="4786313" y="2814638"/>
-            <a:ext cx="3786188" cy="21431"/>
-          </a:xfrm>
-          <a:prstGeom prst="rect">
-            <a:avLst/>
-          </a:prstGeom>
-          <a:solidFill>
-            <a:srgbClr val="2563EB"/>
-          </a:solidFill>
-        </p:spPr>
-      </p:sp>
-      <p:pic>
-        <p:nvPicPr>
-          <p:cNvPr id="31" name="Image 10" descr="preencoded.png"/>
-          <p:cNvPicPr>
-            <a:picLocks noChangeAspect="1"/>
-          </p:cNvPicPr>
-          <p:nvPr/>
-        </p:nvPicPr>
-        <p:blipFill>
-          <a:blip r:embed="rId5"/>
-          <a:stretch>
-            <a:fillRect/>
-          </a:stretch>
-        </p:blipFill>
-        <p:spPr>
-          <a:xfrm>
-            <a:off x="4964906" y="3011091"/>
-            <a:ext cx="171450" cy="171450"/>
-          </a:xfrm>
-          <a:prstGeom prst="rect">
-            <a:avLst/>
-          </a:prstGeom>
-        </p:spPr>
-      </p:pic>
-      <p:sp>
-        <p:nvSpPr>
-          <p:cNvPr id="32" name="Text 19"/>
-          <p:cNvSpPr/>
-          <p:nvPr/>
-        </p:nvSpPr>
-        <p:spPr>
-          <a:xfrm>
-            <a:off x="5222081" y="2993231"/>
-            <a:ext cx="1955602" cy="207169"/>
-          </a:xfrm>
-          <a:prstGeom prst="rect">
-            <a:avLst/>
-          </a:prstGeom>
-          <a:noFill/>
-        </p:spPr>
-        <p:txBody>
-          <a:bodyPr wrap="square" lIns="0" tIns="0" rIns="0" bIns="0" rtlCol="0" anchor="t">
-            <a:spAutoFit/>
-          </a:bodyPr>
-          <a:lstStyle/>
-          <a:p>
-            <a:pPr marL="0" indent="0" algn="l">
-              <a:buNone/>
-            </a:pPr>
-            <a:r>
-              <a:rPr lang="en-US" sz="1200" dirty="0">
-                <a:solidFill>
-                  <a:srgbClr val="1F2937"/>
-                </a:solidFill>
-                <a:latin typeface="Inter SemiBold" pitchFamily="34" charset="0"/>
-                <a:ea typeface="Inter SemiBold" pitchFamily="34" charset="-122"/>
-                <a:cs typeface="Inter SemiBold" pitchFamily="34" charset="-120"/>
-              </a:rPr>
-              <a:t>Challenges &amp; Learnings</a:t>
-            </a:r>
-            <a:endParaRPr lang="en-US" sz="1200" dirty="0"/>
-          </a:p>
-        </p:txBody>
-      </p:sp>
-      <p:pic>
-        <p:nvPicPr>
-          <p:cNvPr id="33" name="Image 11" descr="preencoded.png"/>
-          <p:cNvPicPr>
-            <a:picLocks noChangeAspect="1"/>
-          </p:cNvPicPr>
-          <p:nvPr/>
-        </p:nvPicPr>
-        <p:blipFill>
-          <a:blip r:embed="rId3"/>
-          <a:stretch>
-            <a:fillRect/>
-          </a:stretch>
-        </p:blipFill>
-        <p:spPr>
-          <a:xfrm>
-            <a:off x="5000625" y="3350419"/>
-            <a:ext cx="100013" cy="100013"/>
-          </a:xfrm>
-          <a:prstGeom prst="rect">
-            <a:avLst/>
-          </a:prstGeom>
-        </p:spPr>
-      </p:pic>
-      <p:sp>
-        <p:nvSpPr>
-          <p:cNvPr id="34" name="Text 20"/>
-          <p:cNvSpPr/>
-          <p:nvPr/>
-        </p:nvSpPr>
-        <p:spPr>
-          <a:xfrm>
-            <a:off x="5186363" y="3307556"/>
-            <a:ext cx="3207544" cy="578644"/>
-          </a:xfrm>
-          <a:prstGeom prst="rect">
-            <a:avLst/>
-          </a:prstGeom>
-          <a:noFill/>
-        </p:spPr>
-        <p:txBody>
-          <a:bodyPr wrap="square" lIns="0" tIns="0" rIns="0" bIns="0" rtlCol="0" anchor="t">
-            <a:spAutoFit/>
-          </a:bodyPr>
-          <a:lstStyle/>
-          <a:p>
-            <a:pPr marL="0" indent="0" algn="l">
-              <a:lnSpc>
-                <a:spcPct val="120000"/>
-              </a:lnSpc>
-              <a:buNone/>
-            </a:pPr>
-            <a:r>
-              <a:rPr lang="en-US" sz="950" dirty="0">
-                <a:solidFill>
-                  <a:srgbClr val="4B5563"/>
-                </a:solidFill>
-                <a:latin typeface="Inter" pitchFamily="34" charset="0"/>
-                <a:ea typeface="Inter" pitchFamily="34" charset="-122"/>
-                <a:cs typeface="Inter" pitchFamily="34" charset="-120"/>
-              </a:rPr>
-              <a:t>Reflection on resolving SQLAlchemy </a:t>
-            </a:r>
-            <a:r>
-              <a:rPr lang="en-US" sz="900" dirty="0">
-                <a:solidFill>
-                  <a:srgbClr val="1F2937"/>
-                </a:solidFill>
-                <a:latin typeface="Inter SemiBold" pitchFamily="34" charset="0"/>
-                <a:ea typeface="Inter SemiBold" pitchFamily="34" charset="-122"/>
-                <a:cs typeface="Inter SemiBold" pitchFamily="34" charset="-120"/>
-              </a:rPr>
-              <a:t>AmbiguousForeignKeysError</a:t>
-            </a:r>
-            <a:r>
-              <a:rPr lang="en-US" sz="950" dirty="0">
-                <a:solidFill>
-                  <a:srgbClr val="4B5563"/>
-                </a:solidFill>
-                <a:latin typeface="Inter" pitchFamily="34" charset="0"/>
-                <a:ea typeface="Inter" pitchFamily="34" charset="-122"/>
-                <a:cs typeface="Inter" pitchFamily="34" charset="-120"/>
-              </a:rPr>
-              <a:t> during model </a:t>
-            </a:r>
-            <a:r>
-              <a:rPr lang="en-US" sz="950" dirty="0">
-                <a:solidFill>
-                  <a:srgbClr val="4B5563"/>
-                </a:solidFill>
-                <a:latin typeface="Inter" pitchFamily="34" charset="0"/>
-                <a:ea typeface="Inter" pitchFamily="34" charset="-122"/>
-                <a:cs typeface="Inter" pitchFamily="34" charset="-120"/>
-              </a:rPr>
-              <a:t>relationships setup.</a:t>
-            </a:r>
-            <a:endParaRPr lang="en-US" sz="950" dirty="0"/>
-          </a:p>
-        </p:txBody>
-      </p:sp>
-      <p:pic>
-        <p:nvPicPr>
-          <p:cNvPr id="35" name="Image 12" descr="preencoded.png"/>
-          <p:cNvPicPr>
-            <a:picLocks noChangeAspect="1"/>
-          </p:cNvPicPr>
-          <p:nvPr/>
-        </p:nvPicPr>
-        <p:blipFill>
-          <a:blip r:embed="rId3"/>
-          <a:stretch>
-            <a:fillRect/>
-          </a:stretch>
-        </p:blipFill>
-        <p:spPr>
-          <a:xfrm>
-            <a:off x="5000625" y="4014788"/>
-            <a:ext cx="100013" cy="100013"/>
-          </a:xfrm>
-          <a:prstGeom prst="rect">
-            <a:avLst/>
-          </a:prstGeom>
-        </p:spPr>
-      </p:pic>
-      <p:sp>
-        <p:nvSpPr>
-          <p:cNvPr id="36" name="Text 21"/>
-          <p:cNvSpPr/>
-          <p:nvPr/>
-        </p:nvSpPr>
-        <p:spPr>
-          <a:xfrm>
-            <a:off x="5186363" y="3971925"/>
-            <a:ext cx="3207544" cy="385763"/>
-          </a:xfrm>
-          <a:prstGeom prst="rect">
-            <a:avLst/>
-          </a:prstGeom>
-          <a:noFill/>
-        </p:spPr>
-        <p:txBody>
-          <a:bodyPr wrap="square" lIns="0" tIns="0" rIns="0" bIns="0" rtlCol="0" anchor="t">
-            <a:spAutoFit/>
-          </a:bodyPr>
-          <a:lstStyle/>
-          <a:p>
-            <a:pPr marL="0" indent="0" algn="l">
-              <a:lnSpc>
-                <a:spcPct val="120000"/>
-              </a:lnSpc>
-              <a:buNone/>
-            </a:pPr>
-            <a:r>
-              <a:rPr lang="en-US" sz="950" dirty="0">
-                <a:solidFill>
-                  <a:srgbClr val="4B5563"/>
-                </a:solidFill>
-                <a:latin typeface="Inter" pitchFamily="34" charset="0"/>
-                <a:ea typeface="Inter" pitchFamily="34" charset="-122"/>
-                <a:cs typeface="Inter" pitchFamily="34" charset="-120"/>
-              </a:rPr>
-              <a:t>Documentation of debugging the </a:t>
-            </a:r>
-            <a:r>
-              <a:rPr lang="en-US" sz="900" dirty="0">
-                <a:solidFill>
-                  <a:srgbClr val="1F2937"/>
-                </a:solidFill>
-                <a:latin typeface="Inter SemiBold" pitchFamily="34" charset="0"/>
-                <a:ea typeface="Inter SemiBold" pitchFamily="34" charset="-122"/>
-                <a:cs typeface="Inter SemiBold" pitchFamily="34" charset="-120"/>
-              </a:rPr>
-              <a:t>bcrypt</a:t>
-            </a:r>
-            <a:r>
-              <a:rPr lang="en-US" sz="950" dirty="0">
-                <a:solidFill>
-                  <a:srgbClr val="4B5563"/>
-                </a:solidFill>
-                <a:latin typeface="Inter" pitchFamily="34" charset="0"/>
-                <a:ea typeface="Inter" pitchFamily="34" charset="-122"/>
-                <a:cs typeface="Inter" pitchFamily="34" charset="-120"/>
-              </a:rPr>
-              <a:t> version </a:t>
-            </a:r>
-            <a:r>
-              <a:rPr lang="en-US" sz="950" dirty="0">
-                <a:solidFill>
-                  <a:srgbClr val="4B5563"/>
-                </a:solidFill>
-                <a:latin typeface="Inter" pitchFamily="34" charset="0"/>
-                <a:ea typeface="Inter" pitchFamily="34" charset="-122"/>
-                <a:cs typeface="Inter" pitchFamily="34" charset="-120"/>
-              </a:rPr>
-              <a:t>compatibility issue that caused initial test failures.</a:t>
-            </a:r>
-            <a:endParaRPr lang="en-US" sz="950" dirty="0"/>
-          </a:p>
-        </p:txBody>
-      </p:sp>
     </p:spTree>
   </p:cSld>
   <p:clrMapOvr>
@@ -4722,7 +3699,7 @@
         <p:spPr>
           <a:xfrm>
             <a:off x="0" y="0"/>
-            <a:ext cx="9144000" cy="5239941"/>
+            <a:ext cx="9144000" cy="5436394"/>
           </a:xfrm>
           <a:prstGeom prst="rect">
             <a:avLst/>
@@ -4738,7 +3715,7 @@
         <p:spPr>
           <a:xfrm>
             <a:off x="771525" y="433090"/>
-            <a:ext cx="2914650" cy="276820"/>
+            <a:ext cx="3127177" cy="276860"/>
           </a:xfrm>
           <a:prstGeom prst="rect">
             <a:avLst/>
@@ -4755,7 +3732,7 @@
               <a:buNone/>
             </a:pPr>
             <a:r>
-              <a:rPr lang="en-US" sz="1600" b="1" dirty="0">
+              <a:rPr lang="en-US" b="1" dirty="0">
                 <a:solidFill>
                   <a:srgbClr val="1F2937"/>
                 </a:solidFill>
@@ -4763,9 +3740,1366 @@
                 <a:ea typeface="Inter ExtraBold" pitchFamily="34" charset="-122"/>
                 <a:cs typeface="Inter ExtraBold" pitchFamily="34" charset="-120"/>
               </a:rPr>
+              <a:t>Technical Report Highlights</a:t>
+            </a:r>
+            <a:endParaRPr lang="en-US" b="1" dirty="0">
+              <a:solidFill>
+                <a:srgbClr val="1F2937"/>
+              </a:solidFill>
+              <a:latin typeface="Inter ExtraBold" pitchFamily="34" charset="0"/>
+              <a:ea typeface="Inter ExtraBold" pitchFamily="34" charset="-122"/>
+              <a:cs typeface="Inter ExtraBold" pitchFamily="34" charset="-120"/>
+            </a:endParaRPr>
+          </a:p>
+        </p:txBody>
+      </p:sp>
+      <p:sp>
+        <p:nvSpPr>
+          <p:cNvPr id="4" name="Shape 1"/>
+          <p:cNvSpPr/>
+          <p:nvPr/>
+        </p:nvSpPr>
+        <p:spPr>
+          <a:xfrm>
+            <a:off x="571500" y="1071563"/>
+            <a:ext cx="3786188" cy="2407444"/>
+          </a:xfrm>
+          <a:prstGeom prst="rect">
+            <a:avLst/>
+          </a:prstGeom>
+          <a:solidFill>
+            <a:srgbClr val="F9FAFB"/>
+          </a:solidFill>
+        </p:spPr>
+      </p:sp>
+      <p:sp>
+        <p:nvSpPr>
+          <p:cNvPr id="5" name="Shape 2"/>
+          <p:cNvSpPr/>
+          <p:nvPr/>
+        </p:nvSpPr>
+        <p:spPr>
+          <a:xfrm>
+            <a:off x="571500" y="1071563"/>
+            <a:ext cx="3786188" cy="21431"/>
+          </a:xfrm>
+          <a:prstGeom prst="rect">
+            <a:avLst/>
+          </a:prstGeom>
+          <a:solidFill>
+            <a:srgbClr val="2563EB"/>
+          </a:solidFill>
+        </p:spPr>
+      </p:sp>
+      <p:pic>
+        <p:nvPicPr>
+          <p:cNvPr id="6" name="Image 1" descr="preencoded.png"/>
+          <p:cNvPicPr>
+            <a:picLocks noChangeAspect="1"/>
+          </p:cNvPicPr>
+          <p:nvPr/>
+        </p:nvPicPr>
+        <p:blipFill>
+          <a:blip r:embed="rId2"/>
+          <a:stretch>
+            <a:fillRect/>
+          </a:stretch>
+        </p:blipFill>
+        <p:spPr>
+          <a:xfrm>
+            <a:off x="750094" y="1268016"/>
+            <a:ext cx="171450" cy="171450"/>
+          </a:xfrm>
+          <a:prstGeom prst="rect">
+            <a:avLst/>
+          </a:prstGeom>
+        </p:spPr>
+      </p:pic>
+      <p:sp>
+        <p:nvSpPr>
+          <p:cNvPr id="7" name="Text 3"/>
+          <p:cNvSpPr/>
+          <p:nvPr/>
+        </p:nvSpPr>
+        <p:spPr>
+          <a:xfrm>
+            <a:off x="1007110" y="1250315"/>
+            <a:ext cx="2599690" cy="215265"/>
+          </a:xfrm>
+          <a:prstGeom prst="rect">
+            <a:avLst/>
+          </a:prstGeom>
+          <a:noFill/>
+        </p:spPr>
+        <p:txBody>
+          <a:bodyPr wrap="square" lIns="0" tIns="0" rIns="0" bIns="0" rtlCol="0" anchor="t">
+            <a:spAutoFit/>
+          </a:bodyPr>
+          <a:lstStyle/>
+          <a:p>
+            <a:pPr marL="0" indent="0" algn="l">
+              <a:buNone/>
+            </a:pPr>
+            <a:r>
+              <a:rPr lang="en-US" sz="1400" dirty="0">
+                <a:solidFill>
+                  <a:srgbClr val="1F2937"/>
+                </a:solidFill>
+                <a:latin typeface="Inter SemiBold" pitchFamily="34" charset="0"/>
+                <a:ea typeface="Inter SemiBold" pitchFamily="34" charset="-122"/>
+                <a:cs typeface="Inter SemiBold" pitchFamily="34" charset="-120"/>
+              </a:rPr>
+              <a:t>Architecture &amp; Design</a:t>
+            </a:r>
+            <a:endParaRPr lang="en-US" sz="1400" dirty="0">
+              <a:solidFill>
+                <a:srgbClr val="1F2937"/>
+              </a:solidFill>
+              <a:latin typeface="Inter SemiBold" pitchFamily="34" charset="0"/>
+              <a:ea typeface="Inter SemiBold" pitchFamily="34" charset="-122"/>
+              <a:cs typeface="Inter SemiBold" pitchFamily="34" charset="-120"/>
+            </a:endParaRPr>
+          </a:p>
+        </p:txBody>
+      </p:sp>
+      <p:pic>
+        <p:nvPicPr>
+          <p:cNvPr id="8" name="Image 2" descr="preencoded.png"/>
+          <p:cNvPicPr>
+            <a:picLocks noChangeAspect="1"/>
+          </p:cNvPicPr>
+          <p:nvPr/>
+        </p:nvPicPr>
+        <p:blipFill>
+          <a:blip r:embed="rId3"/>
+          <a:stretch>
+            <a:fillRect/>
+          </a:stretch>
+        </p:blipFill>
+        <p:spPr>
+          <a:xfrm>
+            <a:off x="785813" y="1607344"/>
+            <a:ext cx="100013" cy="100013"/>
+          </a:xfrm>
+          <a:prstGeom prst="rect">
+            <a:avLst/>
+          </a:prstGeom>
+        </p:spPr>
+      </p:pic>
+      <p:sp>
+        <p:nvSpPr>
+          <p:cNvPr id="9" name="Text 4"/>
+          <p:cNvSpPr/>
+          <p:nvPr/>
+        </p:nvSpPr>
+        <p:spPr>
+          <a:xfrm>
+            <a:off x="971550" y="1564481"/>
+            <a:ext cx="3207544" cy="580390"/>
+          </a:xfrm>
+          <a:prstGeom prst="rect">
+            <a:avLst/>
+          </a:prstGeom>
+          <a:noFill/>
+        </p:spPr>
+        <p:txBody>
+          <a:bodyPr wrap="square" lIns="0" tIns="0" rIns="0" bIns="0" rtlCol="0" anchor="t">
+            <a:spAutoFit/>
+          </a:bodyPr>
+          <a:lstStyle/>
+          <a:p>
+            <a:pPr marL="0" indent="0" algn="l">
+              <a:lnSpc>
+                <a:spcPct val="120000"/>
+              </a:lnSpc>
+              <a:buNone/>
+            </a:pPr>
+            <a:r>
+              <a:rPr lang="en-US" sz="1050" dirty="0">
+                <a:solidFill>
+                  <a:srgbClr val="4B5563"/>
+                </a:solidFill>
+                <a:latin typeface="Inter" pitchFamily="34" charset="0"/>
+                <a:ea typeface="Inter" pitchFamily="34" charset="-122"/>
+                <a:cs typeface="Inter" pitchFamily="34" charset="-120"/>
+              </a:rPr>
+              <a:t>Detailed justification for selecting </a:t>
+            </a:r>
+            <a:r>
+              <a:rPr lang="en-US" sz="1000" dirty="0">
+                <a:solidFill>
+                  <a:srgbClr val="1F2937"/>
+                </a:solidFill>
+                <a:latin typeface="Inter SemiBold" pitchFamily="34" charset="0"/>
+                <a:ea typeface="Inter SemiBold" pitchFamily="34" charset="-122"/>
+                <a:cs typeface="Inter SemiBold" pitchFamily="34" charset="-120"/>
+              </a:rPr>
+              <a:t>FastAPI</a:t>
+            </a:r>
+            <a:r>
+              <a:rPr lang="en-US" sz="1050" dirty="0">
+                <a:solidFill>
+                  <a:srgbClr val="4B5563"/>
+                </a:solidFill>
+                <a:latin typeface="Inter" pitchFamily="34" charset="0"/>
+                <a:ea typeface="Inter" pitchFamily="34" charset="-122"/>
+                <a:cs typeface="Inter" pitchFamily="34" charset="-120"/>
+              </a:rPr>
+              <a:t> (asynchronous performance, automatic Swagger UI) and </a:t>
+            </a:r>
+            <a:r>
+              <a:rPr lang="en-US" sz="1000" dirty="0">
+                <a:solidFill>
+                  <a:srgbClr val="1F2937"/>
+                </a:solidFill>
+                <a:latin typeface="Inter SemiBold" pitchFamily="34" charset="0"/>
+                <a:ea typeface="Inter SemiBold" pitchFamily="34" charset="-122"/>
+                <a:cs typeface="Inter SemiBold" pitchFamily="34" charset="-120"/>
+              </a:rPr>
+              <a:t>SQLite</a:t>
+            </a:r>
+            <a:r>
+              <a:rPr lang="en-US" sz="1050" dirty="0">
+                <a:solidFill>
+                  <a:srgbClr val="4B5563"/>
+                </a:solidFill>
+                <a:latin typeface="Inter" pitchFamily="34" charset="0"/>
+                <a:ea typeface="Inter" pitchFamily="34" charset="-122"/>
+                <a:cs typeface="Inter" pitchFamily="34" charset="-120"/>
+              </a:rPr>
+              <a:t> (zero-configuration portability).</a:t>
+            </a:r>
+            <a:endParaRPr lang="en-US" sz="1050" dirty="0">
+              <a:solidFill>
+                <a:srgbClr val="4B5563"/>
+              </a:solidFill>
+              <a:latin typeface="Inter" pitchFamily="34" charset="0"/>
+              <a:ea typeface="Inter" pitchFamily="34" charset="-122"/>
+              <a:cs typeface="Inter" pitchFamily="34" charset="-120"/>
+            </a:endParaRPr>
+          </a:p>
+        </p:txBody>
+      </p:sp>
+      <p:pic>
+        <p:nvPicPr>
+          <p:cNvPr id="10" name="Image 3" descr="preencoded.png"/>
+          <p:cNvPicPr>
+            <a:picLocks noChangeAspect="1"/>
+          </p:cNvPicPr>
+          <p:nvPr/>
+        </p:nvPicPr>
+        <p:blipFill>
+          <a:blip r:embed="rId3"/>
+          <a:stretch>
+            <a:fillRect/>
+          </a:stretch>
+        </p:blipFill>
+        <p:spPr>
+          <a:xfrm>
+            <a:off x="785813" y="2271713"/>
+            <a:ext cx="100013" cy="100013"/>
+          </a:xfrm>
+          <a:prstGeom prst="rect">
+            <a:avLst/>
+          </a:prstGeom>
+        </p:spPr>
+      </p:pic>
+      <p:sp>
+        <p:nvSpPr>
+          <p:cNvPr id="11" name="Text 5"/>
+          <p:cNvSpPr/>
+          <p:nvPr/>
+        </p:nvSpPr>
+        <p:spPr>
+          <a:xfrm>
+            <a:off x="971550" y="2228850"/>
+            <a:ext cx="3207544" cy="386715"/>
+          </a:xfrm>
+          <a:prstGeom prst="rect">
+            <a:avLst/>
+          </a:prstGeom>
+          <a:noFill/>
+        </p:spPr>
+        <p:txBody>
+          <a:bodyPr wrap="square" lIns="0" tIns="0" rIns="0" bIns="0" rtlCol="0" anchor="t">
+            <a:spAutoFit/>
+          </a:bodyPr>
+          <a:lstStyle/>
+          <a:p>
+            <a:pPr marL="0" indent="0" algn="l">
+              <a:lnSpc>
+                <a:spcPct val="120000"/>
+              </a:lnSpc>
+              <a:buNone/>
+            </a:pPr>
+            <a:r>
+              <a:rPr lang="en-US" sz="1050" dirty="0">
+                <a:solidFill>
+                  <a:srgbClr val="4B5563"/>
+                </a:solidFill>
+                <a:latin typeface="Inter" pitchFamily="34" charset="0"/>
+                <a:ea typeface="Inter" pitchFamily="34" charset="-122"/>
+                <a:cs typeface="Inter" pitchFamily="34" charset="-120"/>
+              </a:rPr>
+              <a:t>Explanation of the layered architecture separating routing, business logic, and data access.</a:t>
+            </a:r>
+            <a:endParaRPr lang="en-US" sz="1050" dirty="0">
+              <a:solidFill>
+                <a:srgbClr val="4B5563"/>
+              </a:solidFill>
+              <a:latin typeface="Inter" pitchFamily="34" charset="0"/>
+              <a:ea typeface="Inter" pitchFamily="34" charset="-122"/>
+              <a:cs typeface="Inter" pitchFamily="34" charset="-120"/>
+            </a:endParaRPr>
+          </a:p>
+        </p:txBody>
+      </p:sp>
+      <p:pic>
+        <p:nvPicPr>
+          <p:cNvPr id="12" name="Image 4" descr="preencoded.png"/>
+          <p:cNvPicPr>
+            <a:picLocks noChangeAspect="1"/>
+          </p:cNvPicPr>
+          <p:nvPr/>
+        </p:nvPicPr>
+        <p:blipFill>
+          <a:blip r:embed="rId3"/>
+          <a:stretch>
+            <a:fillRect/>
+          </a:stretch>
+        </p:blipFill>
+        <p:spPr>
+          <a:xfrm>
+            <a:off x="785813" y="2743200"/>
+            <a:ext cx="100013" cy="100013"/>
+          </a:xfrm>
+          <a:prstGeom prst="rect">
+            <a:avLst/>
+          </a:prstGeom>
+        </p:spPr>
+      </p:pic>
+      <p:sp>
+        <p:nvSpPr>
+          <p:cNvPr id="13" name="Text 6"/>
+          <p:cNvSpPr/>
+          <p:nvPr/>
+        </p:nvSpPr>
+        <p:spPr>
+          <a:xfrm>
+            <a:off x="971550" y="2700338"/>
+            <a:ext cx="3207544" cy="580390"/>
+          </a:xfrm>
+          <a:prstGeom prst="rect">
+            <a:avLst/>
+          </a:prstGeom>
+          <a:noFill/>
+        </p:spPr>
+        <p:txBody>
+          <a:bodyPr wrap="square" lIns="0" tIns="0" rIns="0" bIns="0" rtlCol="0" anchor="t">
+            <a:spAutoFit/>
+          </a:bodyPr>
+          <a:lstStyle/>
+          <a:p>
+            <a:pPr marL="0" indent="0" algn="l">
+              <a:lnSpc>
+                <a:spcPct val="120000"/>
+              </a:lnSpc>
+              <a:buNone/>
+            </a:pPr>
+            <a:r>
+              <a:rPr lang="en-US" sz="1050" dirty="0">
+                <a:solidFill>
+                  <a:srgbClr val="4B5563"/>
+                </a:solidFill>
+                <a:latin typeface="Inter" pitchFamily="34" charset="0"/>
+                <a:ea typeface="Inter" pitchFamily="34" charset="-122"/>
+                <a:cs typeface="Inter" pitchFamily="34" charset="-120"/>
+              </a:rPr>
+              <a:t>Analysis of the relational database schema, including the handling of dual foreign keys for matches.</a:t>
+            </a:r>
+            <a:endParaRPr lang="en-US" sz="1050" dirty="0">
+              <a:solidFill>
+                <a:srgbClr val="4B5563"/>
+              </a:solidFill>
+              <a:latin typeface="Inter" pitchFamily="34" charset="0"/>
+              <a:ea typeface="Inter" pitchFamily="34" charset="-122"/>
+              <a:cs typeface="Inter" pitchFamily="34" charset="-120"/>
+            </a:endParaRPr>
+          </a:p>
+        </p:txBody>
+      </p:sp>
+      <p:sp>
+        <p:nvSpPr>
+          <p:cNvPr id="14" name="Shape 7"/>
+          <p:cNvSpPr/>
+          <p:nvPr/>
+        </p:nvSpPr>
+        <p:spPr>
+          <a:xfrm>
+            <a:off x="571500" y="3671888"/>
+            <a:ext cx="3786188" cy="1743075"/>
+          </a:xfrm>
+          <a:prstGeom prst="rect">
+            <a:avLst/>
+          </a:prstGeom>
+          <a:solidFill>
+            <a:srgbClr val="F9FAFB"/>
+          </a:solidFill>
+        </p:spPr>
+      </p:sp>
+      <p:sp>
+        <p:nvSpPr>
+          <p:cNvPr id="15" name="Shape 8"/>
+          <p:cNvSpPr/>
+          <p:nvPr/>
+        </p:nvSpPr>
+        <p:spPr>
+          <a:xfrm>
+            <a:off x="571500" y="3671888"/>
+            <a:ext cx="3786188" cy="21431"/>
+          </a:xfrm>
+          <a:prstGeom prst="rect">
+            <a:avLst/>
+          </a:prstGeom>
+          <a:solidFill>
+            <a:srgbClr val="2563EB"/>
+          </a:solidFill>
+        </p:spPr>
+      </p:sp>
+      <p:pic>
+        <p:nvPicPr>
+          <p:cNvPr id="16" name="Image 5" descr="preencoded.png"/>
+          <p:cNvPicPr>
+            <a:picLocks noChangeAspect="1"/>
+          </p:cNvPicPr>
+          <p:nvPr/>
+        </p:nvPicPr>
+        <p:blipFill>
+          <a:blip r:embed="rId4"/>
+          <a:stretch>
+            <a:fillRect/>
+          </a:stretch>
+        </p:blipFill>
+        <p:spPr>
+          <a:xfrm>
+            <a:off x="750094" y="3868341"/>
+            <a:ext cx="214313" cy="171450"/>
+          </a:xfrm>
+          <a:prstGeom prst="rect">
+            <a:avLst/>
+          </a:prstGeom>
+        </p:spPr>
+      </p:pic>
+      <p:sp>
+        <p:nvSpPr>
+          <p:cNvPr id="17" name="Text 9"/>
+          <p:cNvSpPr/>
+          <p:nvPr/>
+        </p:nvSpPr>
+        <p:spPr>
+          <a:xfrm>
+            <a:off x="1050131" y="3850481"/>
+            <a:ext cx="1498402" cy="215265"/>
+          </a:xfrm>
+          <a:prstGeom prst="rect">
+            <a:avLst/>
+          </a:prstGeom>
+          <a:noFill/>
+        </p:spPr>
+        <p:txBody>
+          <a:bodyPr wrap="square" lIns="0" tIns="0" rIns="0" bIns="0" rtlCol="0" anchor="t">
+            <a:spAutoFit/>
+          </a:bodyPr>
+          <a:lstStyle/>
+          <a:p>
+            <a:pPr marL="0" indent="0" algn="l">
+              <a:buNone/>
+            </a:pPr>
+            <a:r>
+              <a:rPr lang="en-US" sz="1400" dirty="0">
+                <a:solidFill>
+                  <a:srgbClr val="1F2937"/>
+                </a:solidFill>
+                <a:latin typeface="Inter SemiBold" pitchFamily="34" charset="0"/>
+                <a:ea typeface="Inter SemiBold" pitchFamily="34" charset="-122"/>
+                <a:cs typeface="Inter SemiBold" pitchFamily="34" charset="-120"/>
+              </a:rPr>
+              <a:t>GenAI Declaration</a:t>
+            </a:r>
+            <a:endParaRPr lang="en-US" sz="1400" dirty="0">
+              <a:solidFill>
+                <a:srgbClr val="1F2937"/>
+              </a:solidFill>
+              <a:latin typeface="Inter SemiBold" pitchFamily="34" charset="0"/>
+              <a:ea typeface="Inter SemiBold" pitchFamily="34" charset="-122"/>
+              <a:cs typeface="Inter SemiBold" pitchFamily="34" charset="-120"/>
+            </a:endParaRPr>
+          </a:p>
+        </p:txBody>
+      </p:sp>
+      <p:pic>
+        <p:nvPicPr>
+          <p:cNvPr id="18" name="Image 6" descr="preencoded.png"/>
+          <p:cNvPicPr>
+            <a:picLocks noChangeAspect="1"/>
+          </p:cNvPicPr>
+          <p:nvPr/>
+        </p:nvPicPr>
+        <p:blipFill>
+          <a:blip r:embed="rId3"/>
+          <a:stretch>
+            <a:fillRect/>
+          </a:stretch>
+        </p:blipFill>
+        <p:spPr>
+          <a:xfrm>
+            <a:off x="785813" y="4207669"/>
+            <a:ext cx="100013" cy="100013"/>
+          </a:xfrm>
+          <a:prstGeom prst="rect">
+            <a:avLst/>
+          </a:prstGeom>
+        </p:spPr>
+      </p:pic>
+      <p:sp>
+        <p:nvSpPr>
+          <p:cNvPr id="19" name="Text 10"/>
+          <p:cNvSpPr/>
+          <p:nvPr/>
+        </p:nvSpPr>
+        <p:spPr>
+          <a:xfrm>
+            <a:off x="971550" y="4164806"/>
+            <a:ext cx="3207544" cy="386715"/>
+          </a:xfrm>
+          <a:prstGeom prst="rect">
+            <a:avLst/>
+          </a:prstGeom>
+          <a:noFill/>
+        </p:spPr>
+        <p:txBody>
+          <a:bodyPr wrap="square" lIns="0" tIns="0" rIns="0" bIns="0" rtlCol="0" anchor="t">
+            <a:spAutoFit/>
+          </a:bodyPr>
+          <a:lstStyle/>
+          <a:p>
+            <a:pPr marL="0" indent="0" algn="l">
+              <a:lnSpc>
+                <a:spcPct val="120000"/>
+              </a:lnSpc>
+              <a:buNone/>
+            </a:pPr>
+            <a:r>
+              <a:rPr lang="en-US" sz="1050" dirty="0">
+                <a:solidFill>
+                  <a:srgbClr val="4B5563"/>
+                </a:solidFill>
+                <a:latin typeface="Inter" pitchFamily="34" charset="0"/>
+                <a:ea typeface="Inter" pitchFamily="34" charset="-122"/>
+                <a:cs typeface="Inter" pitchFamily="34" charset="-120"/>
+              </a:rPr>
+              <a:t>Transparent disclosure of AI assistance in code scaffolding and documentation formatting.</a:t>
+            </a:r>
+            <a:endParaRPr lang="en-US" sz="1050" dirty="0">
+              <a:solidFill>
+                <a:srgbClr val="4B5563"/>
+              </a:solidFill>
+              <a:latin typeface="Inter" pitchFamily="34" charset="0"/>
+              <a:ea typeface="Inter" pitchFamily="34" charset="-122"/>
+              <a:cs typeface="Inter" pitchFamily="34" charset="-120"/>
+            </a:endParaRPr>
+          </a:p>
+        </p:txBody>
+      </p:sp>
+      <p:pic>
+        <p:nvPicPr>
+          <p:cNvPr id="20" name="Image 7" descr="preencoded.png"/>
+          <p:cNvPicPr>
+            <a:picLocks noChangeAspect="1"/>
+          </p:cNvPicPr>
+          <p:nvPr/>
+        </p:nvPicPr>
+        <p:blipFill>
+          <a:blip r:embed="rId3"/>
+          <a:stretch>
+            <a:fillRect/>
+          </a:stretch>
+        </p:blipFill>
+        <p:spPr>
+          <a:xfrm>
+            <a:off x="785813" y="4679156"/>
+            <a:ext cx="100013" cy="100013"/>
+          </a:xfrm>
+          <a:prstGeom prst="rect">
+            <a:avLst/>
+          </a:prstGeom>
+        </p:spPr>
+      </p:pic>
+      <p:sp>
+        <p:nvSpPr>
+          <p:cNvPr id="21" name="Text 11"/>
+          <p:cNvSpPr/>
+          <p:nvPr/>
+        </p:nvSpPr>
+        <p:spPr>
+          <a:xfrm>
+            <a:off x="971550" y="4636294"/>
+            <a:ext cx="3207544" cy="580390"/>
+          </a:xfrm>
+          <a:prstGeom prst="rect">
+            <a:avLst/>
+          </a:prstGeom>
+          <a:noFill/>
+        </p:spPr>
+        <p:txBody>
+          <a:bodyPr wrap="square" lIns="0" tIns="0" rIns="0" bIns="0" rtlCol="0" anchor="t">
+            <a:spAutoFit/>
+          </a:bodyPr>
+          <a:lstStyle/>
+          <a:p>
+            <a:pPr marL="0" indent="0" algn="l">
+              <a:lnSpc>
+                <a:spcPct val="120000"/>
+              </a:lnSpc>
+              <a:buNone/>
+            </a:pPr>
+            <a:r>
+              <a:rPr lang="en-US" sz="1050" dirty="0">
+                <a:solidFill>
+                  <a:srgbClr val="4B5563"/>
+                </a:solidFill>
+                <a:latin typeface="Inter" pitchFamily="34" charset="0"/>
+                <a:ea typeface="Inter" pitchFamily="34" charset="-122"/>
+                <a:cs typeface="Inter" pitchFamily="34" charset="-120"/>
+              </a:rPr>
+              <a:t>Includes complete </a:t>
+            </a:r>
+            <a:r>
+              <a:rPr lang="en-US" sz="1000" dirty="0">
+                <a:solidFill>
+                  <a:srgbClr val="1F2937"/>
+                </a:solidFill>
+                <a:latin typeface="Inter SemiBold" pitchFamily="34" charset="0"/>
+                <a:ea typeface="Inter SemiBold" pitchFamily="34" charset="-122"/>
+                <a:cs typeface="Inter SemiBold" pitchFamily="34" charset="-120"/>
+              </a:rPr>
+              <a:t>Conversation Logs</a:t>
+            </a:r>
+            <a:r>
+              <a:rPr lang="en-US" sz="1050" dirty="0">
+                <a:solidFill>
+                  <a:srgbClr val="4B5563"/>
+                </a:solidFill>
+                <a:latin typeface="Inter" pitchFamily="34" charset="0"/>
+                <a:ea typeface="Inter" pitchFamily="34" charset="-122"/>
+                <a:cs typeface="Inter" pitchFamily="34" charset="-120"/>
+              </a:rPr>
+              <a:t> as an appendix, adhering strictly to the 5-page limit for the </a:t>
+            </a:r>
+            <a:r>
+              <a:rPr lang="en-US" sz="1050" dirty="0">
+                <a:solidFill>
+                  <a:srgbClr val="4B5563"/>
+                </a:solidFill>
+                <a:latin typeface="Inter" pitchFamily="34" charset="0"/>
+                <a:ea typeface="Inter" pitchFamily="34" charset="-122"/>
+                <a:cs typeface="Inter" pitchFamily="34" charset="-120"/>
+              </a:rPr>
+              <a:t>main content.</a:t>
+            </a:r>
+            <a:endParaRPr lang="en-US" sz="1050" dirty="0">
+              <a:solidFill>
+                <a:srgbClr val="4B5563"/>
+              </a:solidFill>
+              <a:latin typeface="Inter" pitchFamily="34" charset="0"/>
+              <a:ea typeface="Inter" pitchFamily="34" charset="-122"/>
+              <a:cs typeface="Inter" pitchFamily="34" charset="-120"/>
+            </a:endParaRPr>
+          </a:p>
+        </p:txBody>
+      </p:sp>
+      <p:sp>
+        <p:nvSpPr>
+          <p:cNvPr id="22" name="Shape 12"/>
+          <p:cNvSpPr/>
+          <p:nvPr/>
+        </p:nvSpPr>
+        <p:spPr>
+          <a:xfrm>
+            <a:off x="4786313" y="1071563"/>
+            <a:ext cx="3786188" cy="1550194"/>
+          </a:xfrm>
+          <a:prstGeom prst="rect">
+            <a:avLst/>
+          </a:prstGeom>
+          <a:solidFill>
+            <a:srgbClr val="F9FAFB"/>
+          </a:solidFill>
+        </p:spPr>
+      </p:sp>
+      <p:sp>
+        <p:nvSpPr>
+          <p:cNvPr id="23" name="Shape 13"/>
+          <p:cNvSpPr/>
+          <p:nvPr/>
+        </p:nvSpPr>
+        <p:spPr>
+          <a:xfrm>
+            <a:off x="4786313" y="1071563"/>
+            <a:ext cx="3786188" cy="21431"/>
+          </a:xfrm>
+          <a:prstGeom prst="rect">
+            <a:avLst/>
+          </a:prstGeom>
+          <a:solidFill>
+            <a:srgbClr val="2563EB"/>
+          </a:solidFill>
+        </p:spPr>
+      </p:sp>
+      <p:sp>
+        <p:nvSpPr>
+          <p:cNvPr id="24" name="Text 14"/>
+          <p:cNvSpPr/>
+          <p:nvPr/>
+        </p:nvSpPr>
+        <p:spPr>
+          <a:xfrm>
+            <a:off x="5050631" y="1250156"/>
+            <a:ext cx="1753791" cy="215265"/>
+          </a:xfrm>
+          <a:prstGeom prst="rect">
+            <a:avLst/>
+          </a:prstGeom>
+          <a:noFill/>
+        </p:spPr>
+        <p:txBody>
+          <a:bodyPr wrap="square" lIns="0" tIns="0" rIns="0" bIns="0" rtlCol="0" anchor="t">
+            <a:spAutoFit/>
+          </a:bodyPr>
+          <a:lstStyle/>
+          <a:p>
+            <a:pPr marL="0" indent="0" algn="l">
+              <a:buNone/>
+            </a:pPr>
+            <a:r>
+              <a:rPr lang="en-US" sz="1400" dirty="0">
+                <a:solidFill>
+                  <a:srgbClr val="1F2937"/>
+                </a:solidFill>
+                <a:latin typeface="Inter SemiBold" pitchFamily="34" charset="0"/>
+                <a:ea typeface="Inter SemiBold" pitchFamily="34" charset="-122"/>
+                <a:cs typeface="Inter SemiBold" pitchFamily="34" charset="-120"/>
+              </a:rPr>
+              <a:t>Testing Methodology</a:t>
+            </a:r>
+            <a:endParaRPr lang="en-US" sz="1400" dirty="0">
+              <a:solidFill>
+                <a:srgbClr val="1F2937"/>
+              </a:solidFill>
+              <a:latin typeface="Inter SemiBold" pitchFamily="34" charset="0"/>
+              <a:ea typeface="Inter SemiBold" pitchFamily="34" charset="-122"/>
+              <a:cs typeface="Inter SemiBold" pitchFamily="34" charset="-120"/>
+            </a:endParaRPr>
+          </a:p>
+        </p:txBody>
+      </p:sp>
+      <p:pic>
+        <p:nvPicPr>
+          <p:cNvPr id="25" name="Image 8" descr="preencoded.png"/>
+          <p:cNvPicPr>
+            <a:picLocks noChangeAspect="1"/>
+          </p:cNvPicPr>
+          <p:nvPr/>
+        </p:nvPicPr>
+        <p:blipFill>
+          <a:blip r:embed="rId3"/>
+          <a:stretch>
+            <a:fillRect/>
+          </a:stretch>
+        </p:blipFill>
+        <p:spPr>
+          <a:xfrm>
+            <a:off x="5000625" y="1607344"/>
+            <a:ext cx="100013" cy="100013"/>
+          </a:xfrm>
+          <a:prstGeom prst="rect">
+            <a:avLst/>
+          </a:prstGeom>
+        </p:spPr>
+      </p:pic>
+      <p:sp>
+        <p:nvSpPr>
+          <p:cNvPr id="26" name="Text 15"/>
+          <p:cNvSpPr/>
+          <p:nvPr/>
+        </p:nvSpPr>
+        <p:spPr>
+          <a:xfrm>
+            <a:off x="5186363" y="1564481"/>
+            <a:ext cx="3207544" cy="386715"/>
+          </a:xfrm>
+          <a:prstGeom prst="rect">
+            <a:avLst/>
+          </a:prstGeom>
+          <a:noFill/>
+        </p:spPr>
+        <p:txBody>
+          <a:bodyPr wrap="square" lIns="0" tIns="0" rIns="0" bIns="0" rtlCol="0" anchor="t">
+            <a:spAutoFit/>
+          </a:bodyPr>
+          <a:lstStyle/>
+          <a:p>
+            <a:pPr marL="0" indent="0" algn="l">
+              <a:lnSpc>
+                <a:spcPct val="120000"/>
+              </a:lnSpc>
+              <a:buNone/>
+            </a:pPr>
+            <a:r>
+              <a:rPr lang="en-US" sz="1050" dirty="0">
+                <a:solidFill>
+                  <a:srgbClr val="4B5563"/>
+                </a:solidFill>
+                <a:latin typeface="Inter" pitchFamily="34" charset="0"/>
+                <a:ea typeface="Inter" pitchFamily="34" charset="-122"/>
+                <a:cs typeface="Inter" pitchFamily="34" charset="-120"/>
+              </a:rPr>
+              <a:t>Comprehensive overview of the </a:t>
+            </a:r>
+            <a:r>
+              <a:rPr lang="en-US" sz="1000" dirty="0">
+                <a:solidFill>
+                  <a:srgbClr val="1F2937"/>
+                </a:solidFill>
+                <a:latin typeface="Inter SemiBold" pitchFamily="34" charset="0"/>
+                <a:ea typeface="Inter SemiBold" pitchFamily="34" charset="-122"/>
+                <a:cs typeface="Inter SemiBold" pitchFamily="34" charset="-120"/>
+              </a:rPr>
+              <a:t>Pytest</a:t>
+            </a:r>
+            <a:r>
+              <a:rPr lang="en-US" sz="1050" dirty="0">
+                <a:solidFill>
+                  <a:srgbClr val="4B5563"/>
+                </a:solidFill>
+                <a:latin typeface="Inter" pitchFamily="34" charset="0"/>
+                <a:ea typeface="Inter" pitchFamily="34" charset="-122"/>
+                <a:cs typeface="Inter" pitchFamily="34" charset="-120"/>
+              </a:rPr>
+              <a:t> suite </a:t>
+            </a:r>
+            <a:r>
+              <a:rPr lang="en-US" sz="1050" dirty="0">
+                <a:solidFill>
+                  <a:srgbClr val="4B5563"/>
+                </a:solidFill>
+                <a:latin typeface="Inter" pitchFamily="34" charset="0"/>
+                <a:ea typeface="Inter" pitchFamily="34" charset="-122"/>
+                <a:cs typeface="Inter" pitchFamily="34" charset="-120"/>
+              </a:rPr>
+              <a:t>covering 45 independent test cases.</a:t>
+            </a:r>
+            <a:endParaRPr lang="en-US" sz="1050" dirty="0">
+              <a:solidFill>
+                <a:srgbClr val="4B5563"/>
+              </a:solidFill>
+              <a:latin typeface="Inter" pitchFamily="34" charset="0"/>
+              <a:ea typeface="Inter" pitchFamily="34" charset="-122"/>
+              <a:cs typeface="Inter" pitchFamily="34" charset="-120"/>
+            </a:endParaRPr>
+          </a:p>
+        </p:txBody>
+      </p:sp>
+      <p:pic>
+        <p:nvPicPr>
+          <p:cNvPr id="27" name="Image 9" descr="preencoded.png"/>
+          <p:cNvPicPr>
+            <a:picLocks noChangeAspect="1"/>
+          </p:cNvPicPr>
+          <p:nvPr/>
+        </p:nvPicPr>
+        <p:blipFill>
+          <a:blip r:embed="rId3"/>
+          <a:stretch>
+            <a:fillRect/>
+          </a:stretch>
+        </p:blipFill>
+        <p:spPr>
+          <a:xfrm>
+            <a:off x="5000625" y="2078831"/>
+            <a:ext cx="100013" cy="100013"/>
+          </a:xfrm>
+          <a:prstGeom prst="rect">
+            <a:avLst/>
+          </a:prstGeom>
+        </p:spPr>
+      </p:pic>
+      <p:sp>
+        <p:nvSpPr>
+          <p:cNvPr id="28" name="Text 16"/>
+          <p:cNvSpPr/>
+          <p:nvPr/>
+        </p:nvSpPr>
+        <p:spPr>
+          <a:xfrm>
+            <a:off x="5186363" y="2035969"/>
+            <a:ext cx="3207544" cy="580390"/>
+          </a:xfrm>
+          <a:prstGeom prst="rect">
+            <a:avLst/>
+          </a:prstGeom>
+          <a:noFill/>
+        </p:spPr>
+        <p:txBody>
+          <a:bodyPr wrap="square" lIns="0" tIns="0" rIns="0" bIns="0" rtlCol="0" anchor="t">
+            <a:spAutoFit/>
+          </a:bodyPr>
+          <a:lstStyle/>
+          <a:p>
+            <a:pPr marL="0" indent="0" algn="l">
+              <a:lnSpc>
+                <a:spcPct val="120000"/>
+              </a:lnSpc>
+              <a:buNone/>
+            </a:pPr>
+            <a:r>
+              <a:rPr lang="en-US" sz="1050" dirty="0">
+                <a:solidFill>
+                  <a:srgbClr val="4B5563"/>
+                </a:solidFill>
+                <a:latin typeface="Inter" pitchFamily="34" charset="0"/>
+                <a:ea typeface="Inter" pitchFamily="34" charset="-122"/>
+                <a:cs typeface="Inter" pitchFamily="34" charset="-120"/>
+              </a:rPr>
+              <a:t>Explanation of testing strategies: happy paths, edge cases, authentication failures, and data validation.</a:t>
+            </a:r>
+            <a:endParaRPr lang="en-US" sz="1050" dirty="0">
+              <a:solidFill>
+                <a:srgbClr val="4B5563"/>
+              </a:solidFill>
+              <a:latin typeface="Inter" pitchFamily="34" charset="0"/>
+              <a:ea typeface="Inter" pitchFamily="34" charset="-122"/>
+              <a:cs typeface="Inter" pitchFamily="34" charset="-120"/>
+            </a:endParaRPr>
+          </a:p>
+        </p:txBody>
+      </p:sp>
+      <p:sp>
+        <p:nvSpPr>
+          <p:cNvPr id="29" name="Shape 17"/>
+          <p:cNvSpPr/>
+          <p:nvPr/>
+        </p:nvSpPr>
+        <p:spPr>
+          <a:xfrm>
+            <a:off x="4786313" y="2814638"/>
+            <a:ext cx="3786188" cy="1743075"/>
+          </a:xfrm>
+          <a:prstGeom prst="rect">
+            <a:avLst/>
+          </a:prstGeom>
+          <a:solidFill>
+            <a:srgbClr val="F9FAFB"/>
+          </a:solidFill>
+        </p:spPr>
+      </p:sp>
+      <p:sp>
+        <p:nvSpPr>
+          <p:cNvPr id="30" name="Shape 18"/>
+          <p:cNvSpPr/>
+          <p:nvPr/>
+        </p:nvSpPr>
+        <p:spPr>
+          <a:xfrm>
+            <a:off x="4786313" y="2814638"/>
+            <a:ext cx="3786188" cy="21431"/>
+          </a:xfrm>
+          <a:prstGeom prst="rect">
+            <a:avLst/>
+          </a:prstGeom>
+          <a:solidFill>
+            <a:srgbClr val="2563EB"/>
+          </a:solidFill>
+        </p:spPr>
+      </p:sp>
+      <p:pic>
+        <p:nvPicPr>
+          <p:cNvPr id="31" name="Image 10" descr="preencoded.png"/>
+          <p:cNvPicPr>
+            <a:picLocks noChangeAspect="1"/>
+          </p:cNvPicPr>
+          <p:nvPr/>
+        </p:nvPicPr>
+        <p:blipFill>
+          <a:blip r:embed="rId5"/>
+          <a:stretch>
+            <a:fillRect/>
+          </a:stretch>
+        </p:blipFill>
+        <p:spPr>
+          <a:xfrm>
+            <a:off x="4964906" y="3011091"/>
+            <a:ext cx="171450" cy="171450"/>
+          </a:xfrm>
+          <a:prstGeom prst="rect">
+            <a:avLst/>
+          </a:prstGeom>
+        </p:spPr>
+      </p:pic>
+      <p:sp>
+        <p:nvSpPr>
+          <p:cNvPr id="32" name="Text 19"/>
+          <p:cNvSpPr/>
+          <p:nvPr/>
+        </p:nvSpPr>
+        <p:spPr>
+          <a:xfrm>
+            <a:off x="5222240" y="2993390"/>
+            <a:ext cx="2599055" cy="215265"/>
+          </a:xfrm>
+          <a:prstGeom prst="rect">
+            <a:avLst/>
+          </a:prstGeom>
+          <a:noFill/>
+        </p:spPr>
+        <p:txBody>
+          <a:bodyPr wrap="square" lIns="0" tIns="0" rIns="0" bIns="0" rtlCol="0" anchor="t">
+            <a:spAutoFit/>
+          </a:bodyPr>
+          <a:lstStyle/>
+          <a:p>
+            <a:pPr marL="0" indent="0" algn="l">
+              <a:buNone/>
+            </a:pPr>
+            <a:r>
+              <a:rPr lang="en-US" sz="1400" dirty="0">
+                <a:solidFill>
+                  <a:srgbClr val="1F2937"/>
+                </a:solidFill>
+                <a:latin typeface="Inter SemiBold" pitchFamily="34" charset="0"/>
+                <a:ea typeface="Inter SemiBold" pitchFamily="34" charset="-122"/>
+                <a:cs typeface="Inter SemiBold" pitchFamily="34" charset="-120"/>
+              </a:rPr>
+              <a:t>Challenges &amp; Learnings</a:t>
+            </a:r>
+            <a:endParaRPr lang="en-US" sz="1400" dirty="0">
+              <a:solidFill>
+                <a:srgbClr val="1F2937"/>
+              </a:solidFill>
+              <a:latin typeface="Inter SemiBold" pitchFamily="34" charset="0"/>
+              <a:ea typeface="Inter SemiBold" pitchFamily="34" charset="-122"/>
+              <a:cs typeface="Inter SemiBold" pitchFamily="34" charset="-120"/>
+            </a:endParaRPr>
+          </a:p>
+        </p:txBody>
+      </p:sp>
+      <p:pic>
+        <p:nvPicPr>
+          <p:cNvPr id="33" name="Image 11" descr="preencoded.png"/>
+          <p:cNvPicPr>
+            <a:picLocks noChangeAspect="1"/>
+          </p:cNvPicPr>
+          <p:nvPr/>
+        </p:nvPicPr>
+        <p:blipFill>
+          <a:blip r:embed="rId3"/>
+          <a:stretch>
+            <a:fillRect/>
+          </a:stretch>
+        </p:blipFill>
+        <p:spPr>
+          <a:xfrm>
+            <a:off x="5000625" y="3350419"/>
+            <a:ext cx="100013" cy="100013"/>
+          </a:xfrm>
+          <a:prstGeom prst="rect">
+            <a:avLst/>
+          </a:prstGeom>
+        </p:spPr>
+      </p:pic>
+      <p:sp>
+        <p:nvSpPr>
+          <p:cNvPr id="34" name="Text 20"/>
+          <p:cNvSpPr/>
+          <p:nvPr/>
+        </p:nvSpPr>
+        <p:spPr>
+          <a:xfrm>
+            <a:off x="5186363" y="3307556"/>
+            <a:ext cx="3207544" cy="580390"/>
+          </a:xfrm>
+          <a:prstGeom prst="rect">
+            <a:avLst/>
+          </a:prstGeom>
+          <a:noFill/>
+        </p:spPr>
+        <p:txBody>
+          <a:bodyPr wrap="square" lIns="0" tIns="0" rIns="0" bIns="0" rtlCol="0" anchor="t">
+            <a:spAutoFit/>
+          </a:bodyPr>
+          <a:lstStyle/>
+          <a:p>
+            <a:pPr marL="0" indent="0" algn="l">
+              <a:lnSpc>
+                <a:spcPct val="120000"/>
+              </a:lnSpc>
+              <a:buNone/>
+            </a:pPr>
+            <a:r>
+              <a:rPr lang="en-US" sz="1050" dirty="0">
+                <a:solidFill>
+                  <a:srgbClr val="4B5563"/>
+                </a:solidFill>
+                <a:latin typeface="Inter" pitchFamily="34" charset="0"/>
+                <a:ea typeface="Inter" pitchFamily="34" charset="-122"/>
+                <a:cs typeface="Inter" pitchFamily="34" charset="-120"/>
+              </a:rPr>
+              <a:t>Reflection on resolving SQLAlchemy </a:t>
+            </a:r>
+            <a:r>
+              <a:rPr lang="en-US" sz="1000" dirty="0">
+                <a:solidFill>
+                  <a:srgbClr val="1F2937"/>
+                </a:solidFill>
+                <a:latin typeface="Inter SemiBold" pitchFamily="34" charset="0"/>
+                <a:ea typeface="Inter SemiBold" pitchFamily="34" charset="-122"/>
+                <a:cs typeface="Inter SemiBold" pitchFamily="34" charset="-120"/>
+              </a:rPr>
+              <a:t>AmbiguousForeignKeysError</a:t>
+            </a:r>
+            <a:r>
+              <a:rPr lang="en-US" sz="1050" dirty="0">
+                <a:solidFill>
+                  <a:srgbClr val="4B5563"/>
+                </a:solidFill>
+                <a:latin typeface="Inter" pitchFamily="34" charset="0"/>
+                <a:ea typeface="Inter" pitchFamily="34" charset="-122"/>
+                <a:cs typeface="Inter" pitchFamily="34" charset="-120"/>
+              </a:rPr>
+              <a:t> during model </a:t>
+            </a:r>
+            <a:r>
+              <a:rPr lang="en-US" sz="1050" dirty="0">
+                <a:solidFill>
+                  <a:srgbClr val="4B5563"/>
+                </a:solidFill>
+                <a:latin typeface="Inter" pitchFamily="34" charset="0"/>
+                <a:ea typeface="Inter" pitchFamily="34" charset="-122"/>
+                <a:cs typeface="Inter" pitchFamily="34" charset="-120"/>
+              </a:rPr>
+              <a:t>relationships setup.</a:t>
+            </a:r>
+            <a:endParaRPr lang="en-US" sz="1050" dirty="0">
+              <a:solidFill>
+                <a:srgbClr val="4B5563"/>
+              </a:solidFill>
+              <a:latin typeface="Inter" pitchFamily="34" charset="0"/>
+              <a:ea typeface="Inter" pitchFamily="34" charset="-122"/>
+              <a:cs typeface="Inter" pitchFamily="34" charset="-120"/>
+            </a:endParaRPr>
+          </a:p>
+        </p:txBody>
+      </p:sp>
+      <p:pic>
+        <p:nvPicPr>
+          <p:cNvPr id="35" name="Image 12" descr="preencoded.png"/>
+          <p:cNvPicPr>
+            <a:picLocks noChangeAspect="1"/>
+          </p:cNvPicPr>
+          <p:nvPr/>
+        </p:nvPicPr>
+        <p:blipFill>
+          <a:blip r:embed="rId3"/>
+          <a:stretch>
+            <a:fillRect/>
+          </a:stretch>
+        </p:blipFill>
+        <p:spPr>
+          <a:xfrm>
+            <a:off x="5000625" y="4014788"/>
+            <a:ext cx="100013" cy="100013"/>
+          </a:xfrm>
+          <a:prstGeom prst="rect">
+            <a:avLst/>
+          </a:prstGeom>
+        </p:spPr>
+      </p:pic>
+      <p:sp>
+        <p:nvSpPr>
+          <p:cNvPr id="36" name="Text 21"/>
+          <p:cNvSpPr/>
+          <p:nvPr/>
+        </p:nvSpPr>
+        <p:spPr>
+          <a:xfrm>
+            <a:off x="5186363" y="3971925"/>
+            <a:ext cx="3207544" cy="386715"/>
+          </a:xfrm>
+          <a:prstGeom prst="rect">
+            <a:avLst/>
+          </a:prstGeom>
+          <a:noFill/>
+        </p:spPr>
+        <p:txBody>
+          <a:bodyPr wrap="square" lIns="0" tIns="0" rIns="0" bIns="0" rtlCol="0" anchor="t">
+            <a:spAutoFit/>
+          </a:bodyPr>
+          <a:lstStyle/>
+          <a:p>
+            <a:pPr marL="0" indent="0" algn="l">
+              <a:lnSpc>
+                <a:spcPct val="120000"/>
+              </a:lnSpc>
+              <a:buNone/>
+            </a:pPr>
+            <a:r>
+              <a:rPr lang="en-US" sz="1050" dirty="0">
+                <a:solidFill>
+                  <a:srgbClr val="4B5563"/>
+                </a:solidFill>
+                <a:latin typeface="Inter" pitchFamily="34" charset="0"/>
+                <a:ea typeface="Inter" pitchFamily="34" charset="-122"/>
+                <a:cs typeface="Inter" pitchFamily="34" charset="-120"/>
+              </a:rPr>
+              <a:t>Documentation of debugging the </a:t>
+            </a:r>
+            <a:r>
+              <a:rPr lang="en-US" sz="1000" dirty="0">
+                <a:solidFill>
+                  <a:srgbClr val="1F2937"/>
+                </a:solidFill>
+                <a:latin typeface="Inter SemiBold" pitchFamily="34" charset="0"/>
+                <a:ea typeface="Inter SemiBold" pitchFamily="34" charset="-122"/>
+                <a:cs typeface="Inter SemiBold" pitchFamily="34" charset="-120"/>
+              </a:rPr>
+              <a:t>bcrypt</a:t>
+            </a:r>
+            <a:r>
+              <a:rPr lang="en-US" sz="1050" dirty="0">
+                <a:solidFill>
+                  <a:srgbClr val="4B5563"/>
+                </a:solidFill>
+                <a:latin typeface="Inter" pitchFamily="34" charset="0"/>
+                <a:ea typeface="Inter" pitchFamily="34" charset="-122"/>
+                <a:cs typeface="Inter" pitchFamily="34" charset="-120"/>
+              </a:rPr>
+              <a:t> version </a:t>
+            </a:r>
+            <a:r>
+              <a:rPr lang="en-US" sz="1050" dirty="0">
+                <a:solidFill>
+                  <a:srgbClr val="4B5563"/>
+                </a:solidFill>
+                <a:latin typeface="Inter" pitchFamily="34" charset="0"/>
+                <a:ea typeface="Inter" pitchFamily="34" charset="-122"/>
+                <a:cs typeface="Inter" pitchFamily="34" charset="-120"/>
+              </a:rPr>
+              <a:t>compatibility issue that caused initial test failures.</a:t>
+            </a:r>
+            <a:endParaRPr lang="en-US" sz="1050" dirty="0">
+              <a:solidFill>
+                <a:srgbClr val="4B5563"/>
+              </a:solidFill>
+              <a:latin typeface="Inter" pitchFamily="34" charset="0"/>
+              <a:ea typeface="Inter" pitchFamily="34" charset="-122"/>
+              <a:cs typeface="Inter" pitchFamily="34" charset="-120"/>
+            </a:endParaRPr>
+          </a:p>
+        </p:txBody>
+      </p:sp>
+    </p:spTree>
+  </p:cSld>
+  <p:clrMapOvr>
+    <a:masterClrMapping/>
+  </p:clrMapOvr>
+</p:sld>
+</file>
+
+<file path=ppt/slides/slide13.xml><?xml version="1.0" encoding="utf-8"?>
+<p:sld xmlns:a="http://schemas.openxmlformats.org/drawingml/2006/main" xmlns:r="http://schemas.openxmlformats.org/officeDocument/2006/relationships" xmlns:p="http://schemas.openxmlformats.org/presentationml/2006/main">
+  <p:cSld>
+    <p:spTree>
+      <p:nvGrpSpPr>
+        <p:cNvPr id="1" name=""/>
+        <p:cNvGrpSpPr/>
+        <p:nvPr/>
+      </p:nvGrpSpPr>
+      <p:grpSpPr>
+        <a:xfrm>
+          <a:off x="0" y="0"/>
+          <a:ext cx="0" cy="0"/>
+          <a:chOff x="0" y="0"/>
+          <a:chExt cx="0" cy="0"/>
+        </a:xfrm>
+      </p:grpSpPr>
+      <p:pic>
+        <p:nvPicPr>
+          <p:cNvPr id="2" name="Image 0" descr="preencoded.png"/>
+          <p:cNvPicPr>
+            <a:picLocks noChangeAspect="1"/>
+          </p:cNvPicPr>
+          <p:nvPr/>
+        </p:nvPicPr>
+        <p:blipFill>
+          <a:blip r:embed="rId1"/>
+          <a:stretch>
+            <a:fillRect/>
+          </a:stretch>
+        </p:blipFill>
+        <p:spPr>
+          <a:xfrm>
+            <a:off x="0" y="0"/>
+            <a:ext cx="9144000" cy="5239941"/>
+          </a:xfrm>
+          <a:prstGeom prst="rect">
+            <a:avLst/>
+          </a:prstGeom>
+        </p:spPr>
+      </p:pic>
+      <p:sp>
+        <p:nvSpPr>
+          <p:cNvPr id="3" name="Text 0"/>
+          <p:cNvSpPr/>
+          <p:nvPr/>
+        </p:nvSpPr>
+        <p:spPr>
+          <a:xfrm>
+            <a:off x="771525" y="433090"/>
+            <a:ext cx="2914650" cy="276860"/>
+          </a:xfrm>
+          <a:prstGeom prst="rect">
+            <a:avLst/>
+          </a:prstGeom>
+          <a:noFill/>
+        </p:spPr>
+        <p:txBody>
+          <a:bodyPr wrap="square" lIns="0" tIns="0" rIns="0" bIns="0" rtlCol="0" anchor="t">
+            <a:spAutoFit/>
+          </a:bodyPr>
+          <a:lstStyle/>
+          <a:p>
+            <a:pPr marL="0" indent="0" algn="l">
+              <a:buNone/>
+            </a:pPr>
+            <a:r>
+              <a:rPr lang="en-US" b="1" dirty="0">
+                <a:solidFill>
+                  <a:srgbClr val="1F2937"/>
+                </a:solidFill>
+                <a:latin typeface="Inter ExtraBold" pitchFamily="34" charset="0"/>
+                <a:ea typeface="Inter ExtraBold" pitchFamily="34" charset="-122"/>
+                <a:cs typeface="Inter ExtraBold" pitchFamily="34" charset="-120"/>
+              </a:rPr>
               <a:t>All Deliverables Summary</a:t>
             </a:r>
-            <a:endParaRPr lang="en-US" sz="1600" dirty="0"/>
+            <a:endParaRPr lang="en-US" b="1" dirty="0">
+              <a:solidFill>
+                <a:srgbClr val="1F2937"/>
+              </a:solidFill>
+              <a:latin typeface="Inter ExtraBold" pitchFamily="34" charset="0"/>
+              <a:ea typeface="Inter ExtraBold" pitchFamily="34" charset="-122"/>
+              <a:cs typeface="Inter ExtraBold" pitchFamily="34" charset="-120"/>
+            </a:endParaRPr>
           </a:p>
         </p:txBody>
       </p:sp>
@@ -4865,7 +5199,7 @@
         <p:spPr>
           <a:xfrm>
             <a:off x="2000250" y="1250156"/>
-            <a:ext cx="4863108" cy="225028"/>
+            <a:ext cx="4863108" cy="215265"/>
           </a:xfrm>
           <a:prstGeom prst="rect">
             <a:avLst/>
@@ -4882,7 +5216,7 @@
               <a:buNone/>
             </a:pPr>
             <a:r>
-              <a:rPr lang="en-US" sz="1300" b="1" dirty="0">
+              <a:rPr lang="en-US" sz="1400" b="1" dirty="0">
                 <a:solidFill>
                   <a:srgbClr val="1F2937"/>
                 </a:solidFill>
@@ -4892,7 +5226,14 @@
               </a:rPr>
               <a:t>Code Repository</a:t>
             </a:r>
-            <a:endParaRPr lang="en-US" sz="1300" dirty="0"/>
+            <a:endParaRPr lang="en-US" sz="1400" b="1" dirty="0">
+              <a:solidFill>
+                <a:srgbClr val="1F2937"/>
+              </a:solidFill>
+              <a:latin typeface="Inter ExtraBold" pitchFamily="34" charset="0"/>
+              <a:ea typeface="Inter ExtraBold" pitchFamily="34" charset="-122"/>
+              <a:cs typeface="Inter ExtraBold" pitchFamily="34" charset="-120"/>
+            </a:endParaRPr>
           </a:p>
         </p:txBody>
       </p:sp>
@@ -4905,7 +5246,7 @@
         <p:spPr>
           <a:xfrm>
             <a:off x="2000250" y="1546622"/>
-            <a:ext cx="4863108" cy="578644"/>
+            <a:ext cx="4863108" cy="580390"/>
           </a:xfrm>
           <a:prstGeom prst="rect">
             <a:avLst/>
@@ -4925,7 +5266,7 @@
               <a:buNone/>
             </a:pPr>
             <a:r>
-              <a:rPr lang="en-US" sz="950" dirty="0">
+              <a:rPr lang="en-US" sz="1050" dirty="0">
                 <a:solidFill>
                   <a:srgbClr val="4B5563"/>
                 </a:solidFill>
@@ -4936,7 +5277,7 @@
               <a:t>Complete </a:t>
             </a:r>
             <a:r>
-              <a:rPr lang="en-US" sz="900" dirty="0">
+              <a:rPr lang="en-US" sz="1000" dirty="0">
                 <a:solidFill>
                   <a:srgbClr val="1F2937"/>
                 </a:solidFill>
@@ -4947,7 +5288,7 @@
               <a:t>FastAPI</a:t>
             </a:r>
             <a:r>
-              <a:rPr lang="en-US" sz="950" dirty="0">
+              <a:rPr lang="en-US" sz="1050" dirty="0">
                 <a:solidFill>
                   <a:srgbClr val="4B5563"/>
                 </a:solidFill>
@@ -4958,7 +5299,7 @@
               <a:t> source code, SQLAlchemy models, SQLite database, and </a:t>
             </a:r>
             <a:r>
-              <a:rPr lang="en-US" sz="900" dirty="0">
+              <a:rPr lang="en-US" sz="1000" dirty="0">
                 <a:solidFill>
                   <a:srgbClr val="1F2937"/>
                 </a:solidFill>
@@ -4969,7 +5310,7 @@
               <a:t>Pytest</a:t>
             </a:r>
             <a:r>
-              <a:rPr lang="en-US" sz="950" dirty="0">
+              <a:rPr lang="en-US" sz="1050" dirty="0">
                 <a:solidFill>
                   <a:srgbClr val="4B5563"/>
                 </a:solidFill>
@@ -4980,7 +5321,7 @@
               <a:t> suite. Maintained on GitHub with a structured commit history </a:t>
             </a:r>
             <a:r>
-              <a:rPr lang="en-US" sz="950" dirty="0">
+              <a:rPr lang="en-US" sz="1050" dirty="0">
                 <a:solidFill>
                   <a:srgbClr val="4B5563"/>
                 </a:solidFill>
@@ -4990,7 +5331,14 @@
               </a:rPr>
               <a:t>demonstrating iterative development.</a:t>
             </a:r>
-            <a:endParaRPr lang="en-US" sz="950" dirty="0"/>
+            <a:endParaRPr lang="en-US" sz="1050" dirty="0">
+              <a:solidFill>
+                <a:srgbClr val="4B5563"/>
+              </a:solidFill>
+              <a:latin typeface="Inter" pitchFamily="34" charset="0"/>
+              <a:ea typeface="Inter" pitchFamily="34" charset="-122"/>
+              <a:cs typeface="Inter" pitchFamily="34" charset="-120"/>
+            </a:endParaRPr>
           </a:p>
         </p:txBody>
       </p:sp>
@@ -5052,7 +5400,7 @@
         <p:spPr>
           <a:xfrm>
             <a:off x="7456289" y="1618952"/>
-            <a:ext cx="430411" cy="137517"/>
+            <a:ext cx="392430" cy="138430"/>
           </a:xfrm>
           <a:prstGeom prst="rect">
             <a:avLst/>
@@ -5069,7 +5417,7 @@
               <a:buNone/>
             </a:pPr>
             <a:r>
-              <a:rPr lang="en-US" sz="800" b="1" kern="0" spc="1" dirty="0">
+              <a:rPr lang="en-US" sz="900" b="1" kern="0" spc="1" dirty="0">
                 <a:solidFill>
                   <a:srgbClr val="059669"/>
                 </a:solidFill>
@@ -5079,7 +5427,14 @@
               </a:rPr>
               <a:t>READY</a:t>
             </a:r>
-            <a:endParaRPr lang="en-US" sz="800" dirty="0"/>
+            <a:endParaRPr lang="en-US" sz="900" b="1" kern="0" spc="1" dirty="0">
+              <a:solidFill>
+                <a:srgbClr val="059669"/>
+              </a:solidFill>
+              <a:latin typeface="Inter ExtraBold" pitchFamily="34" charset="0"/>
+              <a:ea typeface="Inter ExtraBold" pitchFamily="34" charset="-122"/>
+              <a:cs typeface="Inter ExtraBold" pitchFamily="34" charset="-120"/>
+            </a:endParaRPr>
           </a:p>
         </p:txBody>
       </p:sp>
@@ -5179,7 +5534,7 @@
         <p:spPr>
           <a:xfrm>
             <a:off x="2000250" y="2696766"/>
-            <a:ext cx="4863108" cy="225028"/>
+            <a:ext cx="4863108" cy="215265"/>
           </a:xfrm>
           <a:prstGeom prst="rect">
             <a:avLst/>
@@ -5196,7 +5551,7 @@
               <a:buNone/>
             </a:pPr>
             <a:r>
-              <a:rPr lang="en-US" sz="1300" b="1" dirty="0">
+              <a:rPr lang="en-US" sz="1400" b="1" dirty="0">
                 <a:solidFill>
                   <a:srgbClr val="1F2937"/>
                 </a:solidFill>
@@ -5206,7 +5561,14 @@
               </a:rPr>
               <a:t>API Documentation</a:t>
             </a:r>
-            <a:endParaRPr lang="en-US" sz="1300" dirty="0"/>
+            <a:endParaRPr lang="en-US" sz="1400" b="1" dirty="0">
+              <a:solidFill>
+                <a:srgbClr val="1F2937"/>
+              </a:solidFill>
+              <a:latin typeface="Inter ExtraBold" pitchFamily="34" charset="0"/>
+              <a:ea typeface="Inter ExtraBold" pitchFamily="34" charset="-122"/>
+              <a:cs typeface="Inter ExtraBold" pitchFamily="34" charset="-120"/>
+            </a:endParaRPr>
           </a:p>
         </p:txBody>
       </p:sp>
@@ -5219,7 +5581,7 @@
         <p:spPr>
           <a:xfrm>
             <a:off x="2000250" y="2993231"/>
-            <a:ext cx="4863108" cy="578644"/>
+            <a:ext cx="4863108" cy="580390"/>
           </a:xfrm>
           <a:prstGeom prst="rect">
             <a:avLst/>
@@ -5239,7 +5601,7 @@
               <a:buNone/>
             </a:pPr>
             <a:r>
-              <a:rPr lang="en-US" sz="950" dirty="0">
+              <a:rPr lang="en-US" sz="1050" dirty="0">
                 <a:solidFill>
                   <a:srgbClr val="4B5563"/>
                 </a:solidFill>
@@ -5250,7 +5612,7 @@
               <a:t>A comprehensive, </a:t>
             </a:r>
             <a:r>
-              <a:rPr lang="en-US" sz="900" dirty="0">
+              <a:rPr lang="en-US" sz="1000" dirty="0">
                 <a:solidFill>
                   <a:srgbClr val="1F2937"/>
                 </a:solidFill>
@@ -5261,7 +5623,7 @@
               <a:t>LaTeX-typeset PDF</a:t>
             </a:r>
             <a:r>
-              <a:rPr lang="en-US" sz="950" dirty="0">
+              <a:rPr lang="en-US" sz="1050" dirty="0">
                 <a:solidFill>
                   <a:srgbClr val="4B5563"/>
                 </a:solidFill>
@@ -5269,10 +5631,10 @@
                 <a:ea typeface="Inter" pitchFamily="34" charset="-122"/>
                 <a:cs typeface="Inter" pitchFamily="34" charset="-120"/>
               </a:rPr>
-              <a:t> documenting all 20 endpoints. Includes </a:t>
-            </a:r>
-            <a:r>
-              <a:rPr lang="en-US" sz="950" dirty="0">
+              <a:t> documenting all 20 endpoints. Includes detailed request/response formats, authentication flows, and HTTP status </a:t>
+            </a:r>
+            <a:r>
+              <a:rPr lang="en-US" sz="1050" dirty="0">
                 <a:solidFill>
                   <a:srgbClr val="4B5563"/>
                 </a:solidFill>
@@ -5280,20 +5642,16 @@
                 <a:ea typeface="Inter" pitchFamily="34" charset="-122"/>
                 <a:cs typeface="Inter" pitchFamily="34" charset="-120"/>
               </a:rPr>
-              <a:t>detailed request/response formats, authentication flows, and HTTP status </a:t>
-            </a:r>
-            <a:r>
-              <a:rPr lang="en-US" sz="950" dirty="0">
-                <a:solidFill>
-                  <a:srgbClr val="4B5563"/>
-                </a:solidFill>
-                <a:latin typeface="Inter" pitchFamily="34" charset="0"/>
-                <a:ea typeface="Inter" pitchFamily="34" charset="-122"/>
-                <a:cs typeface="Inter" pitchFamily="34" charset="-120"/>
-              </a:rPr>
               <a:t>codes.</a:t>
             </a:r>
-            <a:endParaRPr lang="en-US" sz="950" dirty="0"/>
+            <a:endParaRPr lang="en-US" sz="1050" dirty="0">
+              <a:solidFill>
+                <a:srgbClr val="4B5563"/>
+              </a:solidFill>
+              <a:latin typeface="Inter" pitchFamily="34" charset="0"/>
+              <a:ea typeface="Inter" pitchFamily="34" charset="-122"/>
+              <a:cs typeface="Inter" pitchFamily="34" charset="-120"/>
+            </a:endParaRPr>
           </a:p>
         </p:txBody>
       </p:sp>
@@ -5355,7 +5713,7 @@
         <p:spPr>
           <a:xfrm>
             <a:off x="7456289" y="3065562"/>
-            <a:ext cx="430411" cy="137517"/>
+            <a:ext cx="392430" cy="138430"/>
           </a:xfrm>
           <a:prstGeom prst="rect">
             <a:avLst/>
@@ -5372,7 +5730,7 @@
               <a:buNone/>
             </a:pPr>
             <a:r>
-              <a:rPr lang="en-US" sz="800" b="1" kern="0" spc="1" dirty="0">
+              <a:rPr lang="en-US" sz="900" b="1" kern="0" spc="1" dirty="0">
                 <a:solidFill>
                   <a:srgbClr val="059669"/>
                 </a:solidFill>
@@ -5382,7 +5740,14 @@
               </a:rPr>
               <a:t>READY</a:t>
             </a:r>
-            <a:endParaRPr lang="en-US" sz="800" dirty="0"/>
+            <a:endParaRPr lang="en-US" sz="900" b="1" kern="0" spc="1" dirty="0">
+              <a:solidFill>
+                <a:srgbClr val="059669"/>
+              </a:solidFill>
+              <a:latin typeface="Inter ExtraBold" pitchFamily="34" charset="0"/>
+              <a:ea typeface="Inter ExtraBold" pitchFamily="34" charset="-122"/>
+              <a:cs typeface="Inter ExtraBold" pitchFamily="34" charset="-120"/>
+            </a:endParaRPr>
           </a:p>
         </p:txBody>
       </p:sp>
@@ -5482,7 +5847,7 @@
         <p:spPr>
           <a:xfrm>
             <a:off x="2000250" y="4143375"/>
-            <a:ext cx="4863108" cy="225028"/>
+            <a:ext cx="4863108" cy="215265"/>
           </a:xfrm>
           <a:prstGeom prst="rect">
             <a:avLst/>
@@ -5499,7 +5864,7 @@
               <a:buNone/>
             </a:pPr>
             <a:r>
-              <a:rPr lang="en-US" sz="1300" b="1" dirty="0">
+              <a:rPr lang="en-US" sz="1400" b="1" dirty="0">
                 <a:solidFill>
                   <a:srgbClr val="1F2937"/>
                 </a:solidFill>
@@ -5509,7 +5874,14 @@
               </a:rPr>
               <a:t>Technical Report</a:t>
             </a:r>
-            <a:endParaRPr lang="en-US" sz="1300" dirty="0"/>
+            <a:endParaRPr lang="en-US" sz="1400" b="1" dirty="0">
+              <a:solidFill>
+                <a:srgbClr val="1F2937"/>
+              </a:solidFill>
+              <a:latin typeface="Inter ExtraBold" pitchFamily="34" charset="0"/>
+              <a:ea typeface="Inter ExtraBold" pitchFamily="34" charset="-122"/>
+              <a:cs typeface="Inter ExtraBold" pitchFamily="34" charset="-120"/>
+            </a:endParaRPr>
           </a:p>
         </p:txBody>
       </p:sp>
@@ -5522,7 +5894,7 @@
         <p:spPr>
           <a:xfrm>
             <a:off x="2000250" y="4439841"/>
-            <a:ext cx="4863108" cy="578644"/>
+            <a:ext cx="4863108" cy="580390"/>
           </a:xfrm>
           <a:prstGeom prst="rect">
             <a:avLst/>
@@ -5542,7 +5914,7 @@
               <a:buNone/>
             </a:pPr>
             <a:r>
-              <a:rPr lang="en-US" sz="950" dirty="0">
+              <a:rPr lang="en-US" sz="1050" dirty="0">
                 <a:solidFill>
                   <a:srgbClr val="4B5563"/>
                 </a:solidFill>
@@ -5553,7 +5925,7 @@
               <a:t>A </a:t>
             </a:r>
             <a:r>
-              <a:rPr lang="en-US" sz="900" dirty="0">
+              <a:rPr lang="en-US" sz="1000" dirty="0">
                 <a:solidFill>
                   <a:srgbClr val="1F2937"/>
                 </a:solidFill>
@@ -5564,7 +5936,7 @@
               <a:t>5-page academic report</a:t>
             </a:r>
             <a:r>
-              <a:rPr lang="en-US" sz="950" dirty="0">
+              <a:rPr lang="en-US" sz="1050" dirty="0">
                 <a:solidFill>
                   <a:srgbClr val="4B5563"/>
                 </a:solidFill>
@@ -5572,10 +5944,10 @@
                 <a:ea typeface="Inter" pitchFamily="34" charset="-122"/>
                 <a:cs typeface="Inter" pitchFamily="34" charset="-120"/>
               </a:rPr>
-              <a:t> (Times New Roman) justifying architectural choices, </a:t>
-            </a:r>
-            <a:r>
-              <a:rPr lang="en-US" sz="950" dirty="0">
+              <a:t> (Times New Roman) justifying architectural choices, detailing testing methodologies, and including a complete GenAI usage </a:t>
+            </a:r>
+            <a:r>
+              <a:rPr lang="en-US" sz="1050" dirty="0">
                 <a:solidFill>
                   <a:srgbClr val="4B5563"/>
                 </a:solidFill>
@@ -5583,20 +5955,16 @@
                 <a:ea typeface="Inter" pitchFamily="34" charset="-122"/>
                 <a:cs typeface="Inter" pitchFamily="34" charset="-120"/>
               </a:rPr>
-              <a:t>detailing testing methodologies, and including a complete GenAI usage </a:t>
-            </a:r>
-            <a:r>
-              <a:rPr lang="en-US" sz="950" dirty="0">
-                <a:solidFill>
-                  <a:srgbClr val="4B5563"/>
-                </a:solidFill>
-                <a:latin typeface="Inter" pitchFamily="34" charset="0"/>
-                <a:ea typeface="Inter" pitchFamily="34" charset="-122"/>
-                <a:cs typeface="Inter" pitchFamily="34" charset="-120"/>
-              </a:rPr>
               <a:t>declaration log.</a:t>
             </a:r>
-            <a:endParaRPr lang="en-US" sz="950" dirty="0"/>
+            <a:endParaRPr lang="en-US" sz="1050" dirty="0">
+              <a:solidFill>
+                <a:srgbClr val="4B5563"/>
+              </a:solidFill>
+              <a:latin typeface="Inter" pitchFamily="34" charset="0"/>
+              <a:ea typeface="Inter" pitchFamily="34" charset="-122"/>
+              <a:cs typeface="Inter" pitchFamily="34" charset="-120"/>
+            </a:endParaRPr>
           </a:p>
         </p:txBody>
       </p:sp>
@@ -5658,7 +6026,7 @@
         <p:spPr>
           <a:xfrm>
             <a:off x="7456289" y="4512171"/>
-            <a:ext cx="430411" cy="137517"/>
+            <a:ext cx="392430" cy="138430"/>
           </a:xfrm>
           <a:prstGeom prst="rect">
             <a:avLst/>
@@ -5675,7 +6043,7 @@
               <a:buNone/>
             </a:pPr>
             <a:r>
-              <a:rPr lang="en-US" sz="800" b="1" kern="0" spc="1" dirty="0">
+              <a:rPr lang="en-US" sz="900" b="1" kern="0" spc="1" dirty="0">
                 <a:solidFill>
                   <a:srgbClr val="059669"/>
                 </a:solidFill>
@@ -5685,7 +6053,14 @@
               </a:rPr>
               <a:t>READY</a:t>
             </a:r>
-            <a:endParaRPr lang="en-US" sz="800" dirty="0"/>
+            <a:endParaRPr lang="en-US" sz="900" b="1" kern="0" spc="1" dirty="0">
+              <a:solidFill>
+                <a:srgbClr val="059669"/>
+              </a:solidFill>
+              <a:latin typeface="Inter ExtraBold" pitchFamily="34" charset="0"/>
+              <a:ea typeface="Inter ExtraBold" pitchFamily="34" charset="-122"/>
+              <a:cs typeface="Inter ExtraBold" pitchFamily="34" charset="-120"/>
+            </a:endParaRPr>
           </a:p>
         </p:txBody>
       </p:sp>
@@ -10798,8 +11173,8 @@
         </p:nvSpPr>
         <p:spPr>
           <a:xfrm>
-            <a:off x="771525" y="433090"/>
-            <a:ext cx="3484364" cy="276820"/>
+            <a:off x="771525" y="433070"/>
+            <a:ext cx="4699000" cy="307340"/>
           </a:xfrm>
           <a:prstGeom prst="rect">
             <a:avLst/>
@@ -10816,7 +11191,7 @@
               <a:buNone/>
             </a:pPr>
             <a:r>
-              <a:rPr lang="en-US" sz="1600" b="1" dirty="0">
+              <a:rPr lang="en-US" sz="2000" b="1" dirty="0">
                 <a:solidFill>
                   <a:srgbClr val="1F2937"/>
                 </a:solidFill>
@@ -10826,7 +11201,14 @@
               </a:rPr>
               <a:t>Advanced Analytics Endpoints</a:t>
             </a:r>
-            <a:endParaRPr lang="en-US" sz="1600" dirty="0"/>
+            <a:endParaRPr lang="en-US" sz="2000" b="1" dirty="0">
+              <a:solidFill>
+                <a:srgbClr val="1F2937"/>
+              </a:solidFill>
+              <a:latin typeface="Inter ExtraBold" pitchFamily="34" charset="0"/>
+              <a:ea typeface="Inter ExtraBold" pitchFamily="34" charset="-122"/>
+              <a:cs typeface="Inter ExtraBold" pitchFamily="34" charset="-120"/>
+            </a:endParaRPr>
           </a:p>
         </p:txBody>
       </p:sp>
@@ -10907,7 +11289,7 @@
         <p:spPr>
           <a:xfrm>
             <a:off x="1143000" y="1028700"/>
-            <a:ext cx="1900238" cy="173236"/>
+            <a:ext cx="1900238" cy="215265"/>
           </a:xfrm>
           <a:prstGeom prst="rect">
             <a:avLst/>
@@ -10924,7 +11306,7 @@
               <a:buNone/>
             </a:pPr>
             <a:r>
-              <a:rPr lang="en-US" sz="1000" b="1" dirty="0">
+              <a:rPr lang="en-US" sz="1400" b="1" dirty="0">
                 <a:solidFill>
                   <a:srgbClr val="1F2937"/>
                 </a:solidFill>
@@ -10934,7 +11316,14 @@
               </a:rPr>
               <a:t>League Table</a:t>
             </a:r>
-            <a:endParaRPr lang="en-US" sz="1000" dirty="0"/>
+            <a:endParaRPr lang="en-US" sz="1400" b="1" dirty="0">
+              <a:solidFill>
+                <a:srgbClr val="1F2937"/>
+              </a:solidFill>
+              <a:latin typeface="Inter ExtraBold" pitchFamily="34" charset="0"/>
+              <a:ea typeface="Inter ExtraBold" pitchFamily="34" charset="-122"/>
+              <a:cs typeface="Inter ExtraBold" pitchFamily="34" charset="-120"/>
+            </a:endParaRPr>
           </a:p>
         </p:txBody>
       </p:sp>
@@ -10947,7 +11336,7 @@
         <p:spPr>
           <a:xfrm>
             <a:off x="1143000" y="1244798"/>
-            <a:ext cx="1900238" cy="135731"/>
+            <a:ext cx="1900238" cy="146050"/>
           </a:xfrm>
           <a:prstGeom prst="rect">
             <a:avLst/>
@@ -10964,7 +11353,7 @@
               <a:buNone/>
             </a:pPr>
             <a:r>
-              <a:rPr lang="en-US" sz="750" dirty="0">
+              <a:rPr lang="en-US" sz="950" dirty="0">
                 <a:solidFill>
                   <a:srgbClr val="059669"/>
                 </a:solidFill>
@@ -10974,7 +11363,14 @@
               </a:rPr>
               <a:t>GET /analytics/league-table</a:t>
             </a:r>
-            <a:endParaRPr lang="en-US" sz="750" dirty="0"/>
+            <a:endParaRPr lang="en-US" sz="950" dirty="0">
+              <a:solidFill>
+                <a:srgbClr val="059669"/>
+              </a:solidFill>
+              <a:latin typeface="monospace" pitchFamily="34" charset="0"/>
+              <a:ea typeface="monospace" pitchFamily="34" charset="-122"/>
+              <a:cs typeface="monospace" pitchFamily="34" charset="-120"/>
+            </a:endParaRPr>
           </a:p>
         </p:txBody>
       </p:sp>
@@ -10987,7 +11383,7 @@
         <p:spPr>
           <a:xfrm>
             <a:off x="1143000" y="1423392"/>
-            <a:ext cx="1900238" cy="320018"/>
+            <a:ext cx="1900238" cy="542290"/>
           </a:xfrm>
           <a:prstGeom prst="rect">
             <a:avLst/>
@@ -11007,7 +11403,7 @@
               <a:buNone/>
             </a:pPr>
             <a:r>
-              <a:rPr lang="en-US" sz="850" dirty="0">
+              <a:rPr lang="en-US" sz="1050" dirty="0">
                 <a:solidFill>
                   <a:srgbClr val="4B5563"/>
                 </a:solidFill>
@@ -11017,7 +11413,14 @@
               </a:rPr>
               <a:t>Calculates standings from match results (points, GD, W/D/L).</a:t>
             </a:r>
-            <a:endParaRPr lang="en-US" sz="850" dirty="0"/>
+            <a:endParaRPr lang="en-US" sz="1050" dirty="0">
+              <a:solidFill>
+                <a:srgbClr val="4B5563"/>
+              </a:solidFill>
+              <a:latin typeface="Inter" pitchFamily="34" charset="0"/>
+              <a:ea typeface="Inter" pitchFamily="34" charset="-122"/>
+              <a:cs typeface="Inter" pitchFamily="34" charset="-120"/>
+            </a:endParaRPr>
           </a:p>
         </p:txBody>
       </p:sp>
@@ -11098,7 +11501,7 @@
         <p:spPr>
           <a:xfrm>
             <a:off x="3857625" y="1028700"/>
-            <a:ext cx="1900238" cy="173236"/>
+            <a:ext cx="1900238" cy="215265"/>
           </a:xfrm>
           <a:prstGeom prst="rect">
             <a:avLst/>
@@ -11115,7 +11518,7 @@
               <a:buNone/>
             </a:pPr>
             <a:r>
-              <a:rPr lang="en-US" sz="1000" b="1" dirty="0">
+              <a:rPr lang="en-US" sz="1400" b="1" dirty="0">
                 <a:solidFill>
                   <a:srgbClr val="1F2937"/>
                 </a:solidFill>
@@ -11125,7 +11528,14 @@
               </a:rPr>
               <a:t>Team Performance</a:t>
             </a:r>
-            <a:endParaRPr lang="en-US" sz="1000" dirty="0"/>
+            <a:endParaRPr lang="en-US" sz="1400" b="1" dirty="0">
+              <a:solidFill>
+                <a:srgbClr val="1F2937"/>
+              </a:solidFill>
+              <a:latin typeface="Inter ExtraBold" pitchFamily="34" charset="0"/>
+              <a:ea typeface="Inter ExtraBold" pitchFamily="34" charset="-122"/>
+              <a:cs typeface="Inter ExtraBold" pitchFamily="34" charset="-120"/>
+            </a:endParaRPr>
           </a:p>
         </p:txBody>
       </p:sp>
@@ -11138,7 +11548,7 @@
         <p:spPr>
           <a:xfrm>
             <a:off x="3857625" y="1244798"/>
-            <a:ext cx="1900238" cy="271463"/>
+            <a:ext cx="1900238" cy="292100"/>
           </a:xfrm>
           <a:prstGeom prst="rect">
             <a:avLst/>
@@ -11155,7 +11565,7 @@
               <a:buNone/>
             </a:pPr>
             <a:r>
-              <a:rPr lang="en-US" sz="750" dirty="0">
+              <a:rPr lang="en-US" sz="950" dirty="0">
                 <a:solidFill>
                   <a:srgbClr val="059669"/>
                 </a:solidFill>
@@ -11165,7 +11575,14 @@
               </a:rPr>
               <a:t>GET /analytics/team-performance/{id}</a:t>
             </a:r>
-            <a:endParaRPr lang="en-US" sz="750" dirty="0"/>
+            <a:endParaRPr lang="en-US" sz="950" dirty="0">
+              <a:solidFill>
+                <a:srgbClr val="059669"/>
+              </a:solidFill>
+              <a:latin typeface="monospace" pitchFamily="34" charset="0"/>
+              <a:ea typeface="monospace" pitchFamily="34" charset="-122"/>
+              <a:cs typeface="monospace" pitchFamily="34" charset="-120"/>
+            </a:endParaRPr>
           </a:p>
         </p:txBody>
       </p:sp>
@@ -11178,7 +11595,7 @@
         <p:spPr>
           <a:xfrm>
             <a:off x="3857625" y="1559123"/>
-            <a:ext cx="1900238" cy="480027"/>
+            <a:ext cx="1900238" cy="542290"/>
           </a:xfrm>
           <a:prstGeom prst="rect">
             <a:avLst/>
@@ -11198,7 +11615,7 @@
               <a:buNone/>
             </a:pPr>
             <a:r>
-              <a:rPr lang="en-US" sz="850" dirty="0">
+              <a:rPr lang="en-US" sz="1050" dirty="0">
                 <a:solidFill>
                   <a:srgbClr val="4B5563"/>
                 </a:solidFill>
@@ -11208,7 +11625,14 @@
               </a:rPr>
               <a:t>Team metrics including home/away form and scoring averages.</a:t>
             </a:r>
-            <a:endParaRPr lang="en-US" sz="850" dirty="0"/>
+            <a:endParaRPr lang="en-US" sz="1050" dirty="0">
+              <a:solidFill>
+                <a:srgbClr val="4B5563"/>
+              </a:solidFill>
+              <a:latin typeface="Inter" pitchFamily="34" charset="0"/>
+              <a:ea typeface="Inter" pitchFamily="34" charset="-122"/>
+              <a:cs typeface="Inter" pitchFamily="34" charset="-120"/>
+            </a:endParaRPr>
           </a:p>
         </p:txBody>
       </p:sp>
@@ -11265,7 +11689,7 @@
         <p:spPr>
           <a:xfrm>
             <a:off x="6572250" y="1028700"/>
-            <a:ext cx="1900238" cy="173236"/>
+            <a:ext cx="1900238" cy="215265"/>
           </a:xfrm>
           <a:prstGeom prst="rect">
             <a:avLst/>
@@ -11282,7 +11706,7 @@
               <a:buNone/>
             </a:pPr>
             <a:r>
-              <a:rPr lang="en-US" sz="1000" b="1" dirty="0">
+              <a:rPr lang="en-US" sz="1400" b="1" dirty="0">
                 <a:solidFill>
                   <a:srgbClr val="1F2937"/>
                 </a:solidFill>
@@ -11292,7 +11716,14 @@
               </a:rPr>
               <a:t>Player Rankings</a:t>
             </a:r>
-            <a:endParaRPr lang="en-US" sz="1000" dirty="0"/>
+            <a:endParaRPr lang="en-US" sz="1400" b="1" dirty="0">
+              <a:solidFill>
+                <a:srgbClr val="1F2937"/>
+              </a:solidFill>
+              <a:latin typeface="Inter ExtraBold" pitchFamily="34" charset="0"/>
+              <a:ea typeface="Inter ExtraBold" pitchFamily="34" charset="-122"/>
+              <a:cs typeface="Inter ExtraBold" pitchFamily="34" charset="-120"/>
+            </a:endParaRPr>
           </a:p>
         </p:txBody>
       </p:sp>
@@ -11305,7 +11736,7 @@
         <p:spPr>
           <a:xfrm>
             <a:off x="6572250" y="1244798"/>
-            <a:ext cx="1900238" cy="135731"/>
+            <a:ext cx="1900238" cy="146050"/>
           </a:xfrm>
           <a:prstGeom prst="rect">
             <a:avLst/>
@@ -11322,7 +11753,7 @@
               <a:buNone/>
             </a:pPr>
             <a:r>
-              <a:rPr lang="en-US" sz="750" dirty="0">
+              <a:rPr lang="en-US" sz="950" dirty="0">
                 <a:solidFill>
                   <a:srgbClr val="059669"/>
                 </a:solidFill>
@@ -11332,7 +11763,14 @@
               </a:rPr>
               <a:t>GET /analytics/player-rankings</a:t>
             </a:r>
-            <a:endParaRPr lang="en-US" sz="750" dirty="0"/>
+            <a:endParaRPr lang="en-US" sz="950" dirty="0">
+              <a:solidFill>
+                <a:srgbClr val="059669"/>
+              </a:solidFill>
+              <a:latin typeface="monospace" pitchFamily="34" charset="0"/>
+              <a:ea typeface="monospace" pitchFamily="34" charset="-122"/>
+              <a:cs typeface="monospace" pitchFamily="34" charset="-120"/>
+            </a:endParaRPr>
           </a:p>
         </p:txBody>
       </p:sp>
@@ -11345,7 +11783,7 @@
         <p:spPr>
           <a:xfrm>
             <a:off x="6572250" y="1423392"/>
-            <a:ext cx="1900238" cy="320018"/>
+            <a:ext cx="1900238" cy="361315"/>
           </a:xfrm>
           <a:prstGeom prst="rect">
             <a:avLst/>
@@ -11365,7 +11803,7 @@
               <a:buNone/>
             </a:pPr>
             <a:r>
-              <a:rPr lang="en-US" sz="850" dirty="0">
+              <a:rPr lang="en-US" sz="1050" dirty="0">
                 <a:solidFill>
                   <a:srgbClr val="4B5563"/>
                 </a:solidFill>
@@ -11375,7 +11813,14 @@
               </a:rPr>
               <a:t>Top players sorted by goals, assists, or other stats.</a:t>
             </a:r>
-            <a:endParaRPr lang="en-US" sz="850" dirty="0"/>
+            <a:endParaRPr lang="en-US" sz="1050" dirty="0">
+              <a:solidFill>
+                <a:srgbClr val="4B5563"/>
+              </a:solidFill>
+              <a:latin typeface="Inter" pitchFamily="34" charset="0"/>
+              <a:ea typeface="Inter" pitchFamily="34" charset="-122"/>
+              <a:cs typeface="Inter" pitchFamily="34" charset="-120"/>
+            </a:endParaRPr>
           </a:p>
         </p:txBody>
       </p:sp>
@@ -11456,7 +11901,7 @@
         <p:spPr>
           <a:xfrm>
             <a:off x="1143000" y="3348270"/>
-            <a:ext cx="1900238" cy="173236"/>
+            <a:ext cx="1900238" cy="215265"/>
           </a:xfrm>
           <a:prstGeom prst="rect">
             <a:avLst/>
@@ -11473,7 +11918,7 @@
               <a:buNone/>
             </a:pPr>
             <a:r>
-              <a:rPr lang="en-US" sz="1000" b="1" dirty="0">
+              <a:rPr lang="en-US" sz="1400" b="1" dirty="0">
                 <a:solidFill>
                   <a:srgbClr val="1F2937"/>
                 </a:solidFill>
@@ -11483,7 +11928,14 @@
               </a:rPr>
               <a:t>Head-to-Head</a:t>
             </a:r>
-            <a:endParaRPr lang="en-US" sz="1000" dirty="0"/>
+            <a:endParaRPr lang="en-US" sz="1400" b="1" dirty="0">
+              <a:solidFill>
+                <a:srgbClr val="1F2937"/>
+              </a:solidFill>
+              <a:latin typeface="Inter ExtraBold" pitchFamily="34" charset="0"/>
+              <a:ea typeface="Inter ExtraBold" pitchFamily="34" charset="-122"/>
+              <a:cs typeface="Inter ExtraBold" pitchFamily="34" charset="-120"/>
+            </a:endParaRPr>
           </a:p>
         </p:txBody>
       </p:sp>
@@ -11496,7 +11948,7 @@
         <p:spPr>
           <a:xfrm>
             <a:off x="1143000" y="3564368"/>
-            <a:ext cx="1900238" cy="135731"/>
+            <a:ext cx="1900238" cy="146050"/>
           </a:xfrm>
           <a:prstGeom prst="rect">
             <a:avLst/>
@@ -11513,7 +11965,7 @@
               <a:buNone/>
             </a:pPr>
             <a:r>
-              <a:rPr lang="en-US" sz="750" dirty="0">
+              <a:rPr lang="en-US" sz="950" dirty="0">
                 <a:solidFill>
                   <a:srgbClr val="059669"/>
                 </a:solidFill>
@@ -11523,7 +11975,14 @@
               </a:rPr>
               <a:t>GET /analytics/head-to-head</a:t>
             </a:r>
-            <a:endParaRPr lang="en-US" sz="750" dirty="0"/>
+            <a:endParaRPr lang="en-US" sz="950" dirty="0">
+              <a:solidFill>
+                <a:srgbClr val="059669"/>
+              </a:solidFill>
+              <a:latin typeface="monospace" pitchFamily="34" charset="0"/>
+              <a:ea typeface="monospace" pitchFamily="34" charset="-122"/>
+              <a:cs typeface="monospace" pitchFamily="34" charset="-120"/>
+            </a:endParaRPr>
           </a:p>
         </p:txBody>
       </p:sp>
@@ -11536,7 +11995,7 @@
         <p:spPr>
           <a:xfrm>
             <a:off x="1143000" y="3742962"/>
-            <a:ext cx="1900238" cy="320018"/>
+            <a:ext cx="1900238" cy="542290"/>
           </a:xfrm>
           <a:prstGeom prst="rect">
             <a:avLst/>
@@ -11556,7 +12015,7 @@
               <a:buNone/>
             </a:pPr>
             <a:r>
-              <a:rPr lang="en-US" sz="850" dirty="0">
+              <a:rPr lang="en-US" sz="1050" dirty="0">
                 <a:solidFill>
                   <a:srgbClr val="4B5563"/>
                 </a:solidFill>
@@ -11566,7 +12025,14 @@
               </a:rPr>
               <a:t>Historical comparisons and match outcomes between two teams.</a:t>
             </a:r>
-            <a:endParaRPr lang="en-US" sz="850" dirty="0"/>
+            <a:endParaRPr lang="en-US" sz="1050" dirty="0">
+              <a:solidFill>
+                <a:srgbClr val="4B5563"/>
+              </a:solidFill>
+              <a:latin typeface="Inter" pitchFamily="34" charset="0"/>
+              <a:ea typeface="Inter" pitchFamily="34" charset="-122"/>
+              <a:cs typeface="Inter" pitchFamily="34" charset="-120"/>
+            </a:endParaRPr>
           </a:p>
         </p:txBody>
       </p:sp>
@@ -11647,7 +12113,7 @@
         <p:spPr>
           <a:xfrm>
             <a:off x="3857625" y="3355414"/>
-            <a:ext cx="1900238" cy="173236"/>
+            <a:ext cx="1900238" cy="215265"/>
           </a:xfrm>
           <a:prstGeom prst="rect">
             <a:avLst/>
@@ -11664,7 +12130,7 @@
               <a:buNone/>
             </a:pPr>
             <a:r>
-              <a:rPr lang="en-US" sz="1000" b="1" dirty="0">
+              <a:rPr lang="en-US" sz="1400" b="1" dirty="0">
                 <a:solidFill>
                   <a:srgbClr val="1F2937"/>
                 </a:solidFill>
@@ -11674,7 +12140,14 @@
               </a:rPr>
               <a:t>Season Summary</a:t>
             </a:r>
-            <a:endParaRPr lang="en-US" sz="1000" dirty="0"/>
+            <a:endParaRPr lang="en-US" sz="1400" b="1" dirty="0">
+              <a:solidFill>
+                <a:srgbClr val="1F2937"/>
+              </a:solidFill>
+              <a:latin typeface="Inter ExtraBold" pitchFamily="34" charset="0"/>
+              <a:ea typeface="Inter ExtraBold" pitchFamily="34" charset="-122"/>
+              <a:cs typeface="Inter ExtraBold" pitchFamily="34" charset="-120"/>
+            </a:endParaRPr>
           </a:p>
         </p:txBody>
       </p:sp>
@@ -11687,7 +12160,7 @@
         <p:spPr>
           <a:xfrm>
             <a:off x="3857625" y="3571512"/>
-            <a:ext cx="1900238" cy="135731"/>
+            <a:ext cx="1900238" cy="146050"/>
           </a:xfrm>
           <a:prstGeom prst="rect">
             <a:avLst/>
@@ -11704,7 +12177,7 @@
               <a:buNone/>
             </a:pPr>
             <a:r>
-              <a:rPr lang="en-US" sz="750" dirty="0">
+              <a:rPr lang="en-US" sz="950" dirty="0">
                 <a:solidFill>
                   <a:srgbClr val="059669"/>
                 </a:solidFill>
@@ -11714,7 +12187,14 @@
               </a:rPr>
               <a:t>GET /analytics/season-summary</a:t>
             </a:r>
-            <a:endParaRPr lang="en-US" sz="750" dirty="0"/>
+            <a:endParaRPr lang="en-US" sz="950" dirty="0">
+              <a:solidFill>
+                <a:srgbClr val="059669"/>
+              </a:solidFill>
+              <a:latin typeface="monospace" pitchFamily="34" charset="0"/>
+              <a:ea typeface="monospace" pitchFamily="34" charset="-122"/>
+              <a:cs typeface="monospace" pitchFamily="34" charset="-120"/>
+            </a:endParaRPr>
           </a:p>
         </p:txBody>
       </p:sp>
@@ -11727,7 +12207,7 @@
         <p:spPr>
           <a:xfrm>
             <a:off x="3857625" y="3750106"/>
-            <a:ext cx="1900238" cy="320018"/>
+            <a:ext cx="1900238" cy="361315"/>
           </a:xfrm>
           <a:prstGeom prst="rect">
             <a:avLst/>
@@ -11747,7 +12227,7 @@
               <a:buNone/>
             </a:pPr>
             <a:r>
-              <a:rPr lang="en-US" sz="850" dirty="0">
+              <a:rPr lang="en-US" sz="1050" dirty="0">
                 <a:solidFill>
                   <a:srgbClr val="4B5563"/>
                 </a:solidFill>
@@ -11757,7 +12237,14 @@
               </a:rPr>
               <a:t>Overview of the season: total and average goals per match.</a:t>
             </a:r>
-            <a:endParaRPr lang="en-US" sz="850" dirty="0"/>
+            <a:endParaRPr lang="en-US" sz="1050" dirty="0">
+              <a:solidFill>
+                <a:srgbClr val="4B5563"/>
+              </a:solidFill>
+              <a:latin typeface="Inter" pitchFamily="34" charset="0"/>
+              <a:ea typeface="Inter" pitchFamily="34" charset="-122"/>
+              <a:cs typeface="Inter" pitchFamily="34" charset="-120"/>
+            </a:endParaRPr>
           </a:p>
         </p:txBody>
       </p:sp>
@@ -11831,8 +12318,8 @@
         </p:nvSpPr>
         <p:spPr>
           <a:xfrm>
-            <a:off x="6307931" y="3839403"/>
-            <a:ext cx="2150269" cy="720068"/>
+            <a:off x="6271736" y="3753678"/>
+            <a:ext cx="2150269" cy="825500"/>
           </a:xfrm>
           <a:prstGeom prst="rect">
             <a:avLst/>
@@ -11852,7 +12339,7 @@
               <a:buNone/>
             </a:pPr>
             <a:r>
-              <a:rPr lang="en-US" sz="950" dirty="0">
+              <a:rPr lang="en-US" sz="1200" dirty="0">
                 <a:solidFill>
                   <a:srgbClr val="4B5563"/>
                 </a:solidFill>
@@ -11863,7 +12350,7 @@
               <a:t>These endpoints show </a:t>
             </a:r>
             <a:r>
-              <a:rPr lang="en-US" sz="900" dirty="0">
+              <a:rPr lang="en-US" sz="1200" dirty="0">
                 <a:solidFill>
                   <a:srgbClr val="1F2937"/>
                 </a:solidFill>
@@ -11871,21 +12358,10 @@
                 <a:ea typeface="Inter SemiBold" pitchFamily="34" charset="-122"/>
                 <a:cs typeface="Inter SemiBold" pitchFamily="34" charset="-120"/>
               </a:rPr>
-              <a:t>complex </a:t>
-            </a:r>
-            <a:r>
-              <a:rPr lang="en-US" sz="900" dirty="0">
-                <a:solidFill>
-                  <a:srgbClr val="1F2937"/>
-                </a:solidFill>
-                <a:latin typeface="Inter SemiBold" pitchFamily="34" charset="0"/>
-                <a:ea typeface="Inter SemiBold" pitchFamily="34" charset="-122"/>
-                <a:cs typeface="Inter SemiBold" pitchFamily="34" charset="-120"/>
-              </a:rPr>
-              <a:t>data aggregation</a:t>
-            </a:r>
-            <a:r>
-              <a:rPr lang="en-US" sz="950" dirty="0">
+              <a:t>complex data aggregation</a:t>
+            </a:r>
+            <a:r>
+              <a:rPr lang="en-US" sz="1200" dirty="0">
                 <a:solidFill>
                   <a:srgbClr val="4B5563"/>
                 </a:solidFill>
@@ -11893,31 +12369,16 @@
                 <a:ea typeface="Inter" pitchFamily="34" charset="-122"/>
                 <a:cs typeface="Inter" pitchFamily="34" charset="-120"/>
               </a:rPr>
-              <a:t>, transforming </a:t>
-            </a:r>
-            <a:r>
-              <a:rPr lang="en-US" sz="950" dirty="0">
-                <a:solidFill>
-                  <a:srgbClr val="4B5563"/>
-                </a:solidFill>
-                <a:latin typeface="Inter" pitchFamily="34" charset="0"/>
-                <a:ea typeface="Inter" pitchFamily="34" charset="-122"/>
-                <a:cs typeface="Inter" pitchFamily="34" charset="-120"/>
-              </a:rPr>
-              <a:t>raw data into high-level football </a:t>
-            </a:r>
-            <a:r>
-              <a:rPr lang="en-US" sz="950" dirty="0">
-                <a:solidFill>
-                  <a:srgbClr val="4B5563"/>
-                </a:solidFill>
-                <a:latin typeface="Inter" pitchFamily="34" charset="0"/>
-                <a:ea typeface="Inter" pitchFamily="34" charset="-122"/>
-                <a:cs typeface="Inter" pitchFamily="34" charset="-120"/>
-              </a:rPr>
-              <a:t>intelligence.</a:t>
-            </a:r>
-            <a:endParaRPr lang="en-US" sz="950" dirty="0"/>
+              <a:t>, transforming raw data into high-level football intelligence.</a:t>
+            </a:r>
+            <a:endParaRPr lang="en-US" sz="1200" dirty="0">
+              <a:solidFill>
+                <a:srgbClr val="4B5563"/>
+              </a:solidFill>
+              <a:latin typeface="Inter" pitchFamily="34" charset="0"/>
+              <a:ea typeface="Inter" pitchFamily="34" charset="-122"/>
+              <a:cs typeface="Inter" pitchFamily="34" charset="-120"/>
+            </a:endParaRPr>
           </a:p>
         </p:txBody>
       </p:sp>
@@ -11979,7 +12440,7 @@
         <p:spPr>
           <a:xfrm>
             <a:off x="771525" y="433090"/>
-            <a:ext cx="3375422" cy="276820"/>
+            <a:ext cx="3375422" cy="276860"/>
           </a:xfrm>
           <a:prstGeom prst="rect">
             <a:avLst/>
@@ -11996,7 +12457,7 @@
               <a:buNone/>
             </a:pPr>
             <a:r>
-              <a:rPr lang="en-US" sz="1600" b="1" dirty="0">
+              <a:rPr lang="en-US" b="1" dirty="0">
                 <a:solidFill>
                   <a:srgbClr val="1F2937"/>
                 </a:solidFill>
@@ -12006,7 +12467,14 @@
               </a:rPr>
               <a:t>Security: JWT Authentication</a:t>
             </a:r>
-            <a:endParaRPr lang="en-US" sz="1600" dirty="0"/>
+            <a:endParaRPr lang="en-US" b="1" dirty="0">
+              <a:solidFill>
+                <a:srgbClr val="1F2937"/>
+              </a:solidFill>
+              <a:latin typeface="Inter ExtraBold" pitchFamily="34" charset="0"/>
+              <a:ea typeface="Inter ExtraBold" pitchFamily="34" charset="-122"/>
+              <a:cs typeface="Inter ExtraBold" pitchFamily="34" charset="-120"/>
+            </a:endParaRPr>
           </a:p>
         </p:txBody>
       </p:sp>
@@ -12019,7 +12487,7 @@
         <p:spPr>
           <a:xfrm>
             <a:off x="571500" y="857250"/>
-            <a:ext cx="3786188" cy="292894"/>
+            <a:ext cx="3786188" cy="300355"/>
           </a:xfrm>
           <a:prstGeom prst="rect">
             <a:avLst/>
@@ -12036,7 +12504,7 @@
               <a:buNone/>
             </a:pPr>
             <a:r>
-              <a:rPr lang="en-US" sz="1200" kern="0" spc="1" dirty="0">
+              <a:rPr lang="en-US" sz="1400" kern="0" spc="1" dirty="0">
                 <a:solidFill>
                   <a:srgbClr val="2563EB"/>
                 </a:solidFill>
@@ -12046,7 +12514,14 @@
               </a:rPr>
               <a:t>STATELESS MECHANISM</a:t>
             </a:r>
-            <a:endParaRPr lang="en-US" sz="1200" dirty="0"/>
+            <a:endParaRPr lang="en-US" sz="1400" kern="0" spc="1" dirty="0">
+              <a:solidFill>
+                <a:srgbClr val="2563EB"/>
+              </a:solidFill>
+              <a:latin typeface="Inter SemiBold" pitchFamily="34" charset="0"/>
+              <a:ea typeface="Inter SemiBold" pitchFamily="34" charset="-122"/>
+              <a:cs typeface="Inter SemiBold" pitchFamily="34" charset="-120"/>
+            </a:endParaRPr>
           </a:p>
         </p:txBody>
       </p:sp>
@@ -12107,8 +12582,8 @@
         </p:nvSpPr>
         <p:spPr>
           <a:xfrm>
-            <a:off x="978694" y="1535906"/>
-            <a:ext cx="1743075" cy="173236"/>
+            <a:off x="978535" y="1536065"/>
+            <a:ext cx="2284095" cy="184150"/>
           </a:xfrm>
           <a:prstGeom prst="rect">
             <a:avLst/>
@@ -12125,7 +12600,7 @@
               <a:buNone/>
             </a:pPr>
             <a:r>
-              <a:rPr lang="en-US" sz="1000" dirty="0">
+              <a:rPr lang="en-US" sz="1200" dirty="0">
                 <a:solidFill>
                   <a:srgbClr val="1F2937"/>
                 </a:solidFill>
@@ -12135,7 +12610,14 @@
               </a:rPr>
               <a:t>JSON Web Tokens (JWT)</a:t>
             </a:r>
-            <a:endParaRPr lang="en-US" sz="1000" dirty="0"/>
+            <a:endParaRPr lang="en-US" sz="1200" dirty="0">
+              <a:solidFill>
+                <a:srgbClr val="1F2937"/>
+              </a:solidFill>
+              <a:latin typeface="Inter SemiBold" pitchFamily="34" charset="0"/>
+              <a:ea typeface="Inter SemiBold" pitchFamily="34" charset="-122"/>
+              <a:cs typeface="Inter SemiBold" pitchFamily="34" charset="-120"/>
+            </a:endParaRPr>
           </a:p>
         </p:txBody>
       </p:sp>
@@ -12148,7 +12630,7 @@
         <p:spPr>
           <a:xfrm>
             <a:off x="700088" y="1780580"/>
-            <a:ext cx="3529013" cy="731453"/>
+            <a:ext cx="3529013" cy="746125"/>
           </a:xfrm>
           <a:prstGeom prst="rect">
             <a:avLst/>
@@ -12168,7 +12650,7 @@
               <a:buNone/>
             </a:pPr>
             <a:r>
-              <a:rPr lang="en-US" sz="850" dirty="0">
+              <a:rPr lang="en-US" sz="950" dirty="0">
                 <a:solidFill>
                   <a:srgbClr val="4B5563"/>
                 </a:solidFill>
@@ -12179,7 +12661,7 @@
               <a:t>Implemented using </a:t>
             </a:r>
             <a:r>
-              <a:rPr lang="en-US" sz="800" dirty="0">
+              <a:rPr lang="en-US" sz="900" dirty="0">
                 <a:solidFill>
                   <a:srgbClr val="1F2937"/>
                 </a:solidFill>
@@ -12190,7 +12672,7 @@
               <a:t>python-jose</a:t>
             </a:r>
             <a:r>
-              <a:rPr lang="en-US" sz="850" dirty="0">
+              <a:rPr lang="en-US" sz="950" dirty="0">
                 <a:solidFill>
                   <a:srgbClr val="4B5563"/>
                 </a:solidFill>
@@ -12198,10 +12680,10 @@
                 <a:ea typeface="Inter" pitchFamily="34" charset="-122"/>
                 <a:cs typeface="Inter" pitchFamily="34" charset="-120"/>
               </a:rPr>
-              <a:t>. Provides a highly scalable, </a:t>
-            </a:r>
-            <a:r>
-              <a:rPr lang="en-US" sz="850" dirty="0">
+              <a:t>. Provides a highly scalable, stateless authentication mechanism. The server does not need to maintain session state in memory or a database, reducing </a:t>
+            </a:r>
+            <a:r>
+              <a:rPr lang="en-US" sz="950" dirty="0">
                 <a:solidFill>
                   <a:srgbClr val="4B5563"/>
                 </a:solidFill>
@@ -12209,31 +12691,16 @@
                 <a:ea typeface="Inter" pitchFamily="34" charset="-122"/>
                 <a:cs typeface="Inter" pitchFamily="34" charset="-120"/>
               </a:rPr>
-              <a:t>stateless authentication mechanism. The server does not need </a:t>
-            </a:r>
-            <a:r>
-              <a:rPr lang="en-US" sz="850" dirty="0">
-                <a:solidFill>
-                  <a:srgbClr val="4B5563"/>
-                </a:solidFill>
-                <a:latin typeface="Inter" pitchFamily="34" charset="0"/>
-                <a:ea typeface="Inter" pitchFamily="34" charset="-122"/>
-                <a:cs typeface="Inter" pitchFamily="34" charset="-120"/>
-              </a:rPr>
-              <a:t>to maintain session state in memory or a database, reducing </a:t>
-            </a:r>
-            <a:r>
-              <a:rPr lang="en-US" sz="850" dirty="0">
-                <a:solidFill>
-                  <a:srgbClr val="4B5563"/>
-                </a:solidFill>
-                <a:latin typeface="Inter" pitchFamily="34" charset="0"/>
-                <a:ea typeface="Inter" pitchFamily="34" charset="-122"/>
-                <a:cs typeface="Inter" pitchFamily="34" charset="-120"/>
-              </a:rPr>
               <a:t>overhead.</a:t>
             </a:r>
-            <a:endParaRPr lang="en-US" sz="850" dirty="0"/>
+            <a:endParaRPr lang="en-US" sz="950" dirty="0">
+              <a:solidFill>
+                <a:srgbClr val="4B5563"/>
+              </a:solidFill>
+              <a:latin typeface="Inter" pitchFamily="34" charset="0"/>
+              <a:ea typeface="Inter" pitchFamily="34" charset="-122"/>
+              <a:cs typeface="Inter" pitchFamily="34" charset="-120"/>
+            </a:endParaRPr>
           </a:p>
         </p:txBody>
       </p:sp>
@@ -12270,8 +12737,8 @@
         </p:nvSpPr>
         <p:spPr>
           <a:xfrm>
-            <a:off x="807244" y="2883508"/>
-            <a:ext cx="1805583" cy="173236"/>
+            <a:off x="807085" y="2883535"/>
+            <a:ext cx="2284095" cy="184150"/>
           </a:xfrm>
           <a:prstGeom prst="rect">
             <a:avLst/>
@@ -12288,7 +12755,7 @@
               <a:buNone/>
             </a:pPr>
             <a:r>
-              <a:rPr lang="en-US" sz="1000" dirty="0">
+              <a:rPr lang="en-US" sz="1200" dirty="0">
                 <a:solidFill>
                   <a:srgbClr val="1F2937"/>
                 </a:solidFill>
@@ -12298,7 +12765,14 @@
               </a:rPr>
               <a:t>Secure Password Hashing</a:t>
             </a:r>
-            <a:endParaRPr lang="en-US" sz="1000" dirty="0"/>
+            <a:endParaRPr lang="en-US" sz="1200" dirty="0">
+              <a:solidFill>
+                <a:srgbClr val="1F2937"/>
+              </a:solidFill>
+              <a:latin typeface="Inter SemiBold" pitchFamily="34" charset="0"/>
+              <a:ea typeface="Inter SemiBold" pitchFamily="34" charset="-122"/>
+              <a:cs typeface="Inter SemiBold" pitchFamily="34" charset="-120"/>
+            </a:endParaRPr>
           </a:p>
         </p:txBody>
       </p:sp>
@@ -12311,7 +12785,7 @@
         <p:spPr>
           <a:xfrm>
             <a:off x="700088" y="3128181"/>
-            <a:ext cx="3529013" cy="548590"/>
+            <a:ext cx="3529013" cy="559435"/>
           </a:xfrm>
           <a:prstGeom prst="rect">
             <a:avLst/>
@@ -12331,7 +12805,7 @@
               <a:buNone/>
             </a:pPr>
             <a:r>
-              <a:rPr lang="en-US" sz="850" dirty="0">
+              <a:rPr lang="en-US" sz="950" dirty="0">
                 <a:solidFill>
                   <a:srgbClr val="4B5563"/>
                 </a:solidFill>
@@ -12339,21 +12813,10 @@
                 <a:ea typeface="Inter" pitchFamily="34" charset="-122"/>
                 <a:cs typeface="Inter" pitchFamily="34" charset="-120"/>
               </a:rPr>
-              <a:t>Passwords are never stored in plaintext. They are securely </a:t>
-            </a:r>
-            <a:r>
-              <a:rPr lang="en-US" sz="850" dirty="0">
-                <a:solidFill>
-                  <a:srgbClr val="4B5563"/>
-                </a:solidFill>
-                <a:latin typeface="Inter" pitchFamily="34" charset="0"/>
-                <a:ea typeface="Inter" pitchFamily="34" charset="-122"/>
-                <a:cs typeface="Inter" pitchFamily="34" charset="-120"/>
-              </a:rPr>
-              <a:t>hashed using </a:t>
-            </a:r>
-            <a:r>
-              <a:rPr lang="en-US" sz="800" dirty="0">
+              <a:t>Passwords are never stored in plaintext. They are securely hashed using </a:t>
+            </a:r>
+            <a:r>
+              <a:rPr lang="en-US" sz="900" dirty="0">
                 <a:solidFill>
                   <a:srgbClr val="1F2937"/>
                 </a:solidFill>
@@ -12364,7 +12827,7 @@
               <a:t>bcrypt</a:t>
             </a:r>
             <a:r>
-              <a:rPr lang="en-US" sz="850" dirty="0">
+              <a:rPr lang="en-US" sz="950" dirty="0">
                 <a:solidFill>
                   <a:srgbClr val="4B5563"/>
                 </a:solidFill>
@@ -12375,7 +12838,7 @@
               <a:t> before being persisted to the database, </a:t>
             </a:r>
             <a:r>
-              <a:rPr lang="en-US" sz="850" dirty="0">
+              <a:rPr lang="en-US" sz="950" dirty="0">
                 <a:solidFill>
                   <a:srgbClr val="4B5563"/>
                 </a:solidFill>
@@ -12385,7 +12848,14 @@
               </a:rPr>
               <a:t>ensuring protection against data breaches.</a:t>
             </a:r>
-            <a:endParaRPr lang="en-US" sz="850" dirty="0"/>
+            <a:endParaRPr lang="en-US" sz="950" dirty="0">
+              <a:solidFill>
+                <a:srgbClr val="4B5563"/>
+              </a:solidFill>
+              <a:latin typeface="Inter" pitchFamily="34" charset="0"/>
+              <a:ea typeface="Inter" pitchFamily="34" charset="-122"/>
+              <a:cs typeface="Inter" pitchFamily="34" charset="-120"/>
+            </a:endParaRPr>
           </a:p>
         </p:txBody>
       </p:sp>
@@ -12398,7 +12868,7 @@
         <p:spPr>
           <a:xfrm>
             <a:off x="4786313" y="857250"/>
-            <a:ext cx="3786188" cy="292894"/>
+            <a:ext cx="3786188" cy="300355"/>
           </a:xfrm>
           <a:prstGeom prst="rect">
             <a:avLst/>
@@ -12415,7 +12885,7 @@
               <a:buNone/>
             </a:pPr>
             <a:r>
-              <a:rPr lang="en-US" sz="1200" kern="0" spc="1" dirty="0">
+              <a:rPr lang="en-US" sz="1400" kern="0" spc="1" dirty="0">
                 <a:solidFill>
                   <a:srgbClr val="2563EB"/>
                 </a:solidFill>
@@ -12425,7 +12895,14 @@
               </a:rPr>
               <a:t>ROUTE PROTECTION STRATEGY</a:t>
             </a:r>
-            <a:endParaRPr lang="en-US" sz="1200" dirty="0"/>
+            <a:endParaRPr lang="en-US" sz="1400" kern="0" spc="1" dirty="0">
+              <a:solidFill>
+                <a:srgbClr val="2563EB"/>
+              </a:solidFill>
+              <a:latin typeface="Inter SemiBold" pitchFamily="34" charset="0"/>
+              <a:ea typeface="Inter SemiBold" pitchFamily="34" charset="-122"/>
+              <a:cs typeface="Inter SemiBold" pitchFamily="34" charset="-120"/>
+            </a:endParaRPr>
           </a:p>
         </p:txBody>
       </p:sp>
@@ -12487,7 +12964,7 @@
         <p:spPr>
           <a:xfrm>
             <a:off x="5214938" y="1535906"/>
-            <a:ext cx="1155502" cy="173236"/>
+            <a:ext cx="1186180" cy="184150"/>
           </a:xfrm>
           <a:prstGeom prst="rect">
             <a:avLst/>
@@ -12504,7 +12981,7 @@
               <a:buNone/>
             </a:pPr>
             <a:r>
-              <a:rPr lang="en-US" sz="1000" dirty="0">
+              <a:rPr lang="en-US" sz="1200" dirty="0">
                 <a:solidFill>
                   <a:srgbClr val="1F2937"/>
                 </a:solidFill>
@@ -12514,7 +12991,14 @@
               </a:rPr>
               <a:t>Public Endpoints</a:t>
             </a:r>
-            <a:endParaRPr lang="en-US" sz="1000" dirty="0"/>
+            <a:endParaRPr lang="en-US" sz="1200" dirty="0">
+              <a:solidFill>
+                <a:srgbClr val="1F2937"/>
+              </a:solidFill>
+              <a:latin typeface="Inter SemiBold" pitchFamily="34" charset="0"/>
+              <a:ea typeface="Inter SemiBold" pitchFamily="34" charset="-122"/>
+              <a:cs typeface="Inter SemiBold" pitchFamily="34" charset="-120"/>
+            </a:endParaRPr>
           </a:p>
         </p:txBody>
       </p:sp>
@@ -12527,7 +13011,7 @@
         <p:spPr>
           <a:xfrm>
             <a:off x="4914900" y="1780580"/>
-            <a:ext cx="3529013" cy="548590"/>
+            <a:ext cx="3529013" cy="559435"/>
           </a:xfrm>
           <a:prstGeom prst="rect">
             <a:avLst/>
@@ -12547,7 +13031,7 @@
               <a:buNone/>
             </a:pPr>
             <a:r>
-              <a:rPr lang="en-US" sz="850" dirty="0">
+              <a:rPr lang="en-US" sz="950" dirty="0">
                 <a:solidFill>
                   <a:srgbClr val="4B5563"/>
                 </a:solidFill>
@@ -12558,7 +13042,7 @@
               <a:t>All </a:t>
             </a:r>
             <a:r>
-              <a:rPr lang="en-US" sz="800" dirty="0">
+              <a:rPr lang="en-US" sz="900" dirty="0">
                 <a:solidFill>
                   <a:srgbClr val="1F2937"/>
                 </a:solidFill>
@@ -12569,7 +13053,7 @@
               <a:t>GET</a:t>
             </a:r>
             <a:r>
-              <a:rPr lang="en-US" sz="850" dirty="0">
+              <a:rPr lang="en-US" sz="950" dirty="0">
                 <a:solidFill>
                   <a:srgbClr val="4B5563"/>
                 </a:solidFill>
@@ -12577,10 +13061,10 @@
                 <a:ea typeface="Inter" pitchFamily="34" charset="-122"/>
                 <a:cs typeface="Inter" pitchFamily="34" charset="-120"/>
               </a:rPr>
-              <a:t> requests (retrieving teams, players, matches, and </a:t>
-            </a:r>
-            <a:r>
-              <a:rPr lang="en-US" sz="850" dirty="0">
+              <a:t> requests (retrieving teams, players, matches, and analytics) are freely accessible without authentication, allowing </a:t>
+            </a:r>
+            <a:r>
+              <a:rPr lang="en-US" sz="950" dirty="0">
                 <a:solidFill>
                   <a:srgbClr val="4B5563"/>
                 </a:solidFill>
@@ -12588,20 +13072,16 @@
                 <a:ea typeface="Inter" pitchFamily="34" charset="-122"/>
                 <a:cs typeface="Inter" pitchFamily="34" charset="-120"/>
               </a:rPr>
-              <a:t>analytics) are freely accessible without authentication, allowing </a:t>
-            </a:r>
-            <a:r>
-              <a:rPr lang="en-US" sz="850" dirty="0">
-                <a:solidFill>
-                  <a:srgbClr val="4B5563"/>
-                </a:solidFill>
-                <a:latin typeface="Inter" pitchFamily="34" charset="0"/>
-                <a:ea typeface="Inter" pitchFamily="34" charset="-122"/>
-                <a:cs typeface="Inter" pitchFamily="34" charset="-120"/>
-              </a:rPr>
               <a:t>public data consumption.</a:t>
             </a:r>
-            <a:endParaRPr lang="en-US" sz="850" dirty="0"/>
+            <a:endParaRPr lang="en-US" sz="950" dirty="0">
+              <a:solidFill>
+                <a:srgbClr val="4B5563"/>
+              </a:solidFill>
+              <a:latin typeface="Inter" pitchFamily="34" charset="0"/>
+              <a:ea typeface="Inter" pitchFamily="34" charset="-122"/>
+              <a:cs typeface="Inter" pitchFamily="34" charset="-120"/>
+            </a:endParaRPr>
           </a:p>
         </p:txBody>
       </p:sp>
@@ -12662,8 +13142,8 @@
         </p:nvSpPr>
         <p:spPr>
           <a:xfrm>
-            <a:off x="5172075" y="2700644"/>
-            <a:ext cx="1398389" cy="173236"/>
+            <a:off x="5172075" y="2700655"/>
+            <a:ext cx="1747520" cy="184150"/>
           </a:xfrm>
           <a:prstGeom prst="rect">
             <a:avLst/>
@@ -12680,7 +13160,7 @@
               <a:buNone/>
             </a:pPr>
             <a:r>
-              <a:rPr lang="en-US" sz="1000" dirty="0">
+              <a:rPr lang="en-US" sz="1200" dirty="0">
                 <a:solidFill>
                   <a:srgbClr val="1F2937"/>
                 </a:solidFill>
@@ -12690,7 +13170,14 @@
               </a:rPr>
               <a:t>Protected Endpoints</a:t>
             </a:r>
-            <a:endParaRPr lang="en-US" sz="1000" dirty="0"/>
+            <a:endParaRPr lang="en-US" sz="1200" dirty="0">
+              <a:solidFill>
+                <a:srgbClr val="1F2937"/>
+              </a:solidFill>
+              <a:latin typeface="Inter SemiBold" pitchFamily="34" charset="0"/>
+              <a:ea typeface="Inter SemiBold" pitchFamily="34" charset="-122"/>
+              <a:cs typeface="Inter SemiBold" pitchFamily="34" charset="-120"/>
+            </a:endParaRPr>
           </a:p>
         </p:txBody>
       </p:sp>
@@ -12703,7 +13190,7 @@
         <p:spPr>
           <a:xfrm>
             <a:off x="4914900" y="2945318"/>
-            <a:ext cx="3529013" cy="365727"/>
+            <a:ext cx="3529013" cy="372745"/>
           </a:xfrm>
           <a:prstGeom prst="rect">
             <a:avLst/>
@@ -12723,7 +13210,7 @@
               <a:buNone/>
             </a:pPr>
             <a:r>
-              <a:rPr lang="en-US" sz="850" dirty="0">
+              <a:rPr lang="en-US" sz="950" dirty="0">
                 <a:solidFill>
                   <a:srgbClr val="4B5563"/>
                 </a:solidFill>
@@ -12734,7 +13221,7 @@
               <a:t>All write operations (</a:t>
             </a:r>
             <a:r>
-              <a:rPr lang="en-US" sz="800" dirty="0">
+              <a:rPr lang="en-US" sz="900" dirty="0">
                 <a:solidFill>
                   <a:srgbClr val="1F2937"/>
                 </a:solidFill>
@@ -12745,7 +13232,7 @@
               <a:t>POST, PUT, DELETE</a:t>
             </a:r>
             <a:r>
-              <a:rPr lang="en-US" sz="850" dirty="0">
+              <a:rPr lang="en-US" sz="950" dirty="0">
                 <a:solidFill>
                   <a:srgbClr val="4B5563"/>
                 </a:solidFill>
@@ -12756,7 +13243,7 @@
               <a:t>) require a valid JWT </a:t>
             </a:r>
             <a:r>
-              <a:rPr lang="en-US" sz="850" dirty="0">
+              <a:rPr lang="en-US" sz="950" dirty="0">
                 <a:solidFill>
                   <a:srgbClr val="4B5563"/>
                 </a:solidFill>
@@ -12766,7 +13253,14 @@
               </a:rPr>
               <a:t>token passed in the Authorization header.</a:t>
             </a:r>
-            <a:endParaRPr lang="en-US" sz="850" dirty="0"/>
+            <a:endParaRPr lang="en-US" sz="950" dirty="0">
+              <a:solidFill>
+                <a:srgbClr val="4B5563"/>
+              </a:solidFill>
+              <a:latin typeface="Inter" pitchFamily="34" charset="0"/>
+              <a:ea typeface="Inter" pitchFamily="34" charset="-122"/>
+              <a:cs typeface="Inter" pitchFamily="34" charset="-120"/>
+            </a:endParaRPr>
           </a:p>
         </p:txBody>
       </p:sp>
@@ -12804,7 +13298,7 @@
         <p:spPr>
           <a:xfrm>
             <a:off x="4914900" y="3453919"/>
-            <a:ext cx="1428750" cy="323255"/>
+            <a:ext cx="1428750" cy="341630"/>
           </a:xfrm>
           <a:prstGeom prst="rect">
             <a:avLst/>
@@ -12821,7 +13315,7 @@
               <a:buNone/>
             </a:pPr>
             <a:r>
-              <a:rPr lang="en-US" sz="800" dirty="0">
+              <a:rPr lang="en-US" sz="900" dirty="0">
                 <a:solidFill>
                   <a:srgbClr val="1F2937"/>
                 </a:solidFill>
@@ -12831,7 +13325,14 @@
               </a:rPr>
               <a:t>Client Request</a:t>
             </a:r>
-            <a:endParaRPr lang="en-US" sz="800" dirty="0"/>
+            <a:endParaRPr lang="en-US" sz="900" dirty="0">
+              <a:solidFill>
+                <a:srgbClr val="1F2937"/>
+              </a:solidFill>
+              <a:latin typeface="Inter SemiBold" pitchFamily="34" charset="0"/>
+              <a:ea typeface="Inter SemiBold" pitchFamily="34" charset="-122"/>
+              <a:cs typeface="Inter SemiBold" pitchFamily="34" charset="-120"/>
+            </a:endParaRPr>
           </a:p>
         </p:txBody>
       </p:sp>
@@ -12868,7 +13369,7 @@
         <p:spPr>
           <a:xfrm>
             <a:off x="6697266" y="3539644"/>
-            <a:ext cx="1746647" cy="137517"/>
+            <a:ext cx="1746647" cy="146050"/>
           </a:xfrm>
           <a:prstGeom prst="rect">
             <a:avLst/>
@@ -12885,7 +13386,7 @@
               <a:buNone/>
             </a:pPr>
             <a:r>
-              <a:rPr lang="en-US" sz="850" dirty="0">
+              <a:rPr lang="en-US" sz="950" dirty="0">
                 <a:solidFill>
                   <a:srgbClr val="4B5563"/>
                 </a:solidFill>
@@ -12895,7 +13396,14 @@
               </a:rPr>
               <a:t>Includes Bearer Token</a:t>
             </a:r>
-            <a:endParaRPr lang="en-US" sz="850" dirty="0"/>
+            <a:endParaRPr lang="en-US" sz="950" dirty="0">
+              <a:solidFill>
+                <a:srgbClr val="4B5563"/>
+              </a:solidFill>
+              <a:latin typeface="Inter" pitchFamily="34" charset="0"/>
+              <a:ea typeface="Inter" pitchFamily="34" charset="-122"/>
+              <a:cs typeface="Inter" pitchFamily="34" charset="-120"/>
+            </a:endParaRPr>
           </a:p>
         </p:txBody>
       </p:sp>
@@ -12933,7 +13441,7 @@
         <p:spPr>
           <a:xfrm>
             <a:off x="4914900" y="3834324"/>
-            <a:ext cx="1428750" cy="323255"/>
+            <a:ext cx="1428750" cy="341630"/>
           </a:xfrm>
           <a:prstGeom prst="rect">
             <a:avLst/>
@@ -12950,7 +13458,7 @@
               <a:buNone/>
             </a:pPr>
             <a:r>
-              <a:rPr lang="en-US" sz="800" dirty="0">
+              <a:rPr lang="en-US" sz="900" dirty="0">
                 <a:solidFill>
                   <a:srgbClr val="1F2937"/>
                 </a:solidFill>
@@ -12960,7 +13468,14 @@
               </a:rPr>
               <a:t>FastAPI Middleware</a:t>
             </a:r>
-            <a:endParaRPr lang="en-US" sz="800" dirty="0"/>
+            <a:endParaRPr lang="en-US" sz="900" dirty="0">
+              <a:solidFill>
+                <a:srgbClr val="1F2937"/>
+              </a:solidFill>
+              <a:latin typeface="Inter SemiBold" pitchFamily="34" charset="0"/>
+              <a:ea typeface="Inter SemiBold" pitchFamily="34" charset="-122"/>
+              <a:cs typeface="Inter SemiBold" pitchFamily="34" charset="-120"/>
+            </a:endParaRPr>
           </a:p>
         </p:txBody>
       </p:sp>
@@ -12997,7 +13512,7 @@
         <p:spPr>
           <a:xfrm>
             <a:off x="6697266" y="3920049"/>
-            <a:ext cx="1746647" cy="137517"/>
+            <a:ext cx="1746647" cy="146050"/>
           </a:xfrm>
           <a:prstGeom prst="rect">
             <a:avLst/>
@@ -13014,7 +13529,7 @@
               <a:buNone/>
             </a:pPr>
             <a:r>
-              <a:rPr lang="en-US" sz="850" dirty="0">
+              <a:rPr lang="en-US" sz="950" dirty="0">
                 <a:solidFill>
                   <a:srgbClr val="4B5563"/>
                 </a:solidFill>
@@ -13024,7 +13539,14 @@
               </a:rPr>
               <a:t>Validates Signature &amp; Expiry</a:t>
             </a:r>
-            <a:endParaRPr lang="en-US" sz="850" dirty="0"/>
+            <a:endParaRPr lang="en-US" sz="950" dirty="0">
+              <a:solidFill>
+                <a:srgbClr val="4B5563"/>
+              </a:solidFill>
+              <a:latin typeface="Inter" pitchFamily="34" charset="0"/>
+              <a:ea typeface="Inter" pitchFamily="34" charset="-122"/>
+              <a:cs typeface="Inter" pitchFamily="34" charset="-120"/>
+            </a:endParaRPr>
           </a:p>
         </p:txBody>
       </p:sp>
@@ -13062,7 +13584,7 @@
         <p:spPr>
           <a:xfrm>
             <a:off x="4914900" y="4214729"/>
-            <a:ext cx="1428750" cy="323255"/>
+            <a:ext cx="1428750" cy="341630"/>
           </a:xfrm>
           <a:prstGeom prst="rect">
             <a:avLst/>
@@ -13079,7 +13601,7 @@
               <a:buNone/>
             </a:pPr>
             <a:r>
-              <a:rPr lang="en-US" sz="800" dirty="0">
+              <a:rPr lang="en-US" sz="900" dirty="0">
                 <a:solidFill>
                   <a:srgbClr val="1F2937"/>
                 </a:solidFill>
@@ -13089,7 +13611,14 @@
               </a:rPr>
               <a:t>Route Handler</a:t>
             </a:r>
-            <a:endParaRPr lang="en-US" sz="800" dirty="0"/>
+            <a:endParaRPr lang="en-US" sz="900" dirty="0">
+              <a:solidFill>
+                <a:srgbClr val="1F2937"/>
+              </a:solidFill>
+              <a:latin typeface="Inter SemiBold" pitchFamily="34" charset="0"/>
+              <a:ea typeface="Inter SemiBold" pitchFamily="34" charset="-122"/>
+              <a:cs typeface="Inter SemiBold" pitchFamily="34" charset="-120"/>
+            </a:endParaRPr>
           </a:p>
         </p:txBody>
       </p:sp>
@@ -13126,7 +13655,7 @@
         <p:spPr>
           <a:xfrm>
             <a:off x="6715125" y="4300454"/>
-            <a:ext cx="1728788" cy="137517"/>
+            <a:ext cx="1728788" cy="146050"/>
           </a:xfrm>
           <a:prstGeom prst="rect">
             <a:avLst/>
@@ -13143,7 +13672,7 @@
               <a:buNone/>
             </a:pPr>
             <a:r>
-              <a:rPr lang="en-US" sz="850" dirty="0">
+              <a:rPr lang="en-US" sz="950" dirty="0">
                 <a:solidFill>
                   <a:srgbClr val="4B5563"/>
                 </a:solidFill>
@@ -13153,7 +13682,14 @@
               </a:rPr>
               <a:t>Executes DB Operation</a:t>
             </a:r>
-            <a:endParaRPr lang="en-US" sz="850" dirty="0"/>
+            <a:endParaRPr lang="en-US" sz="950" dirty="0">
+              <a:solidFill>
+                <a:srgbClr val="4B5563"/>
+              </a:solidFill>
+              <a:latin typeface="Inter" pitchFamily="34" charset="0"/>
+              <a:ea typeface="Inter" pitchFamily="34" charset="-122"/>
+              <a:cs typeface="Inter" pitchFamily="34" charset="-120"/>
+            </a:endParaRPr>
           </a:p>
         </p:txBody>
       </p:sp>
@@ -13215,7 +13751,7 @@
         <p:spPr>
           <a:xfrm>
             <a:off x="771525" y="433090"/>
-            <a:ext cx="3754041" cy="276820"/>
+            <a:ext cx="3754041" cy="276860"/>
           </a:xfrm>
           <a:prstGeom prst="rect">
             <a:avLst/>
@@ -13232,7 +13768,7 @@
               <a:buNone/>
             </a:pPr>
             <a:r>
-              <a:rPr lang="en-US" sz="1600" b="1" dirty="0">
+              <a:rPr lang="en-US" b="1" dirty="0">
                 <a:solidFill>
                   <a:srgbClr val="1F2937"/>
                 </a:solidFill>
@@ -13242,7 +13778,14 @@
               </a:rPr>
               <a:t>Testing Methodology &amp; Coverage</a:t>
             </a:r>
-            <a:endParaRPr lang="en-US" sz="1600" dirty="0"/>
+            <a:endParaRPr lang="en-US" b="1" dirty="0">
+              <a:solidFill>
+                <a:srgbClr val="1F2937"/>
+              </a:solidFill>
+              <a:latin typeface="Inter ExtraBold" pitchFamily="34" charset="0"/>
+              <a:ea typeface="Inter ExtraBold" pitchFamily="34" charset="-122"/>
+              <a:cs typeface="Inter ExtraBold" pitchFamily="34" charset="-120"/>
+            </a:endParaRPr>
           </a:p>
         </p:txBody>
       </p:sp>
@@ -13255,7 +13798,7 @@
         <p:spPr>
           <a:xfrm>
             <a:off x="571500" y="1143000"/>
-            <a:ext cx="3779044" cy="173236"/>
+            <a:ext cx="3779044" cy="184150"/>
           </a:xfrm>
           <a:prstGeom prst="rect">
             <a:avLst/>
@@ -13272,7 +13815,7 @@
               <a:buNone/>
             </a:pPr>
             <a:r>
-              <a:rPr lang="en-US" sz="1000" kern="0" spc="1" dirty="0">
+              <a:rPr lang="en-US" sz="1200" kern="0" spc="1" dirty="0">
                 <a:solidFill>
                   <a:srgbClr val="2563EB"/>
                 </a:solidFill>
@@ -13282,7 +13825,14 @@
               </a:rPr>
               <a:t>RIGOROUS VALIDATION STRATEGY</a:t>
             </a:r>
-            <a:endParaRPr lang="en-US" sz="1000" dirty="0"/>
+            <a:endParaRPr lang="en-US" sz="1200" kern="0" spc="1" dirty="0">
+              <a:solidFill>
+                <a:srgbClr val="2563EB"/>
+              </a:solidFill>
+              <a:latin typeface="Inter SemiBold" pitchFamily="34" charset="0"/>
+              <a:ea typeface="Inter SemiBold" pitchFamily="34" charset="-122"/>
+              <a:cs typeface="Inter SemiBold" pitchFamily="34" charset="-120"/>
+            </a:endParaRPr>
           </a:p>
         </p:txBody>
       </p:sp>
@@ -13295,7 +13845,7 @@
         <p:spPr>
           <a:xfrm>
             <a:off x="571500" y="1770757"/>
-            <a:ext cx="69038" cy="137517"/>
+            <a:ext cx="114300" cy="138430"/>
           </a:xfrm>
           <a:prstGeom prst="rect">
             <a:avLst/>
@@ -13312,7 +13862,7 @@
               <a:buNone/>
             </a:pPr>
             <a:r>
-              <a:rPr lang="en-US" sz="800" dirty="0">
+              <a:rPr lang="en-US" sz="900" dirty="0">
                 <a:solidFill>
                   <a:srgbClr val="059669"/>
                 </a:solidFill>
@@ -13322,7 +13872,14 @@
               </a:rPr>
               <a:t>■</a:t>
             </a:r>
-            <a:endParaRPr lang="en-US" sz="800" dirty="0"/>
+            <a:endParaRPr lang="en-US" sz="900" dirty="0">
+              <a:solidFill>
+                <a:srgbClr val="059669"/>
+              </a:solidFill>
+              <a:latin typeface="Inter SemiBold" pitchFamily="34" charset="0"/>
+              <a:ea typeface="Inter SemiBold" pitchFamily="34" charset="-122"/>
+              <a:cs typeface="Inter SemiBold" pitchFamily="34" charset="-120"/>
+            </a:endParaRPr>
           </a:p>
         </p:txBody>
       </p:sp>
@@ -13335,7 +13892,7 @@
         <p:spPr>
           <a:xfrm>
             <a:off x="726263" y="1744861"/>
-            <a:ext cx="1782366" cy="189309"/>
+            <a:ext cx="1782366" cy="184150"/>
           </a:xfrm>
           <a:prstGeom prst="rect">
             <a:avLst/>
@@ -13352,7 +13909,7 @@
               <a:buNone/>
             </a:pPr>
             <a:r>
-              <a:rPr lang="en-US" sz="1100" dirty="0">
+              <a:rPr lang="en-US" sz="1200" dirty="0">
                 <a:solidFill>
                   <a:srgbClr val="1F2937"/>
                 </a:solidFill>
@@ -13362,7 +13919,14 @@
               </a:rPr>
               <a:t>Complete Test Isolation</a:t>
             </a:r>
-            <a:endParaRPr lang="en-US" sz="1100" dirty="0"/>
+            <a:endParaRPr lang="en-US" sz="1200" dirty="0">
+              <a:solidFill>
+                <a:srgbClr val="1F2937"/>
+              </a:solidFill>
+              <a:latin typeface="Inter SemiBold" pitchFamily="34" charset="0"/>
+              <a:ea typeface="Inter SemiBold" pitchFamily="34" charset="-122"/>
+              <a:cs typeface="Inter SemiBold" pitchFamily="34" charset="-120"/>
+            </a:endParaRPr>
           </a:p>
         </p:txBody>
       </p:sp>
@@ -13375,7 +13939,7 @@
         <p:spPr>
           <a:xfrm>
             <a:off x="571500" y="1991320"/>
-            <a:ext cx="3779044" cy="548590"/>
+            <a:ext cx="3779044" cy="559435"/>
           </a:xfrm>
           <a:prstGeom prst="rect">
             <a:avLst/>
@@ -13395,7 +13959,7 @@
               <a:buNone/>
             </a:pPr>
             <a:r>
-              <a:rPr lang="en-US" sz="850" dirty="0">
+              <a:rPr lang="en-US" sz="950" dirty="0">
                 <a:solidFill>
                   <a:srgbClr val="4B5563"/>
                 </a:solidFill>
@@ -13406,7 +13970,7 @@
               <a:t>Utilizes a dedicated </a:t>
             </a:r>
             <a:r>
-              <a:rPr lang="en-US" sz="800" dirty="0">
+              <a:rPr lang="en-US" sz="900" dirty="0">
                 <a:solidFill>
                   <a:srgbClr val="1F2937"/>
                 </a:solidFill>
@@ -13417,7 +13981,7 @@
               <a:t>in-memory SQLite database</a:t>
             </a:r>
             <a:r>
-              <a:rPr lang="en-US" sz="850" dirty="0">
+              <a:rPr lang="en-US" sz="950" dirty="0">
                 <a:solidFill>
                   <a:srgbClr val="4B5563"/>
                 </a:solidFill>
@@ -13428,7 +13992,7 @@
               <a:t> (sqlite:///:memory:). Tables are freshly created and dropped for </a:t>
             </a:r>
             <a:r>
-              <a:rPr lang="en-US" sz="850" dirty="0">
+              <a:rPr lang="en-US" sz="950" dirty="0">
                 <a:solidFill>
                   <a:srgbClr val="4B5563"/>
                 </a:solidFill>
@@ -13438,7 +14002,14 @@
               </a:rPr>
               <a:t>every single test to guarantee deterministic results.</a:t>
             </a:r>
-            <a:endParaRPr lang="en-US" sz="850" dirty="0"/>
+            <a:endParaRPr lang="en-US" sz="950" dirty="0">
+              <a:solidFill>
+                <a:srgbClr val="4B5563"/>
+              </a:solidFill>
+              <a:latin typeface="Inter" pitchFamily="34" charset="0"/>
+              <a:ea typeface="Inter" pitchFamily="34" charset="-122"/>
+              <a:cs typeface="Inter" pitchFamily="34" charset="-120"/>
+            </a:endParaRPr>
           </a:p>
         </p:txBody>
       </p:sp>
@@ -13451,7 +14022,7 @@
         <p:spPr>
           <a:xfrm>
             <a:off x="571500" y="2780119"/>
-            <a:ext cx="69038" cy="137517"/>
+            <a:ext cx="114300" cy="138430"/>
           </a:xfrm>
           <a:prstGeom prst="rect">
             <a:avLst/>
@@ -13468,7 +14039,7 @@
               <a:buNone/>
             </a:pPr>
             <a:r>
-              <a:rPr lang="en-US" sz="800" dirty="0">
+              <a:rPr lang="en-US" sz="900" dirty="0">
                 <a:solidFill>
                   <a:srgbClr val="059669"/>
                 </a:solidFill>
@@ -13478,7 +14049,14 @@
               </a:rPr>
               <a:t>■</a:t>
             </a:r>
-            <a:endParaRPr lang="en-US" sz="800" dirty="0"/>
+            <a:endParaRPr lang="en-US" sz="900" dirty="0">
+              <a:solidFill>
+                <a:srgbClr val="059669"/>
+              </a:solidFill>
+              <a:latin typeface="Inter SemiBold" pitchFamily="34" charset="0"/>
+              <a:ea typeface="Inter SemiBold" pitchFamily="34" charset="-122"/>
+              <a:cs typeface="Inter SemiBold" pitchFamily="34" charset="-120"/>
+            </a:endParaRPr>
           </a:p>
         </p:txBody>
       </p:sp>
@@ -13491,7 +14069,7 @@
         <p:spPr>
           <a:xfrm>
             <a:off x="726263" y="2754223"/>
-            <a:ext cx="1744861" cy="189309"/>
+            <a:ext cx="1744861" cy="184150"/>
           </a:xfrm>
           <a:prstGeom prst="rect">
             <a:avLst/>
@@ -13508,7 +14086,7 @@
               <a:buNone/>
             </a:pPr>
             <a:r>
-              <a:rPr lang="en-US" sz="1100" dirty="0">
+              <a:rPr lang="en-US" sz="1200" dirty="0">
                 <a:solidFill>
                   <a:srgbClr val="1F2937"/>
                 </a:solidFill>
@@ -13518,7 +14096,14 @@
               </a:rPr>
               <a:t>Pytest Fixture Injection</a:t>
             </a:r>
-            <a:endParaRPr lang="en-US" sz="1100" dirty="0"/>
+            <a:endParaRPr lang="en-US" sz="1200" dirty="0">
+              <a:solidFill>
+                <a:srgbClr val="1F2937"/>
+              </a:solidFill>
+              <a:latin typeface="Inter SemiBold" pitchFamily="34" charset="0"/>
+              <a:ea typeface="Inter SemiBold" pitchFamily="34" charset="-122"/>
+              <a:cs typeface="Inter SemiBold" pitchFamily="34" charset="-120"/>
+            </a:endParaRPr>
           </a:p>
         </p:txBody>
       </p:sp>
@@ -13531,7 +14116,7 @@
         <p:spPr>
           <a:xfrm>
             <a:off x="571500" y="3000682"/>
-            <a:ext cx="3779044" cy="548590"/>
+            <a:ext cx="3779044" cy="559435"/>
           </a:xfrm>
           <a:prstGeom prst="rect">
             <a:avLst/>
@@ -13551,7 +14136,7 @@
               <a:buNone/>
             </a:pPr>
             <a:r>
-              <a:rPr lang="en-US" sz="850" dirty="0">
+              <a:rPr lang="en-US" sz="950" dirty="0">
                 <a:solidFill>
                   <a:srgbClr val="4B5563"/>
                 </a:solidFill>
@@ -13559,21 +14144,10 @@
                 <a:ea typeface="Inter" pitchFamily="34" charset="-122"/>
                 <a:cs typeface="Inter" pitchFamily="34" charset="-120"/>
               </a:rPr>
-              <a:t>Heavy reliance on fixtures to streamline setup. Fixtures </a:t>
-            </a:r>
-            <a:r>
-              <a:rPr lang="en-US" sz="850" dirty="0">
-                <a:solidFill>
-                  <a:srgbClr val="4B5563"/>
-                </a:solidFill>
-                <a:latin typeface="Inter" pitchFamily="34" charset="0"/>
-                <a:ea typeface="Inter" pitchFamily="34" charset="-122"/>
-                <a:cs typeface="Inter" pitchFamily="34" charset="-120"/>
-              </a:rPr>
-              <a:t>automatically inject </a:t>
-            </a:r>
-            <a:r>
-              <a:rPr lang="en-US" sz="800" dirty="0">
+              <a:t>Heavy reliance on fixtures to streamline setup. Fixtures automatically inject </a:t>
+            </a:r>
+            <a:r>
+              <a:rPr lang="en-US" sz="900" dirty="0">
                 <a:solidFill>
                   <a:srgbClr val="1F2937"/>
                 </a:solidFill>
@@ -13581,101 +14155,165 @@
                 <a:ea typeface="Inter SemiBold" pitchFamily="34" charset="-122"/>
                 <a:cs typeface="Inter SemiBold" pitchFamily="34" charset="-120"/>
               </a:rPr>
-              <a:t>database sessions, TestClients, seed data, </a:t>
-            </a:r>
-            <a:r>
-              <a:rPr lang="en-US" sz="800" dirty="0">
-                <a:solidFill>
-                  <a:srgbClr val="1F2937"/>
+              <a:t>database sessions, TestClients, seed data, and valid JWT headers</a:t>
+            </a:r>
+            <a:r>
+              <a:rPr lang="en-US" sz="950" dirty="0">
+                <a:solidFill>
+                  <a:srgbClr val="4B5563"/>
+                </a:solidFill>
+                <a:latin typeface="Inter" pitchFamily="34" charset="0"/>
+                <a:ea typeface="Inter" pitchFamily="34" charset="-122"/>
+                <a:cs typeface="Inter" pitchFamily="34" charset="-120"/>
+              </a:rPr>
+              <a:t>.</a:t>
+            </a:r>
+            <a:endParaRPr lang="en-US" sz="950" dirty="0">
+              <a:solidFill>
+                <a:srgbClr val="4B5563"/>
+              </a:solidFill>
+              <a:latin typeface="Inter" pitchFamily="34" charset="0"/>
+              <a:ea typeface="Inter" pitchFamily="34" charset="-122"/>
+              <a:cs typeface="Inter" pitchFamily="34" charset="-120"/>
+            </a:endParaRPr>
+          </a:p>
+        </p:txBody>
+      </p:sp>
+      <p:sp>
+        <p:nvSpPr>
+          <p:cNvPr id="11" name="Text 8"/>
+          <p:cNvSpPr/>
+          <p:nvPr/>
+        </p:nvSpPr>
+        <p:spPr>
+          <a:xfrm>
+            <a:off x="571500" y="3789480"/>
+            <a:ext cx="114300" cy="138430"/>
+          </a:xfrm>
+          <a:prstGeom prst="rect">
+            <a:avLst/>
+          </a:prstGeom>
+          <a:noFill/>
+        </p:spPr>
+        <p:txBody>
+          <a:bodyPr wrap="none" lIns="0" tIns="0" rIns="0" bIns="0" rtlCol="0" anchor="t">
+            <a:spAutoFit/>
+          </a:bodyPr>
+          <a:lstStyle/>
+          <a:p>
+            <a:pPr marL="0" indent="0" algn="l">
+              <a:buNone/>
+            </a:pPr>
+            <a:r>
+              <a:rPr lang="en-US" sz="900" dirty="0">
+                <a:solidFill>
+                  <a:srgbClr val="059669"/>
                 </a:solidFill>
                 <a:latin typeface="Inter SemiBold" pitchFamily="34" charset="0"/>
                 <a:ea typeface="Inter SemiBold" pitchFamily="34" charset="-122"/>
                 <a:cs typeface="Inter SemiBold" pitchFamily="34" charset="-120"/>
               </a:rPr>
-              <a:t>and valid JWT headers</a:t>
-            </a:r>
-            <a:r>
-              <a:rPr lang="en-US" sz="850" dirty="0">
-                <a:solidFill>
-                  <a:srgbClr val="4B5563"/>
-                </a:solidFill>
-                <a:latin typeface="Inter" pitchFamily="34" charset="0"/>
-                <a:ea typeface="Inter" pitchFamily="34" charset="-122"/>
-                <a:cs typeface="Inter" pitchFamily="34" charset="-120"/>
-              </a:rPr>
-              <a:t>.</a:t>
-            </a:r>
-            <a:endParaRPr lang="en-US" sz="850" dirty="0"/>
-          </a:p>
-        </p:txBody>
-      </p:sp>
-      <p:sp>
-        <p:nvSpPr>
-          <p:cNvPr id="11" name="Text 8"/>
-          <p:cNvSpPr/>
-          <p:nvPr/>
-        </p:nvSpPr>
-        <p:spPr>
-          <a:xfrm>
-            <a:off x="571500" y="3789480"/>
-            <a:ext cx="69038" cy="137517"/>
-          </a:xfrm>
-          <a:prstGeom prst="rect">
-            <a:avLst/>
-          </a:prstGeom>
-          <a:noFill/>
-        </p:spPr>
-        <p:txBody>
-          <a:bodyPr wrap="none" lIns="0" tIns="0" rIns="0" bIns="0" rtlCol="0" anchor="t">
-            <a:spAutoFit/>
-          </a:bodyPr>
-          <a:lstStyle/>
-          <a:p>
-            <a:pPr marL="0" indent="0" algn="l">
-              <a:buNone/>
-            </a:pPr>
-            <a:r>
-              <a:rPr lang="en-US" sz="800" dirty="0">
-                <a:solidFill>
-                  <a:srgbClr val="059669"/>
+              <a:t>■</a:t>
+            </a:r>
+            <a:endParaRPr lang="en-US" sz="900" dirty="0">
+              <a:solidFill>
+                <a:srgbClr val="059669"/>
+              </a:solidFill>
+              <a:latin typeface="Inter SemiBold" pitchFamily="34" charset="0"/>
+              <a:ea typeface="Inter SemiBold" pitchFamily="34" charset="-122"/>
+              <a:cs typeface="Inter SemiBold" pitchFamily="34" charset="-120"/>
+            </a:endParaRPr>
+          </a:p>
+        </p:txBody>
+      </p:sp>
+      <p:sp>
+        <p:nvSpPr>
+          <p:cNvPr id="12" name="Text 9"/>
+          <p:cNvSpPr/>
+          <p:nvPr/>
+        </p:nvSpPr>
+        <p:spPr>
+          <a:xfrm>
+            <a:off x="726263" y="3763584"/>
+            <a:ext cx="2173486" cy="184150"/>
+          </a:xfrm>
+          <a:prstGeom prst="rect">
+            <a:avLst/>
+          </a:prstGeom>
+          <a:noFill/>
+        </p:spPr>
+        <p:txBody>
+          <a:bodyPr wrap="square" lIns="0" tIns="0" rIns="0" bIns="0" rtlCol="0" anchor="t">
+            <a:spAutoFit/>
+          </a:bodyPr>
+          <a:lstStyle/>
+          <a:p>
+            <a:pPr marL="0" indent="0" algn="l">
+              <a:buNone/>
+            </a:pPr>
+            <a:r>
+              <a:rPr lang="en-US" sz="1200" dirty="0">
+                <a:solidFill>
+                  <a:srgbClr val="1F2937"/>
                 </a:solidFill>
                 <a:latin typeface="Inter SemiBold" pitchFamily="34" charset="0"/>
                 <a:ea typeface="Inter SemiBold" pitchFamily="34" charset="-122"/>
                 <a:cs typeface="Inter SemiBold" pitchFamily="34" charset="-120"/>
               </a:rPr>
-              <a:t>■</a:t>
-            </a:r>
-            <a:endParaRPr lang="en-US" sz="800" dirty="0"/>
-          </a:p>
-        </p:txBody>
-      </p:sp>
-      <p:sp>
-        <p:nvSpPr>
-          <p:cNvPr id="12" name="Text 9"/>
-          <p:cNvSpPr/>
-          <p:nvPr/>
-        </p:nvSpPr>
-        <p:spPr>
-          <a:xfrm>
-            <a:off x="726263" y="3763584"/>
-            <a:ext cx="2173486" cy="189309"/>
-          </a:xfrm>
-          <a:prstGeom prst="rect">
-            <a:avLst/>
-          </a:prstGeom>
-          <a:noFill/>
-        </p:spPr>
-        <p:txBody>
-          <a:bodyPr wrap="square" lIns="0" tIns="0" rIns="0" bIns="0" rtlCol="0" anchor="t">
-            <a:spAutoFit/>
-          </a:bodyPr>
-          <a:lstStyle/>
-          <a:p>
-            <a:pPr marL="0" indent="0" algn="l">
-              <a:buNone/>
-            </a:pPr>
-            <a:r>
-              <a:rPr lang="en-US" sz="1100" dirty="0">
+              <a:t>Explicit Edge Case Coverage</a:t>
+            </a:r>
+            <a:endParaRPr lang="en-US" sz="1200" dirty="0">
+              <a:solidFill>
+                <a:srgbClr val="1F2937"/>
+              </a:solidFill>
+              <a:latin typeface="Inter SemiBold" pitchFamily="34" charset="0"/>
+              <a:ea typeface="Inter SemiBold" pitchFamily="34" charset="-122"/>
+              <a:cs typeface="Inter SemiBold" pitchFamily="34" charset="-120"/>
+            </a:endParaRPr>
+          </a:p>
+        </p:txBody>
+      </p:sp>
+      <p:sp>
+        <p:nvSpPr>
+          <p:cNvPr id="13" name="Text 10"/>
+          <p:cNvSpPr/>
+          <p:nvPr/>
+        </p:nvSpPr>
+        <p:spPr>
+          <a:xfrm>
+            <a:off x="571500" y="4010044"/>
+            <a:ext cx="3779044" cy="559435"/>
+          </a:xfrm>
+          <a:prstGeom prst="rect">
+            <a:avLst/>
+          </a:prstGeom>
+          <a:noFill/>
+        </p:spPr>
+        <p:txBody>
+          <a:bodyPr wrap="square" lIns="238125" tIns="0" rIns="0" bIns="0" rtlCol="0" anchor="t">
+            <a:spAutoFit/>
+          </a:bodyPr>
+          <a:lstStyle/>
+          <a:p>
+            <a:pPr marL="0" indent="0" algn="l">
+              <a:lnSpc>
+                <a:spcPct val="128000"/>
+              </a:lnSpc>
+              <a:buNone/>
+            </a:pPr>
+            <a:r>
+              <a:rPr lang="en-US" sz="950" dirty="0">
+                <a:solidFill>
+                  <a:srgbClr val="4B5563"/>
+                </a:solidFill>
+                <a:latin typeface="Inter" pitchFamily="34" charset="0"/>
+                <a:ea typeface="Inter" pitchFamily="34" charset="-122"/>
+                <a:cs typeface="Inter" pitchFamily="34" charset="-120"/>
+              </a:rPr>
+              <a:t>Tests explicitly validate HTTP status codes (200, 201, 400, 401, 403, 404, 422) and handle edge cases like </a:t>
+            </a:r>
+            <a:r>
+              <a:rPr lang="en-US" sz="900" dirty="0">
                 <a:solidFill>
                   <a:srgbClr val="1F2937"/>
                 </a:solidFill>
@@ -13683,42 +14321,10 @@
                 <a:ea typeface="Inter SemiBold" pitchFamily="34" charset="-122"/>
                 <a:cs typeface="Inter SemiBold" pitchFamily="34" charset="-120"/>
               </a:rPr>
-              <a:t>Explicit Edge Case Coverage</a:t>
-            </a:r>
-            <a:endParaRPr lang="en-US" sz="1100" dirty="0"/>
-          </a:p>
-        </p:txBody>
-      </p:sp>
-      <p:sp>
-        <p:nvSpPr>
-          <p:cNvPr id="13" name="Text 10"/>
-          <p:cNvSpPr/>
-          <p:nvPr/>
-        </p:nvSpPr>
-        <p:spPr>
-          <a:xfrm>
-            <a:off x="571500" y="4010044"/>
-            <a:ext cx="3779044" cy="548590"/>
-          </a:xfrm>
-          <a:prstGeom prst="rect">
-            <a:avLst/>
-          </a:prstGeom>
-          <a:noFill/>
-        </p:spPr>
-        <p:txBody>
-          <a:bodyPr wrap="square" lIns="238125" tIns="0" rIns="0" bIns="0" rtlCol="0" anchor="t">
-            <a:spAutoFit/>
-          </a:bodyPr>
-          <a:lstStyle/>
-          <a:p>
-            <a:pPr marL="0" indent="0" algn="l">
-              <a:lnSpc>
-                <a:spcPct val="128000"/>
-              </a:lnSpc>
-              <a:buNone/>
-            </a:pPr>
-            <a:r>
-              <a:rPr lang="en-US" sz="850" dirty="0">
+              <a:t>invalid foreign keys and duplicate registrations</a:t>
+            </a:r>
+            <a:r>
+              <a:rPr lang="en-US" sz="950" dirty="0">
                 <a:solidFill>
                   <a:srgbClr val="4B5563"/>
                 </a:solidFill>
@@ -13726,53 +14332,16 @@
                 <a:ea typeface="Inter" pitchFamily="34" charset="-122"/>
                 <a:cs typeface="Inter" pitchFamily="34" charset="-120"/>
               </a:rPr>
-              <a:t>Tests explicitly validate HTTP status codes (200, 201, 400, 401, </a:t>
-            </a:r>
-            <a:r>
-              <a:rPr lang="en-US" sz="850" dirty="0">
-                <a:solidFill>
-                  <a:srgbClr val="4B5563"/>
-                </a:solidFill>
-                <a:latin typeface="Inter" pitchFamily="34" charset="0"/>
-                <a:ea typeface="Inter" pitchFamily="34" charset="-122"/>
-                <a:cs typeface="Inter" pitchFamily="34" charset="-120"/>
-              </a:rPr>
-              <a:t>403, 404, 422) and handle edge cases like </a:t>
-            </a:r>
-            <a:r>
-              <a:rPr lang="en-US" sz="800" dirty="0">
-                <a:solidFill>
-                  <a:srgbClr val="1F2937"/>
-                </a:solidFill>
-                <a:latin typeface="Inter SemiBold" pitchFamily="34" charset="0"/>
-                <a:ea typeface="Inter SemiBold" pitchFamily="34" charset="-122"/>
-                <a:cs typeface="Inter SemiBold" pitchFamily="34" charset="-120"/>
-              </a:rPr>
-              <a:t>invalid foreign keys </a:t>
-            </a:r>
-            <a:r>
-              <a:rPr lang="en-US" sz="800" dirty="0">
-                <a:solidFill>
-                  <a:srgbClr val="1F2937"/>
-                </a:solidFill>
-                <a:latin typeface="Inter SemiBold" pitchFamily="34" charset="0"/>
-                <a:ea typeface="Inter SemiBold" pitchFamily="34" charset="-122"/>
-                <a:cs typeface="Inter SemiBold" pitchFamily="34" charset="-120"/>
-              </a:rPr>
-              <a:t>and duplicate registrations</a:t>
-            </a:r>
-            <a:r>
-              <a:rPr lang="en-US" sz="850" dirty="0">
-                <a:solidFill>
-                  <a:srgbClr val="4B5563"/>
-                </a:solidFill>
-                <a:latin typeface="Inter" pitchFamily="34" charset="0"/>
-                <a:ea typeface="Inter" pitchFamily="34" charset="-122"/>
-                <a:cs typeface="Inter" pitchFamily="34" charset="-120"/>
-              </a:rPr>
               <a:t>.</a:t>
             </a:r>
-            <a:endParaRPr lang="en-US" sz="850" dirty="0"/>
+            <a:endParaRPr lang="en-US" sz="950" dirty="0">
+              <a:solidFill>
+                <a:srgbClr val="4B5563"/>
+              </a:solidFill>
+              <a:latin typeface="Inter" pitchFamily="34" charset="0"/>
+              <a:ea typeface="Inter" pitchFamily="34" charset="-122"/>
+              <a:cs typeface="Inter" pitchFamily="34" charset="-120"/>
+            </a:endParaRPr>
           </a:p>
         </p:txBody>
       </p:sp>
@@ -13810,7 +14379,7 @@
         <p:spPr>
           <a:xfrm>
             <a:off x="5579269" y="1699320"/>
-            <a:ext cx="2200275" cy="173236"/>
+            <a:ext cx="2200275" cy="184150"/>
           </a:xfrm>
           <a:prstGeom prst="rect">
             <a:avLst/>
@@ -13827,7 +14396,7 @@
               <a:buNone/>
             </a:pPr>
             <a:r>
-              <a:rPr lang="en-US" sz="1000" kern="0" spc="1" dirty="0">
+              <a:rPr lang="en-US" sz="1200" kern="0" spc="1" dirty="0">
                 <a:solidFill>
                   <a:srgbClr val="2563EB"/>
                 </a:solidFill>
@@ -13837,7 +14406,14 @@
               </a:rPr>
               <a:t>45-TEST SUITE BREAKDOWN</a:t>
             </a:r>
-            <a:endParaRPr lang="en-US" sz="1000" dirty="0"/>
+            <a:endParaRPr lang="en-US" sz="1200" kern="0" spc="1" dirty="0">
+              <a:solidFill>
+                <a:srgbClr val="2563EB"/>
+              </a:solidFill>
+              <a:latin typeface="Inter SemiBold" pitchFamily="34" charset="0"/>
+              <a:ea typeface="Inter SemiBold" pitchFamily="34" charset="-122"/>
+              <a:cs typeface="Inter SemiBold" pitchFamily="34" charset="-120"/>
+            </a:endParaRPr>
           </a:p>
         </p:txBody>
       </p:sp>
@@ -13873,8 +14449,8 @@
         </p:nvSpPr>
         <p:spPr>
           <a:xfrm>
-            <a:off x="6308824" y="3194149"/>
-            <a:ext cx="741164" cy="342900"/>
+            <a:off x="6465411" y="3194149"/>
+            <a:ext cx="427990" cy="344170"/>
           </a:xfrm>
           <a:prstGeom prst="rect">
             <a:avLst/>
@@ -13894,7 +14470,7 @@
               <a:buNone/>
             </a:pPr>
             <a:r>
-              <a:rPr lang="en-US" sz="2450" b="1" dirty="0">
+              <a:rPr lang="en-US" sz="2800" b="1" dirty="0">
                 <a:solidFill>
                   <a:srgbClr val="1F2937"/>
                 </a:solidFill>
@@ -13904,7 +14480,14 @@
               </a:rPr>
               <a:t>45</a:t>
             </a:r>
-            <a:endParaRPr lang="en-US" sz="2450" dirty="0"/>
+            <a:endParaRPr lang="en-US" sz="2800" b="1" dirty="0">
+              <a:solidFill>
+                <a:srgbClr val="1F2937"/>
+              </a:solidFill>
+              <a:latin typeface="Inter ExtraBold" pitchFamily="34" charset="0"/>
+              <a:ea typeface="Inter ExtraBold" pitchFamily="34" charset="-122"/>
+              <a:cs typeface="Inter ExtraBold" pitchFamily="34" charset="-120"/>
+            </a:endParaRPr>
           </a:p>
         </p:txBody>
       </p:sp>
@@ -13916,8 +14499,8 @@
         </p:nvSpPr>
         <p:spPr>
           <a:xfrm>
-            <a:off x="6308824" y="3572768"/>
-            <a:ext cx="741164" cy="121444"/>
+            <a:off x="6317139" y="3572768"/>
+            <a:ext cx="724535" cy="130175"/>
           </a:xfrm>
           <a:prstGeom prst="rect">
             <a:avLst/>
@@ -13934,7 +14517,7 @@
               <a:buNone/>
             </a:pPr>
             <a:r>
-              <a:rPr lang="en-US" sz="750" kern="0" spc="1" dirty="0">
+              <a:rPr lang="en-US" sz="850" kern="0" spc="1" dirty="0">
                 <a:solidFill>
                   <a:srgbClr val="4B5563"/>
                 </a:solidFill>
@@ -13944,7 +14527,14 @@
               </a:rPr>
               <a:t>TOTAL TESTS</a:t>
             </a:r>
-            <a:endParaRPr lang="en-US" sz="750" dirty="0"/>
+            <a:endParaRPr lang="en-US" sz="850" kern="0" spc="1" dirty="0">
+              <a:solidFill>
+                <a:srgbClr val="4B5563"/>
+              </a:solidFill>
+              <a:latin typeface="Inter" pitchFamily="34" charset="0"/>
+              <a:ea typeface="Inter" pitchFamily="34" charset="-122"/>
+              <a:cs typeface="Inter" pitchFamily="34" charset="-120"/>
+            </a:endParaRPr>
           </a:p>
         </p:txBody>
       </p:sp>
